--- a/cours/04-jour2-apres-midi/visualisation-mini.pptx
+++ b/cours/04-jour2-apres-midi/visualisation-mini.pptx
@@ -20,9 +20,10 @@
     <p:sldId id="268" r:id="rId14"/>
     <p:sldId id="269" r:id="rId15"/>
     <p:sldId id="270" r:id="rId16"/>
+    <p:sldId id="271" r:id="rId17"/>
   </p:sldIdLst>
   <p:notesMasterIdLst>
-    <p:notesMasterId r:id="rId17"/>
+    <p:notesMasterId r:id="rId18"/>
   </p:notesMasterIdLst>
   <p:sldSz cx="12192000" cy="6858000"/>
   <p:notesSz cx="6858000" cy="12192000"/>
@@ -604,7 +605,7 @@
           <a:p>
             <a:r>
               <a:rPr lang="en-US" dirty="0"/>
-              <a:t>Faire la démonstration en direct : survoler un point, zoomer sur une période, cliquer sur une région dans la légende pour la masquer. Six courbes superposées sont illisibles en statique, mais restent exploitables en interactif.</a:t>
+              <a:t>La boîte résume une distribution : médiane, moitié centrale des valeurs, points extrêmes. La heatmap croise deux dimensions (régions et mois) et fait ressortir l'été d'un coup d'œil. Ce sont les questions 2.1 et 2.2 du TP mini.</a:t>
             </a:r>
             <a:endParaRPr lang="en-US" dirty="0"/>
           </a:p>
@@ -692,7 +693,7 @@
           <a:p>
             <a:r>
               <a:rPr lang="en-US" dirty="0"/>
-              <a:t/>
+              <a:t>Faire la démonstration en direct : survoler un point, zoomer sur une période, cliquer sur une région dans la légende pour la masquer. Six courbes superposées sont illisibles en statique, mais restent exploitables en interactif.</a:t>
             </a:r>
             <a:endParaRPr lang="en-US" dirty="0"/>
           </a:p>
@@ -780,7 +781,7 @@
           <a:p>
             <a:r>
               <a:rPr lang="en-US" dirty="0"/>
-              <a:t>Partir de la question posée, pas du graphique. Comment ça évolue ? une courbe. Qui fait le plus ? des barres triées. Comment se répartissent les valeurs ? un histogramme ou une boîte. Deux grandeurs sont-elles liées ? un nuage. Deux dimensions croisées ? une heatmap.</a:t>
+              <a:t/>
             </a:r>
             <a:endParaRPr lang="en-US" dirty="0"/>
           </a:p>
@@ -868,7 +869,7 @@
           <a:p>
             <a:r>
               <a:rPr lang="en-US" dirty="0"/>
-              <a:t>L'axe tronqué est le piège le plus fréquent : c'est la question facultative 4.1 du TP mini.</a:t>
+              <a:t>Partir de la question posée, pas du graphique. Comment ça évolue ? une courbe. Qui fait le plus ? des barres triées. Comment se répartissent les valeurs ? un histogramme ou une boîte. Deux grandeurs sont-elles liées ? un nuage. Deux dimensions croisées ? une heatmap.</a:t>
             </a:r>
             <a:endParaRPr lang="en-US" dirty="0"/>
           </a:p>
@@ -956,7 +957,7 @@
           <a:p>
             <a:r>
               <a:rPr lang="en-US" dirty="0"/>
-              <a:t>Environ 30 minutes, à peu près 10 minutes par bibliothèque. Les agrégats mensuel et par_region sont fournis dans la cellule de chargement pour aller vite. Réponses : 2.1, le bureau a les commandes les plus élevées, jusqu'à près de 2 000 euros ; 2.2, en juillet et en août presque toutes les régions sont sous l'objectif, seule la Bretagne l'atteint en juillet ; 3.2, le HTML reste interactif ; 4.1, l'axe commence à 150 euros, le panier de la Nouvelle-Aquitaine paraît cinq fois plus grand que celui des Hauts-de-France alors qu'il n'est que 37 % plus élevé.</a:t>
+              <a:t>L'axe tronqué est le piège le plus fréquent : c'est la question facultative 4.1 du TP mini.</a:t>
             </a:r>
             <a:endParaRPr lang="en-US" dirty="0"/>
           </a:p>
@@ -1044,7 +1045,7 @@
           <a:p>
             <a:r>
               <a:rPr lang="en-US" dirty="0"/>
-              <a:t>Pour aller plus loin : le cours complet visualisation.pptx et le TP4 tableau de bord.</a:t>
+              <a:t>Environ 30 minutes, à peu près 10 minutes par bibliothèque. Les agrégats mensuel et par_region sont fournis dans la cellule de chargement pour aller vite. Réponses : 2.1, le bureau a les commandes les plus élevées, jusqu'à près de 2 000 euros ; 2.2, en juillet et en août presque toutes les régions sont sous l'objectif, seule la Bretagne l'atteint en juillet ; 3.2, le HTML reste interactif ; 4.1, l'axe commence à 150 euros, le panier de la Nouvelle-Aquitaine paraît cinq fois plus grand que celui des Hauts-de-France alors qu'il n'est que 37 % plus élevé.</a:t>
             </a:r>
             <a:endParaRPr lang="en-US" dirty="0"/>
           </a:p>
@@ -1068,6 +1069,94 @@
             <a:fld id="{F7021451-1387-4CA6-816F-3879F97B5CBC}" type="slidenum">
               <a:rPr lang="en-US"/>
               <a:t>15</a:t>
+            </a:fld>
+            <a:endParaRPr lang="en-US"/>
+          </a:p>
+        </p:txBody>
+      </p:sp>
+    </p:spTree>
+    <p:extLst>
+      <p:ext uri="{BB962C8B-B14F-4D97-AF65-F5344CB8AC3E}">
+        <p14:creationId xmlns:p14="http://schemas.microsoft.com/office/powerpoint/2010/main" val="1024086991"/>
+      </p:ext>
+    </p:extLst>
+  </p:cSld>
+  <p:clrMapOvr>
+    <a:masterClrMapping/>
+  </p:clrMapOvr>
+</p:notes>
+</file>
+
+<file path=ppt/notesSlides/notesSlide16.xml><?xml version="1.0" encoding="utf-8"?>
+<p:notes xmlns:a="http://schemas.openxmlformats.org/drawingml/2006/main" xmlns:r="http://schemas.openxmlformats.org/officeDocument/2006/relationships" xmlns:p="http://schemas.openxmlformats.org/presentationml/2006/main">
+  <p:cSld>
+    <p:spTree>
+      <p:nvGrpSpPr>
+        <p:cNvPr id="1" name=""/>
+        <p:cNvGrpSpPr/>
+        <p:nvPr/>
+      </p:nvGrpSpPr>
+      <p:grpSpPr>
+        <a:xfrm>
+          <a:off x="0" y="0"/>
+          <a:ext cx="0" cy="0"/>
+          <a:chOff x="0" y="0"/>
+          <a:chExt cx="0" cy="0"/>
+        </a:xfrm>
+      </p:grpSpPr>
+      <p:sp>
+        <p:nvSpPr>
+          <p:cNvPr id="2" name="Slide Image Placeholder 1"/>
+          <p:cNvSpPr>
+            <a:spLocks noGrp="1" noRot="1" noChangeAspect="1"/>
+          </p:cNvSpPr>
+          <p:nvPr>
+            <p:ph type="sldImg"/>
+          </p:nvPr>
+        </p:nvSpPr>
+        <p:spPr/>
+      </p:sp>
+      <p:sp>
+        <p:nvSpPr>
+          <p:cNvPr id="3" name="Notes Placeholder 2"/>
+          <p:cNvSpPr>
+            <a:spLocks noGrp="1"/>
+          </p:cNvSpPr>
+          <p:nvPr>
+            <p:ph type="body" idx="1"/>
+          </p:nvPr>
+        </p:nvSpPr>
+        <p:spPr/>
+        <p:txBody>
+          <a:bodyPr/>
+          <a:lstStyle/>
+          <a:p>
+            <a:r>
+              <a:rPr lang="en-US" dirty="0"/>
+              <a:t>Pour aller plus loin : le cours complet visualisation.pptx et le TP4 tableau de bord.</a:t>
+            </a:r>
+            <a:endParaRPr lang="en-US" dirty="0"/>
+          </a:p>
+        </p:txBody>
+      </p:sp>
+      <p:sp>
+        <p:nvSpPr>
+          <p:cNvPr id="4" name="Slide Number Placeholder 3"/>
+          <p:cNvSpPr>
+            <a:spLocks noGrp="1"/>
+          </p:cNvSpPr>
+          <p:nvPr>
+            <p:ph type="sldNum" sz="quarter" idx="10"/>
+          </p:nvPr>
+        </p:nvSpPr>
+        <p:spPr/>
+        <p:txBody>
+          <a:bodyPr/>
+          <a:lstStyle/>
+          <a:p>
+            <a:fld id="{F7021451-1387-4CA6-816F-3879F97B5CBC}" type="slidenum">
+              <a:rPr lang="en-US"/>
+              <a:t>16</a:t>
             </a:fld>
             <a:endParaRPr lang="en-US"/>
           </a:p>
@@ -1660,7 +1749,7 @@
           <a:p>
             <a:r>
               <a:rPr lang="en-US" dirty="0"/>
-              <a:t>Toujours écrire fig, ax = plt.subplots() plutôt que plt.plot : c'est l'écriture qui reste lisible dès qu'il y a plusieurs graphiques. Raccourci pandas : mensuel.plot() appelle matplotlib.</a:t>
+              <a:t>Pas besoin d'importer autre chose que pandas (matplotlib doit seulement être installé). Les dates en abscisse et le nom des axes sont gérés tout seuls, mais l'axe ne part pas de zéro et les montants se chevauchent sur les barres : c'est la transition vers matplotlib. Pour un rendu interactif, pd.options.plotting.backend = "plotly" fait renvoyer à .plot() une figure plotly. C'est la question 0.1 du TP mini.</a:t>
             </a:r>
             <a:endParaRPr lang="en-US" dirty="0"/>
           </a:p>
@@ -1748,7 +1837,7 @@
           <a:p>
             <a:r>
               <a:rPr lang="en-US" dirty="0"/>
-              <a:t>La boîte résume une distribution : médiane, moitié centrale des valeurs, points extrêmes. La heatmap croise deux dimensions (régions et mois) et fait ressortir l'été d'un coup d'œil. Ce sont les questions 2.1 et 2.2 du TP mini.</a:t>
+              <a:t>Toujours écrire fig, ax = plt.subplots() plutôt que plt.plot : c'est l'écriture qui reste lisible dès qu'il y a plusieurs graphiques. Raccourci pandas : mensuel.plot() appelle matplotlib.</a:t>
             </a:r>
             <a:endParaRPr lang="en-US" dirty="0"/>
           </a:p>
@@ -2536,7 +2625,7 @@
                 <a:ea typeface="Cambria" pitchFamily="34" charset="-122"/>
                 <a:cs typeface="Cambria" pitchFamily="34" charset="-120"/>
               </a:rPr>
-              <a:t>plotly : explorer à la souris</a:t>
+              <a:t>seaborn : des statistiques en une ligne</a:t>
             </a:r>
             <a:endParaRPr lang="en-US" sz="3000" dirty="0"/>
           </a:p>
@@ -2551,7 +2640,7 @@
         <p:spPr>
           <a:xfrm>
             <a:off x="548640" y="1417320"/>
-            <a:ext cx="4835098" cy="2090928"/>
+            <a:ext cx="5318608" cy="1131824"/>
           </a:xfrm>
           <a:prstGeom prst="rect">
             <a:avLst/>
@@ -2571,7 +2660,7 @@
         <p:spPr>
           <a:xfrm>
             <a:off x="731520" y="1563624"/>
-            <a:ext cx="4469338" cy="1798320"/>
+            <a:ext cx="4952848" cy="839216"/>
           </a:xfrm>
           <a:prstGeom prst="rect">
             <a:avLst/>
@@ -2590,7 +2679,7 @@
               <a:buNone/>
             </a:pPr>
             <a:r>
-              <a:rPr lang="en-US" sz="1500" dirty="0">
+              <a:rPr lang="en-US" sz="1400" dirty="0">
                 <a:solidFill>
                   <a:srgbClr val="1F2933"/>
                 </a:solidFill>
@@ -2598,9 +2687,9 @@
                 <a:ea typeface="Courier New" pitchFamily="34" charset="-122"/>
                 <a:cs typeface="Courier New" pitchFamily="34" charset="-120"/>
               </a:rPr>
-              <a:t>fig = px.line(</a:t>
-            </a:r>
-            <a:endParaRPr lang="en-US" sz="1500" dirty="0"/>
+              <a:t>sns.set_theme(style="whitegrid")</a:t>
+            </a:r>
+            <a:endParaRPr lang="en-US" sz="1400" dirty="0"/>
           </a:p>
           <a:p>
             <a:pPr indent="0" marL="0">
@@ -2610,7 +2699,7 @@
               <a:buNone/>
             </a:pPr>
             <a:r>
-              <a:rPr lang="en-US" sz="1500" dirty="0">
+              <a:rPr lang="en-US" sz="1400" dirty="0">
                 <a:solidFill>
                   <a:srgbClr val="1F2933"/>
                 </a:solidFill>
@@ -2618,9 +2707,9 @@
                 <a:ea typeface="Courier New" pitchFamily="34" charset="-122"/>
                 <a:cs typeface="Courier New" pitchFamily="34" charset="-120"/>
               </a:rPr>
-              <a:t>    indicateurs, x="mois", y="ca",</a:t>
-            </a:r>
-            <a:endParaRPr lang="en-US" sz="1500" dirty="0"/>
+              <a:t> </a:t>
+            </a:r>
+            <a:endParaRPr lang="en-US" sz="1400" dirty="0"/>
           </a:p>
           <a:p>
             <a:pPr indent="0" marL="0">
@@ -2630,7 +2719,7 @@
               <a:buNone/>
             </a:pPr>
             <a:r>
-              <a:rPr lang="en-US" sz="1500" dirty="0">
+              <a:rPr lang="en-US" sz="1400" dirty="0">
                 <a:solidFill>
                   <a:srgbClr val="1F2933"/>
                 </a:solidFill>
@@ -2638,9 +2727,9 @@
                 <a:ea typeface="Courier New" pitchFamily="34" charset="-122"/>
                 <a:cs typeface="Courier New" pitchFamily="34" charset="-120"/>
               </a:rPr>
-              <a:t>    color="region", markers=True,</a:t>
-            </a:r>
-            <a:endParaRPr lang="en-US" sz="1500" dirty="0"/>
+              <a:t>sns.boxplot(data=ventes, x="categorie",</a:t>
+            </a:r>
+            <a:endParaRPr lang="en-US" sz="1400" dirty="0"/>
           </a:p>
           <a:p>
             <a:pPr indent="0" marL="0">
@@ -2650,7 +2739,7 @@
               <a:buNone/>
             </a:pPr>
             <a:r>
-              <a:rPr lang="en-US" sz="1500" dirty="0">
+              <a:rPr lang="en-US" sz="1400" dirty="0">
                 <a:solidFill>
                   <a:srgbClr val="1F2933"/>
                 </a:solidFill>
@@ -2658,246 +2747,15 @@
                 <a:ea typeface="Courier New" pitchFamily="34" charset="-122"/>
                 <a:cs typeface="Courier New" pitchFamily="34" charset="-120"/>
               </a:rPr>
-              <a:t>    hover_data=["nb_commandes"],</a:t>
-            </a:r>
-            <a:endParaRPr lang="en-US" sz="1500" dirty="0"/>
-          </a:p>
-          <a:p>
-            <a:pPr indent="0" marL="0">
-              <a:lnSpc>
-                <a:spcPct val="100000"/>
-              </a:lnSpc>
-              <a:buNone/>
-            </a:pPr>
-            <a:r>
-              <a:rPr lang="en-US" sz="1500" dirty="0">
-                <a:solidFill>
-                  <a:srgbClr val="1F2933"/>
-                </a:solidFill>
-                <a:latin typeface="Courier New" pitchFamily="34" charset="0"/>
-                <a:ea typeface="Courier New" pitchFamily="34" charset="-122"/>
-                <a:cs typeface="Courier New" pitchFamily="34" charset="-120"/>
-              </a:rPr>
-              <a:t>    title="CA mensuel par région",</a:t>
-            </a:r>
-            <a:endParaRPr lang="en-US" sz="1500" dirty="0"/>
-          </a:p>
-          <a:p>
-            <a:pPr indent="0" marL="0">
-              <a:lnSpc>
-                <a:spcPct val="100000"/>
-              </a:lnSpc>
-              <a:buNone/>
-            </a:pPr>
-            <a:r>
-              <a:rPr lang="en-US" sz="1500" dirty="0">
-                <a:solidFill>
-                  <a:srgbClr val="1F2933"/>
-                </a:solidFill>
-                <a:latin typeface="Courier New" pitchFamily="34" charset="0"/>
-                <a:ea typeface="Courier New" pitchFamily="34" charset="-122"/>
-                <a:cs typeface="Courier New" pitchFamily="34" charset="-120"/>
-              </a:rPr>
-              <a:t>)</a:t>
-            </a:r>
-            <a:endParaRPr lang="en-US" sz="1500" dirty="0"/>
-          </a:p>
-          <a:p>
-            <a:pPr indent="0" marL="0">
-              <a:lnSpc>
-                <a:spcPct val="100000"/>
-              </a:lnSpc>
-              <a:buNone/>
-            </a:pPr>
-            <a:r>
-              <a:rPr lang="en-US" sz="1500" dirty="0">
-                <a:solidFill>
-                  <a:srgbClr val="1F2933"/>
-                </a:solidFill>
-                <a:latin typeface="Courier New" pitchFamily="34" charset="0"/>
-                <a:ea typeface="Courier New" pitchFamily="34" charset="-122"/>
-                <a:cs typeface="Courier New" pitchFamily="34" charset="-120"/>
-              </a:rPr>
-              <a:t>fig.show()</a:t>
-            </a:r>
-            <a:endParaRPr lang="en-US" sz="1500" dirty="0"/>
-          </a:p>
-          <a:p>
-            <a:pPr indent="0" marL="0">
-              <a:lnSpc>
-                <a:spcPct val="100000"/>
-              </a:lnSpc>
-              <a:buNone/>
-            </a:pPr>
-            <a:r>
-              <a:rPr lang="en-US" sz="1500" dirty="0">
-                <a:solidFill>
-                  <a:srgbClr val="1F2933"/>
-                </a:solidFill>
-                <a:latin typeface="Courier New" pitchFamily="34" charset="0"/>
-                <a:ea typeface="Courier New" pitchFamily="34" charset="-122"/>
-                <a:cs typeface="Courier New" pitchFamily="34" charset="-120"/>
-              </a:rPr>
-              <a:t>fig.write_html("ca.html")</a:t>
-            </a:r>
-            <a:endParaRPr lang="en-US" sz="1500" dirty="0"/>
-          </a:p>
-        </p:txBody>
-      </p:sp>
-      <p:sp>
-        <p:nvSpPr>
-          <p:cNvPr id="8" name="Text 6"/>
-          <p:cNvSpPr txBox="1"/>
-          <p:nvPr/>
-        </p:nvSpPr>
-        <p:spPr>
-          <a:xfrm>
-            <a:off x="548640" y="3828288"/>
-            <a:ext cx="4835098" cy="822960"/>
-          </a:xfrm>
-          <a:prstGeom prst="rect">
-            <a:avLst/>
-          </a:prstGeom>
-          <a:noFill/>
-          <a:ln/>
-        </p:spPr>
-        <p:txBody>
-          <a:bodyPr wrap="square" lIns="0" tIns="0" rIns="0" bIns="0" rtlCol="0" anchor="t"/>
-          <a:lstStyle/>
-          <a:p>
-            <a:pPr indent="0" marL="0">
-              <a:buNone/>
-            </a:pPr>
-            <a:r>
-              <a:rPr lang="en-US" sz="1500" dirty="0">
-                <a:solidFill>
-                  <a:srgbClr val="6B7280"/>
-                </a:solidFill>
-                <a:latin typeface="Calibri" pitchFamily="34" charset="0"/>
-                <a:ea typeface="Calibri" pitchFamily="34" charset="-122"/>
-                <a:cs typeface="Calibri" pitchFamily="34" charset="-120"/>
-              </a:rPr>
-              <a:t>Aussi : </a:t>
-            </a:r>
-            <a:pPr indent="0" marL="0">
-              <a:buNone/>
-            </a:pPr>
-            <a:r>
-              <a:rPr lang="en-US" sz="1500" dirty="0">
-                <a:solidFill>
-                  <a:srgbClr val="1F3A5F"/>
-                </a:solidFill>
-                <a:latin typeface="Courier New" pitchFamily="34" charset="0"/>
-                <a:ea typeface="Courier New" pitchFamily="34" charset="-122"/>
-                <a:cs typeface="Courier New" pitchFamily="34" charset="-120"/>
-              </a:rPr>
-              <a:t>px.bar</a:t>
-            </a:r>
-            <a:pPr indent="0" marL="0">
-              <a:buNone/>
-            </a:pPr>
-            <a:r>
-              <a:rPr lang="en-US" sz="1500" dirty="0">
-                <a:solidFill>
-                  <a:srgbClr val="6B7280"/>
-                </a:solidFill>
-                <a:latin typeface="Calibri" pitchFamily="34" charset="0"/>
-                <a:ea typeface="Calibri" pitchFamily="34" charset="-122"/>
-                <a:cs typeface="Calibri" pitchFamily="34" charset="-120"/>
-              </a:rPr>
-              <a:t>, </a:t>
-            </a:r>
-            <a:pPr indent="0" marL="0">
-              <a:buNone/>
-            </a:pPr>
-            <a:r>
-              <a:rPr lang="en-US" sz="1500" dirty="0">
-                <a:solidFill>
-                  <a:srgbClr val="1F3A5F"/>
-                </a:solidFill>
-                <a:latin typeface="Courier New" pitchFamily="34" charset="0"/>
-                <a:ea typeface="Courier New" pitchFamily="34" charset="-122"/>
-                <a:cs typeface="Courier New" pitchFamily="34" charset="-120"/>
-              </a:rPr>
-              <a:t>px.scatter</a:t>
-            </a:r>
-            <a:pPr indent="0" marL="0">
-              <a:buNone/>
-            </a:pPr>
-            <a:r>
-              <a:rPr lang="en-US" sz="1500" dirty="0">
-                <a:solidFill>
-                  <a:srgbClr val="6B7280"/>
-                </a:solidFill>
-                <a:latin typeface="Calibri" pitchFamily="34" charset="0"/>
-                <a:ea typeface="Calibri" pitchFamily="34" charset="-122"/>
-                <a:cs typeface="Calibri" pitchFamily="34" charset="-120"/>
-              </a:rPr>
-              <a:t>, </a:t>
-            </a:r>
-            <a:pPr indent="0" marL="0">
-              <a:buNone/>
-            </a:pPr>
-            <a:r>
-              <a:rPr lang="en-US" sz="1500" dirty="0">
-                <a:solidFill>
-                  <a:srgbClr val="1F3A5F"/>
-                </a:solidFill>
-                <a:latin typeface="Courier New" pitchFamily="34" charset="0"/>
-                <a:ea typeface="Courier New" pitchFamily="34" charset="-122"/>
-                <a:cs typeface="Courier New" pitchFamily="34" charset="-120"/>
-              </a:rPr>
-              <a:t>px.histogram</a:t>
-            </a:r>
-            <a:pPr indent="0" marL="0">
-              <a:buNone/>
-            </a:pPr>
-            <a:r>
-              <a:rPr lang="en-US" sz="1500" dirty="0">
-                <a:solidFill>
-                  <a:srgbClr val="6B7280"/>
-                </a:solidFill>
-                <a:latin typeface="Calibri" pitchFamily="34" charset="0"/>
-                <a:ea typeface="Calibri" pitchFamily="34" charset="-122"/>
-                <a:cs typeface="Calibri" pitchFamily="34" charset="-120"/>
-              </a:rPr>
-              <a:t>, </a:t>
-            </a:r>
-            <a:pPr indent="0" marL="0">
-              <a:buNone/>
-            </a:pPr>
-            <a:r>
-              <a:rPr lang="en-US" sz="1500" dirty="0">
-                <a:solidFill>
-                  <a:srgbClr val="1F3A5F"/>
-                </a:solidFill>
-                <a:latin typeface="Courier New" pitchFamily="34" charset="0"/>
-                <a:ea typeface="Courier New" pitchFamily="34" charset="-122"/>
-                <a:cs typeface="Courier New" pitchFamily="34" charset="-120"/>
-              </a:rPr>
-              <a:t>px.box</a:t>
-            </a:r>
-            <a:pPr indent="0" marL="0">
-              <a:buNone/>
-            </a:pPr>
-            <a:r>
-              <a:rPr lang="en-US" sz="1500" dirty="0">
-                <a:solidFill>
-                  <a:srgbClr val="6B7280"/>
-                </a:solidFill>
-                <a:latin typeface="Calibri" pitchFamily="34" charset="0"/>
-                <a:ea typeface="Calibri" pitchFamily="34" charset="-122"/>
-                <a:cs typeface="Calibri" pitchFamily="34" charset="-120"/>
-              </a:rPr>
-              <a:t>. Même logique que seaborn : un DataFrame et des noms de colonnes.</a:t>
-            </a:r>
-            <a:endParaRPr lang="en-US" sz="1500" dirty="0"/>
+              <a:t>            y="montant", ax=ax)</a:t>
+            </a:r>
+            <a:endParaRPr lang="en-US" sz="1400" dirty="0"/>
           </a:p>
         </p:txBody>
       </p:sp>
       <p:pic>
         <p:nvPicPr>
-          <p:cNvPr id="9" name="Image 0" descr="Courbes plotly du chiffre d'affaires mensuel des six régions">    </p:cNvPr>
+          <p:cNvPr id="8" name="Image 0" descr="Boîtes à moustaches du montant des commandes par catégorie">    </p:cNvPr>
           <p:cNvPicPr>
             <a:picLocks noChangeAspect="1"/>
           </p:cNvPicPr>
@@ -2911,8 +2769,8 @@
         </p:blipFill>
         <p:spPr>
           <a:xfrm>
-            <a:off x="5954905" y="1417320"/>
-            <a:ext cx="5574182" cy="2926080"/>
+            <a:off x="1191875" y="2869184"/>
+            <a:ext cx="4032138" cy="2377440"/>
           </a:xfrm>
           <a:prstGeom prst="rect">
             <a:avLst/>
@@ -2921,36 +2779,34 @@
       </p:pic>
       <p:sp>
         <p:nvSpPr>
-          <p:cNvPr id="10" name="Shape 7"/>
+          <p:cNvPr id="9" name="Shape 6"/>
           <p:cNvSpPr/>
           <p:nvPr/>
         </p:nvSpPr>
         <p:spPr>
           <a:xfrm>
-            <a:off x="5840938" y="4663440"/>
-            <a:ext cx="5802117" cy="822960"/>
-          </a:xfrm>
-          <a:prstGeom prst="roundRect">
-            <a:avLst>
-              <a:gd name="adj" fmla="val 6667"/>
-            </a:avLst>
+            <a:off x="6324448" y="1417320"/>
+            <a:ext cx="5318608" cy="712216"/>
+          </a:xfrm>
+          <a:prstGeom prst="rect">
+            <a:avLst/>
           </a:prstGeom>
           <a:solidFill>
-            <a:srgbClr val="E8F3EE"/>
+            <a:srgbClr val="F3F4F6"/>
           </a:solidFill>
           <a:ln/>
         </p:spPr>
       </p:sp>
       <p:sp>
         <p:nvSpPr>
-          <p:cNvPr id="11" name="Text 8"/>
+          <p:cNvPr id="10" name="Text 7"/>
           <p:cNvSpPr txBox="1"/>
           <p:nvPr/>
         </p:nvSpPr>
         <p:spPr>
           <a:xfrm>
-            <a:off x="6115258" y="4663440"/>
-            <a:ext cx="5253477" cy="822960"/>
+            <a:off x="6507328" y="1563624"/>
+            <a:ext cx="4952848" cy="419608"/>
           </a:xfrm>
           <a:prstGeom prst="rect">
             <a:avLst/>
@@ -2959,7 +2815,93 @@
           <a:ln/>
         </p:spPr>
         <p:txBody>
-          <a:bodyPr wrap="square" lIns="0" tIns="0" rIns="0" bIns="0" rtlCol="0" anchor="ctr"/>
+          <a:bodyPr wrap="square" lIns="0" tIns="0" rIns="0" bIns="0" rtlCol="0" anchor="t"/>
+          <a:lstStyle/>
+          <a:p>
+            <a:pPr indent="0" marL="0">
+              <a:lnSpc>
+                <a:spcPct val="100000"/>
+              </a:lnSpc>
+              <a:buNone/>
+            </a:pPr>
+            <a:r>
+              <a:rPr lang="en-US" sz="1400" dirty="0">
+                <a:solidFill>
+                  <a:srgbClr val="1F2933"/>
+                </a:solidFill>
+                <a:latin typeface="Courier New" pitchFamily="34" charset="0"/>
+                <a:ea typeface="Courier New" pitchFamily="34" charset="-122"/>
+                <a:cs typeface="Courier New" pitchFamily="34" charset="-120"/>
+              </a:rPr>
+              <a:t>sns.heatmap(taux, annot=True, fmt=".0%",</a:t>
+            </a:r>
+            <a:endParaRPr lang="en-US" sz="1400" dirty="0"/>
+          </a:p>
+          <a:p>
+            <a:pPr indent="0" marL="0">
+              <a:lnSpc>
+                <a:spcPct val="100000"/>
+              </a:lnSpc>
+              <a:buNone/>
+            </a:pPr>
+            <a:r>
+              <a:rPr lang="en-US" sz="1400" dirty="0">
+                <a:solidFill>
+                  <a:srgbClr val="1F2933"/>
+                </a:solidFill>
+                <a:latin typeface="Courier New" pitchFamily="34" charset="0"/>
+                <a:ea typeface="Courier New" pitchFamily="34" charset="-122"/>
+                <a:cs typeface="Courier New" pitchFamily="34" charset="-120"/>
+              </a:rPr>
+              <a:t>            cmap="RdBu", center=1, ax=ax)</a:t>
+            </a:r>
+            <a:endParaRPr lang="en-US" sz="1400" dirty="0"/>
+          </a:p>
+        </p:txBody>
+      </p:sp>
+      <p:pic>
+        <p:nvPicPr>
+          <p:cNvPr id="11" name="Image 1" descr="Heatmap du taux de réalisation de l'objectif par région et par mois">    </p:cNvPr>
+          <p:cNvPicPr>
+            <a:picLocks noChangeAspect="1"/>
+          </p:cNvPicPr>
+          <p:nvPr/>
+        </p:nvPicPr>
+        <p:blipFill>
+          <a:blip r:embed="rId2"/>
+          <a:stretch>
+            <a:fillRect/>
+          </a:stretch>
+        </p:blipFill>
+        <p:spPr>
+          <a:xfrm>
+            <a:off x="6324448" y="2449576"/>
+            <a:ext cx="5318608" cy="2337849"/>
+          </a:xfrm>
+          <a:prstGeom prst="rect">
+            <a:avLst/>
+          </a:prstGeom>
+        </p:spPr>
+      </p:pic>
+      <p:sp>
+        <p:nvSpPr>
+          <p:cNvPr id="12" name="Text 8"/>
+          <p:cNvSpPr txBox="1"/>
+          <p:nvPr/>
+        </p:nvSpPr>
+        <p:spPr>
+          <a:xfrm>
+            <a:off x="548640" y="5566664"/>
+            <a:ext cx="11094415" cy="594360"/>
+          </a:xfrm>
+          <a:prstGeom prst="rect">
+            <a:avLst/>
+          </a:prstGeom>
+          <a:noFill/>
+          <a:ln/>
+        </p:spPr>
+        <p:txBody>
+          <a:bodyPr wrap="square" lIns="0" tIns="0" rIns="0" bIns="0" rtlCol="0" anchor="t"/>
           <a:lstStyle/>
           <a:p>
             <a:pPr indent="0" marL="0">
@@ -2968,13 +2910,181 @@
             <a:r>
               <a:rPr lang="en-US" sz="1500" dirty="0">
                 <a:solidFill>
-                  <a:srgbClr val="1F3A5F"/>
+                  <a:srgbClr val="6B7280"/>
                 </a:solidFill>
                 <a:latin typeface="Calibri" pitchFamily="34" charset="0"/>
                 <a:ea typeface="Calibri" pitchFamily="34" charset="-122"/>
                 <a:cs typeface="Calibri" pitchFamily="34" charset="-120"/>
               </a:rPr>
-              <a:t>Le fichier HTML s'ouvre dans n'importe quel navigateur, sans Python, et reste interactif.</a:t>
+              <a:t>Autres classiques : </a:t>
+            </a:r>
+            <a:pPr indent="0" marL="0">
+              <a:buNone/>
+            </a:pPr>
+            <a:r>
+              <a:rPr lang="en-US" sz="1500" dirty="0">
+                <a:solidFill>
+                  <a:srgbClr val="1F3A5F"/>
+                </a:solidFill>
+                <a:latin typeface="Courier New" pitchFamily="34" charset="0"/>
+                <a:ea typeface="Courier New" pitchFamily="34" charset="-122"/>
+                <a:cs typeface="Courier New" pitchFamily="34" charset="-120"/>
+              </a:rPr>
+              <a:t>histplot</a:t>
+            </a:r>
+            <a:pPr indent="0" marL="0">
+              <a:buNone/>
+            </a:pPr>
+            <a:r>
+              <a:rPr lang="en-US" sz="1500" dirty="0">
+                <a:solidFill>
+                  <a:srgbClr val="6B7280"/>
+                </a:solidFill>
+                <a:latin typeface="Calibri" pitchFamily="34" charset="0"/>
+                <a:ea typeface="Calibri" pitchFamily="34" charset="-122"/>
+                <a:cs typeface="Calibri" pitchFamily="34" charset="-120"/>
+              </a:rPr>
+              <a:t>, </a:t>
+            </a:r>
+            <a:pPr indent="0" marL="0">
+              <a:buNone/>
+            </a:pPr>
+            <a:r>
+              <a:rPr lang="en-US" sz="1500" dirty="0">
+                <a:solidFill>
+                  <a:srgbClr val="1F3A5F"/>
+                </a:solidFill>
+                <a:latin typeface="Courier New" pitchFamily="34" charset="0"/>
+                <a:ea typeface="Courier New" pitchFamily="34" charset="-122"/>
+                <a:cs typeface="Courier New" pitchFamily="34" charset="-120"/>
+              </a:rPr>
+              <a:t>countplot</a:t>
+            </a:r>
+            <a:pPr indent="0" marL="0">
+              <a:buNone/>
+            </a:pPr>
+            <a:r>
+              <a:rPr lang="en-US" sz="1500" dirty="0">
+                <a:solidFill>
+                  <a:srgbClr val="6B7280"/>
+                </a:solidFill>
+                <a:latin typeface="Calibri" pitchFamily="34" charset="0"/>
+                <a:ea typeface="Calibri" pitchFamily="34" charset="-122"/>
+                <a:cs typeface="Calibri" pitchFamily="34" charset="-120"/>
+              </a:rPr>
+              <a:t>, </a:t>
+            </a:r>
+            <a:pPr indent="0" marL="0">
+              <a:buNone/>
+            </a:pPr>
+            <a:r>
+              <a:rPr lang="en-US" sz="1500" dirty="0">
+                <a:solidFill>
+                  <a:srgbClr val="1F3A5F"/>
+                </a:solidFill>
+                <a:latin typeface="Courier New" pitchFamily="34" charset="0"/>
+                <a:ea typeface="Courier New" pitchFamily="34" charset="-122"/>
+                <a:cs typeface="Courier New" pitchFamily="34" charset="-120"/>
+              </a:rPr>
+              <a:t>lineplot</a:t>
+            </a:r>
+            <a:pPr indent="0" marL="0">
+              <a:buNone/>
+            </a:pPr>
+            <a:r>
+              <a:rPr lang="en-US" sz="1500" dirty="0">
+                <a:solidFill>
+                  <a:srgbClr val="6B7280"/>
+                </a:solidFill>
+                <a:latin typeface="Calibri" pitchFamily="34" charset="0"/>
+                <a:ea typeface="Calibri" pitchFamily="34" charset="-122"/>
+                <a:cs typeface="Calibri" pitchFamily="34" charset="-120"/>
+              </a:rPr>
+              <a:t> avec </a:t>
+            </a:r>
+            <a:pPr indent="0" marL="0">
+              <a:buNone/>
+            </a:pPr>
+            <a:r>
+              <a:rPr lang="en-US" sz="1500" dirty="0">
+                <a:solidFill>
+                  <a:srgbClr val="1F3A5F"/>
+                </a:solidFill>
+                <a:latin typeface="Courier New" pitchFamily="34" charset="0"/>
+                <a:ea typeface="Courier New" pitchFamily="34" charset="-122"/>
+                <a:cs typeface="Courier New" pitchFamily="34" charset="-120"/>
+              </a:rPr>
+              <a:t>hue</a:t>
+            </a:r>
+            <a:pPr indent="0" marL="0">
+              <a:buNone/>
+            </a:pPr>
+            <a:r>
+              <a:rPr lang="en-US" sz="1500" dirty="0">
+                <a:solidFill>
+                  <a:srgbClr val="6B7280"/>
+                </a:solidFill>
+                <a:latin typeface="Calibri" pitchFamily="34" charset="0"/>
+                <a:ea typeface="Calibri" pitchFamily="34" charset="-122"/>
+                <a:cs typeface="Calibri" pitchFamily="34" charset="-120"/>
+              </a:rPr>
+              <a:t>, </a:t>
+            </a:r>
+            <a:pPr indent="0" marL="0">
+              <a:buNone/>
+            </a:pPr>
+            <a:r>
+              <a:rPr lang="en-US" sz="1500" dirty="0">
+                <a:solidFill>
+                  <a:srgbClr val="1F3A5F"/>
+                </a:solidFill>
+                <a:latin typeface="Courier New" pitchFamily="34" charset="0"/>
+                <a:ea typeface="Courier New" pitchFamily="34" charset="-122"/>
+                <a:cs typeface="Courier New" pitchFamily="34" charset="-120"/>
+              </a:rPr>
+              <a:t>relplot</a:t>
+            </a:r>
+            <a:pPr indent="0" marL="0">
+              <a:buNone/>
+            </a:pPr>
+            <a:r>
+              <a:rPr lang="en-US" sz="1500" dirty="0">
+                <a:solidFill>
+                  <a:srgbClr val="6B7280"/>
+                </a:solidFill>
+                <a:latin typeface="Calibri" pitchFamily="34" charset="0"/>
+                <a:ea typeface="Calibri" pitchFamily="34" charset="-122"/>
+                <a:cs typeface="Calibri" pitchFamily="34" charset="-120"/>
+              </a:rPr>
+              <a:t> pour un graphique par groupe. Toujours passer </a:t>
+            </a:r>
+            <a:pPr indent="0" marL="0">
+              <a:buNone/>
+            </a:pPr>
+            <a:r>
+              <a:rPr lang="en-US" sz="1500" dirty="0">
+                <a:solidFill>
+                  <a:srgbClr val="1F3A5F"/>
+                </a:solidFill>
+                <a:latin typeface="Courier New" pitchFamily="34" charset="0"/>
+                <a:ea typeface="Courier New" pitchFamily="34" charset="-122"/>
+                <a:cs typeface="Courier New" pitchFamily="34" charset="-120"/>
+              </a:rPr>
+              <a:t>ax=ax</a:t>
+            </a:r>
+            <a:pPr indent="0" marL="0">
+              <a:buNone/>
+            </a:pPr>
+            <a:r>
+              <a:rPr lang="en-US" sz="1500" dirty="0">
+                <a:solidFill>
+                  <a:srgbClr val="6B7280"/>
+                </a:solidFill>
+                <a:latin typeface="Calibri" pitchFamily="34" charset="0"/>
+                <a:ea typeface="Calibri" pitchFamily="34" charset="-122"/>
+                <a:cs typeface="Calibri" pitchFamily="34" charset="-120"/>
+              </a:rPr>
+              <a:t>.</a:t>
             </a:r>
             <a:endParaRPr lang="en-US" sz="1500" dirty="0"/>
           </a:p>
@@ -2982,7 +3092,7 @@
       </p:sp>
       <p:sp>
         <p:nvSpPr>
-          <p:cNvPr id="12" name="Text 9"/>
+          <p:cNvPr id="13" name="Text 9"/>
           <p:cNvSpPr txBox="1"/>
           <p:nvPr/>
         </p:nvSpPr>
@@ -3078,6 +3188,700 @@
 <file path=ppt/slides/slide11.xml><?xml version="1.0" encoding="utf-8"?>
 <p:sld xmlns:a="http://schemas.openxmlformats.org/drawingml/2006/main" xmlns:r="http://schemas.openxmlformats.org/officeDocument/2006/relationships" xmlns:p="http://schemas.openxmlformats.org/presentationml/2006/main">
   <p:cSld name="Slide 11">
+    <p:bg>
+      <p:bgPr>
+        <a:solidFill>
+          <a:srgbClr val="FFFFFF"/>
+        </a:solidFill>
+      </p:bgPr>
+    </p:bg>
+    <p:spTree>
+      <p:nvGrpSpPr>
+        <p:cNvPr id="1" name=""/>
+        <p:cNvGrpSpPr/>
+        <p:nvPr/>
+      </p:nvGrpSpPr>
+      <p:grpSpPr>
+        <a:xfrm>
+          <a:off x="0" y="0"/>
+          <a:ext cx="0" cy="0"/>
+          <a:chOff x="0" y="0"/>
+          <a:chExt cx="0" cy="0"/>
+        </a:xfrm>
+      </p:grpSpPr>
+      <p:sp>
+        <p:nvSpPr>
+          <p:cNvPr id="2" name="Shape 0"/>
+          <p:cNvSpPr/>
+          <p:nvPr/>
+        </p:nvSpPr>
+        <p:spPr>
+          <a:xfrm>
+            <a:off x="548640" y="566928"/>
+            <a:ext cx="475488" cy="475488"/>
+          </a:xfrm>
+          <a:prstGeom prst="ellipse">
+            <a:avLst/>
+          </a:prstGeom>
+          <a:solidFill>
+            <a:srgbClr val="2F7D62"/>
+          </a:solidFill>
+          <a:ln/>
+        </p:spPr>
+      </p:sp>
+      <p:sp>
+        <p:nvSpPr>
+          <p:cNvPr id="3" name="Text 1"/>
+          <p:cNvSpPr txBox="1"/>
+          <p:nvPr/>
+        </p:nvSpPr>
+        <p:spPr>
+          <a:xfrm>
+            <a:off x="548640" y="566928"/>
+            <a:ext cx="475488" cy="475488"/>
+          </a:xfrm>
+          <a:prstGeom prst="rect">
+            <a:avLst/>
+          </a:prstGeom>
+          <a:noFill/>
+          <a:ln/>
+        </p:spPr>
+        <p:txBody>
+          <a:bodyPr wrap="square" lIns="0" tIns="0" rIns="0" bIns="0" rtlCol="0" anchor="ctr"/>
+          <a:lstStyle/>
+          <a:p>
+            <a:pPr algn="ctr" indent="0" marL="0">
+              <a:buNone/>
+            </a:pPr>
+            <a:r>
+              <a:rPr lang="en-US" sz="1600" b="1" dirty="0">
+                <a:solidFill>
+                  <a:srgbClr val="FFFFFF"/>
+                </a:solidFill>
+                <a:latin typeface="Calibri" pitchFamily="34" charset="0"/>
+                <a:ea typeface="Calibri" pitchFamily="34" charset="-122"/>
+                <a:cs typeface="Calibri" pitchFamily="34" charset="-120"/>
+              </a:rPr>
+              <a:t>2</a:t>
+            </a:r>
+            <a:endParaRPr lang="en-US" sz="1600" dirty="0"/>
+          </a:p>
+        </p:txBody>
+      </p:sp>
+      <p:sp>
+        <p:nvSpPr>
+          <p:cNvPr id="4" name="Text 2"/>
+          <p:cNvSpPr txBox="1"/>
+          <p:nvPr/>
+        </p:nvSpPr>
+        <p:spPr>
+          <a:xfrm>
+            <a:off x="1280160" y="164592"/>
+            <a:ext cx="10362895" cy="274320"/>
+          </a:xfrm>
+          <a:prstGeom prst="rect">
+            <a:avLst/>
+          </a:prstGeom>
+          <a:noFill/>
+          <a:ln/>
+        </p:spPr>
+        <p:txBody>
+          <a:bodyPr wrap="square" lIns="0" tIns="0" rIns="0" bIns="0" rtlCol="0" anchor="ctr"/>
+          <a:lstStyle/>
+          <a:p>
+            <a:pPr indent="0" marL="0">
+              <a:buNone/>
+            </a:pPr>
+            <a:r>
+              <a:rPr lang="en-US" sz="1200" b="1" spc="200" kern="0" dirty="0">
+                <a:solidFill>
+                  <a:srgbClr val="2F7D62"/>
+                </a:solidFill>
+                <a:latin typeface="Calibri" pitchFamily="34" charset="0"/>
+                <a:ea typeface="Calibri" pitchFamily="34" charset="-122"/>
+                <a:cs typeface="Calibri" pitchFamily="34" charset="-120"/>
+              </a:rPr>
+              <a:t>L'ESSENTIEL DE CHAQUE BIBLIOTHÈQUE</a:t>
+            </a:r>
+            <a:endParaRPr lang="en-US" sz="1200" dirty="0"/>
+          </a:p>
+        </p:txBody>
+      </p:sp>
+      <p:sp>
+        <p:nvSpPr>
+          <p:cNvPr id="5" name="Text 3"/>
+          <p:cNvSpPr txBox="1"/>
+          <p:nvPr/>
+        </p:nvSpPr>
+        <p:spPr>
+          <a:xfrm>
+            <a:off x="1280160" y="457200"/>
+            <a:ext cx="10362895" cy="694944"/>
+          </a:xfrm>
+          <a:prstGeom prst="rect">
+            <a:avLst/>
+          </a:prstGeom>
+          <a:noFill/>
+          <a:ln/>
+        </p:spPr>
+        <p:txBody>
+          <a:bodyPr wrap="square" lIns="0" tIns="0" rIns="0" bIns="0" rtlCol="0" anchor="ctr"/>
+          <a:lstStyle/>
+          <a:p>
+            <a:pPr indent="0" marL="0">
+              <a:buNone/>
+            </a:pPr>
+            <a:r>
+              <a:rPr lang="en-US" sz="3000" b="1" dirty="0">
+                <a:solidFill>
+                  <a:srgbClr val="1F3A5F"/>
+                </a:solidFill>
+                <a:latin typeface="Cambria" pitchFamily="34" charset="0"/>
+                <a:ea typeface="Cambria" pitchFamily="34" charset="-122"/>
+                <a:cs typeface="Cambria" pitchFamily="34" charset="-120"/>
+              </a:rPr>
+              <a:t>plotly : explorer à la souris</a:t>
+            </a:r>
+            <a:endParaRPr lang="en-US" sz="3000" dirty="0"/>
+          </a:p>
+        </p:txBody>
+      </p:sp>
+      <p:sp>
+        <p:nvSpPr>
+          <p:cNvPr id="6" name="Shape 4"/>
+          <p:cNvSpPr/>
+          <p:nvPr/>
+        </p:nvSpPr>
+        <p:spPr>
+          <a:xfrm>
+            <a:off x="548640" y="1417320"/>
+            <a:ext cx="4835098" cy="2090928"/>
+          </a:xfrm>
+          <a:prstGeom prst="rect">
+            <a:avLst/>
+          </a:prstGeom>
+          <a:solidFill>
+            <a:srgbClr val="F3F4F6"/>
+          </a:solidFill>
+          <a:ln/>
+        </p:spPr>
+      </p:sp>
+      <p:sp>
+        <p:nvSpPr>
+          <p:cNvPr id="7" name="Text 5"/>
+          <p:cNvSpPr txBox="1"/>
+          <p:nvPr/>
+        </p:nvSpPr>
+        <p:spPr>
+          <a:xfrm>
+            <a:off x="731520" y="1563624"/>
+            <a:ext cx="4469338" cy="1798320"/>
+          </a:xfrm>
+          <a:prstGeom prst="rect">
+            <a:avLst/>
+          </a:prstGeom>
+          <a:noFill/>
+          <a:ln/>
+        </p:spPr>
+        <p:txBody>
+          <a:bodyPr wrap="square" lIns="0" tIns="0" rIns="0" bIns="0" rtlCol="0" anchor="t"/>
+          <a:lstStyle/>
+          <a:p>
+            <a:pPr indent="0" marL="0">
+              <a:lnSpc>
+                <a:spcPct val="100000"/>
+              </a:lnSpc>
+              <a:buNone/>
+            </a:pPr>
+            <a:r>
+              <a:rPr lang="en-US" sz="1500" dirty="0">
+                <a:solidFill>
+                  <a:srgbClr val="1F2933"/>
+                </a:solidFill>
+                <a:latin typeface="Courier New" pitchFamily="34" charset="0"/>
+                <a:ea typeface="Courier New" pitchFamily="34" charset="-122"/>
+                <a:cs typeface="Courier New" pitchFamily="34" charset="-120"/>
+              </a:rPr>
+              <a:t>fig = px.line(</a:t>
+            </a:r>
+            <a:endParaRPr lang="en-US" sz="1500" dirty="0"/>
+          </a:p>
+          <a:p>
+            <a:pPr indent="0" marL="0">
+              <a:lnSpc>
+                <a:spcPct val="100000"/>
+              </a:lnSpc>
+              <a:buNone/>
+            </a:pPr>
+            <a:r>
+              <a:rPr lang="en-US" sz="1500" dirty="0">
+                <a:solidFill>
+                  <a:srgbClr val="1F2933"/>
+                </a:solidFill>
+                <a:latin typeface="Courier New" pitchFamily="34" charset="0"/>
+                <a:ea typeface="Courier New" pitchFamily="34" charset="-122"/>
+                <a:cs typeface="Courier New" pitchFamily="34" charset="-120"/>
+              </a:rPr>
+              <a:t>    indicateurs, x="mois", y="ca",</a:t>
+            </a:r>
+            <a:endParaRPr lang="en-US" sz="1500" dirty="0"/>
+          </a:p>
+          <a:p>
+            <a:pPr indent="0" marL="0">
+              <a:lnSpc>
+                <a:spcPct val="100000"/>
+              </a:lnSpc>
+              <a:buNone/>
+            </a:pPr>
+            <a:r>
+              <a:rPr lang="en-US" sz="1500" dirty="0">
+                <a:solidFill>
+                  <a:srgbClr val="1F2933"/>
+                </a:solidFill>
+                <a:latin typeface="Courier New" pitchFamily="34" charset="0"/>
+                <a:ea typeface="Courier New" pitchFamily="34" charset="-122"/>
+                <a:cs typeface="Courier New" pitchFamily="34" charset="-120"/>
+              </a:rPr>
+              <a:t>    color="region", markers=True,</a:t>
+            </a:r>
+            <a:endParaRPr lang="en-US" sz="1500" dirty="0"/>
+          </a:p>
+          <a:p>
+            <a:pPr indent="0" marL="0">
+              <a:lnSpc>
+                <a:spcPct val="100000"/>
+              </a:lnSpc>
+              <a:buNone/>
+            </a:pPr>
+            <a:r>
+              <a:rPr lang="en-US" sz="1500" dirty="0">
+                <a:solidFill>
+                  <a:srgbClr val="1F2933"/>
+                </a:solidFill>
+                <a:latin typeface="Courier New" pitchFamily="34" charset="0"/>
+                <a:ea typeface="Courier New" pitchFamily="34" charset="-122"/>
+                <a:cs typeface="Courier New" pitchFamily="34" charset="-120"/>
+              </a:rPr>
+              <a:t>    hover_data=["nb_commandes"],</a:t>
+            </a:r>
+            <a:endParaRPr lang="en-US" sz="1500" dirty="0"/>
+          </a:p>
+          <a:p>
+            <a:pPr indent="0" marL="0">
+              <a:lnSpc>
+                <a:spcPct val="100000"/>
+              </a:lnSpc>
+              <a:buNone/>
+            </a:pPr>
+            <a:r>
+              <a:rPr lang="en-US" sz="1500" dirty="0">
+                <a:solidFill>
+                  <a:srgbClr val="1F2933"/>
+                </a:solidFill>
+                <a:latin typeface="Courier New" pitchFamily="34" charset="0"/>
+                <a:ea typeface="Courier New" pitchFamily="34" charset="-122"/>
+                <a:cs typeface="Courier New" pitchFamily="34" charset="-120"/>
+              </a:rPr>
+              <a:t>    title="CA mensuel par région",</a:t>
+            </a:r>
+            <a:endParaRPr lang="en-US" sz="1500" dirty="0"/>
+          </a:p>
+          <a:p>
+            <a:pPr indent="0" marL="0">
+              <a:lnSpc>
+                <a:spcPct val="100000"/>
+              </a:lnSpc>
+              <a:buNone/>
+            </a:pPr>
+            <a:r>
+              <a:rPr lang="en-US" sz="1500" dirty="0">
+                <a:solidFill>
+                  <a:srgbClr val="1F2933"/>
+                </a:solidFill>
+                <a:latin typeface="Courier New" pitchFamily="34" charset="0"/>
+                <a:ea typeface="Courier New" pitchFamily="34" charset="-122"/>
+                <a:cs typeface="Courier New" pitchFamily="34" charset="-120"/>
+              </a:rPr>
+              <a:t>)</a:t>
+            </a:r>
+            <a:endParaRPr lang="en-US" sz="1500" dirty="0"/>
+          </a:p>
+          <a:p>
+            <a:pPr indent="0" marL="0">
+              <a:lnSpc>
+                <a:spcPct val="100000"/>
+              </a:lnSpc>
+              <a:buNone/>
+            </a:pPr>
+            <a:r>
+              <a:rPr lang="en-US" sz="1500" dirty="0">
+                <a:solidFill>
+                  <a:srgbClr val="1F2933"/>
+                </a:solidFill>
+                <a:latin typeface="Courier New" pitchFamily="34" charset="0"/>
+                <a:ea typeface="Courier New" pitchFamily="34" charset="-122"/>
+                <a:cs typeface="Courier New" pitchFamily="34" charset="-120"/>
+              </a:rPr>
+              <a:t>fig.show()</a:t>
+            </a:r>
+            <a:endParaRPr lang="en-US" sz="1500" dirty="0"/>
+          </a:p>
+          <a:p>
+            <a:pPr indent="0" marL="0">
+              <a:lnSpc>
+                <a:spcPct val="100000"/>
+              </a:lnSpc>
+              <a:buNone/>
+            </a:pPr>
+            <a:r>
+              <a:rPr lang="en-US" sz="1500" dirty="0">
+                <a:solidFill>
+                  <a:srgbClr val="1F2933"/>
+                </a:solidFill>
+                <a:latin typeface="Courier New" pitchFamily="34" charset="0"/>
+                <a:ea typeface="Courier New" pitchFamily="34" charset="-122"/>
+                <a:cs typeface="Courier New" pitchFamily="34" charset="-120"/>
+              </a:rPr>
+              <a:t>fig.write_html("ca.html")</a:t>
+            </a:r>
+            <a:endParaRPr lang="en-US" sz="1500" dirty="0"/>
+          </a:p>
+        </p:txBody>
+      </p:sp>
+      <p:sp>
+        <p:nvSpPr>
+          <p:cNvPr id="8" name="Text 6"/>
+          <p:cNvSpPr txBox="1"/>
+          <p:nvPr/>
+        </p:nvSpPr>
+        <p:spPr>
+          <a:xfrm>
+            <a:off x="548640" y="3828288"/>
+            <a:ext cx="4835098" cy="822960"/>
+          </a:xfrm>
+          <a:prstGeom prst="rect">
+            <a:avLst/>
+          </a:prstGeom>
+          <a:noFill/>
+          <a:ln/>
+        </p:spPr>
+        <p:txBody>
+          <a:bodyPr wrap="square" lIns="0" tIns="0" rIns="0" bIns="0" rtlCol="0" anchor="t"/>
+          <a:lstStyle/>
+          <a:p>
+            <a:pPr indent="0" marL="0">
+              <a:buNone/>
+            </a:pPr>
+            <a:r>
+              <a:rPr lang="en-US" sz="1500" dirty="0">
+                <a:solidFill>
+                  <a:srgbClr val="6B7280"/>
+                </a:solidFill>
+                <a:latin typeface="Calibri" pitchFamily="34" charset="0"/>
+                <a:ea typeface="Calibri" pitchFamily="34" charset="-122"/>
+                <a:cs typeface="Calibri" pitchFamily="34" charset="-120"/>
+              </a:rPr>
+              <a:t>Aussi : </a:t>
+            </a:r>
+            <a:pPr indent="0" marL="0">
+              <a:buNone/>
+            </a:pPr>
+            <a:r>
+              <a:rPr lang="en-US" sz="1500" dirty="0">
+                <a:solidFill>
+                  <a:srgbClr val="1F3A5F"/>
+                </a:solidFill>
+                <a:latin typeface="Courier New" pitchFamily="34" charset="0"/>
+                <a:ea typeface="Courier New" pitchFamily="34" charset="-122"/>
+                <a:cs typeface="Courier New" pitchFamily="34" charset="-120"/>
+              </a:rPr>
+              <a:t>px.bar</a:t>
+            </a:r>
+            <a:pPr indent="0" marL="0">
+              <a:buNone/>
+            </a:pPr>
+            <a:r>
+              <a:rPr lang="en-US" sz="1500" dirty="0">
+                <a:solidFill>
+                  <a:srgbClr val="6B7280"/>
+                </a:solidFill>
+                <a:latin typeface="Calibri" pitchFamily="34" charset="0"/>
+                <a:ea typeface="Calibri" pitchFamily="34" charset="-122"/>
+                <a:cs typeface="Calibri" pitchFamily="34" charset="-120"/>
+              </a:rPr>
+              <a:t>, </a:t>
+            </a:r>
+            <a:pPr indent="0" marL="0">
+              <a:buNone/>
+            </a:pPr>
+            <a:r>
+              <a:rPr lang="en-US" sz="1500" dirty="0">
+                <a:solidFill>
+                  <a:srgbClr val="1F3A5F"/>
+                </a:solidFill>
+                <a:latin typeface="Courier New" pitchFamily="34" charset="0"/>
+                <a:ea typeface="Courier New" pitchFamily="34" charset="-122"/>
+                <a:cs typeface="Courier New" pitchFamily="34" charset="-120"/>
+              </a:rPr>
+              <a:t>px.scatter</a:t>
+            </a:r>
+            <a:pPr indent="0" marL="0">
+              <a:buNone/>
+            </a:pPr>
+            <a:r>
+              <a:rPr lang="en-US" sz="1500" dirty="0">
+                <a:solidFill>
+                  <a:srgbClr val="6B7280"/>
+                </a:solidFill>
+                <a:latin typeface="Calibri" pitchFamily="34" charset="0"/>
+                <a:ea typeface="Calibri" pitchFamily="34" charset="-122"/>
+                <a:cs typeface="Calibri" pitchFamily="34" charset="-120"/>
+              </a:rPr>
+              <a:t>, </a:t>
+            </a:r>
+            <a:pPr indent="0" marL="0">
+              <a:buNone/>
+            </a:pPr>
+            <a:r>
+              <a:rPr lang="en-US" sz="1500" dirty="0">
+                <a:solidFill>
+                  <a:srgbClr val="1F3A5F"/>
+                </a:solidFill>
+                <a:latin typeface="Courier New" pitchFamily="34" charset="0"/>
+                <a:ea typeface="Courier New" pitchFamily="34" charset="-122"/>
+                <a:cs typeface="Courier New" pitchFamily="34" charset="-120"/>
+              </a:rPr>
+              <a:t>px.histogram</a:t>
+            </a:r>
+            <a:pPr indent="0" marL="0">
+              <a:buNone/>
+            </a:pPr>
+            <a:r>
+              <a:rPr lang="en-US" sz="1500" dirty="0">
+                <a:solidFill>
+                  <a:srgbClr val="6B7280"/>
+                </a:solidFill>
+                <a:latin typeface="Calibri" pitchFamily="34" charset="0"/>
+                <a:ea typeface="Calibri" pitchFamily="34" charset="-122"/>
+                <a:cs typeface="Calibri" pitchFamily="34" charset="-120"/>
+              </a:rPr>
+              <a:t>, </a:t>
+            </a:r>
+            <a:pPr indent="0" marL="0">
+              <a:buNone/>
+            </a:pPr>
+            <a:r>
+              <a:rPr lang="en-US" sz="1500" dirty="0">
+                <a:solidFill>
+                  <a:srgbClr val="1F3A5F"/>
+                </a:solidFill>
+                <a:latin typeface="Courier New" pitchFamily="34" charset="0"/>
+                <a:ea typeface="Courier New" pitchFamily="34" charset="-122"/>
+                <a:cs typeface="Courier New" pitchFamily="34" charset="-120"/>
+              </a:rPr>
+              <a:t>px.box</a:t>
+            </a:r>
+            <a:pPr indent="0" marL="0">
+              <a:buNone/>
+            </a:pPr>
+            <a:r>
+              <a:rPr lang="en-US" sz="1500" dirty="0">
+                <a:solidFill>
+                  <a:srgbClr val="6B7280"/>
+                </a:solidFill>
+                <a:latin typeface="Calibri" pitchFamily="34" charset="0"/>
+                <a:ea typeface="Calibri" pitchFamily="34" charset="-122"/>
+                <a:cs typeface="Calibri" pitchFamily="34" charset="-120"/>
+              </a:rPr>
+              <a:t>. Même logique que seaborn : un DataFrame et des noms de colonnes.</a:t>
+            </a:r>
+            <a:endParaRPr lang="en-US" sz="1500" dirty="0"/>
+          </a:p>
+        </p:txBody>
+      </p:sp>
+      <p:pic>
+        <p:nvPicPr>
+          <p:cNvPr id="9" name="Image 0" descr="Courbes plotly du chiffre d'affaires mensuel des six régions">    </p:cNvPr>
+          <p:cNvPicPr>
+            <a:picLocks noChangeAspect="1"/>
+          </p:cNvPicPr>
+          <p:nvPr/>
+        </p:nvPicPr>
+        <p:blipFill>
+          <a:blip r:embed="rId1"/>
+          <a:stretch>
+            <a:fillRect/>
+          </a:stretch>
+        </p:blipFill>
+        <p:spPr>
+          <a:xfrm>
+            <a:off x="5954905" y="1417320"/>
+            <a:ext cx="5574182" cy="2926080"/>
+          </a:xfrm>
+          <a:prstGeom prst="rect">
+            <a:avLst/>
+          </a:prstGeom>
+        </p:spPr>
+      </p:pic>
+      <p:sp>
+        <p:nvSpPr>
+          <p:cNvPr id="10" name="Shape 7"/>
+          <p:cNvSpPr/>
+          <p:nvPr/>
+        </p:nvSpPr>
+        <p:spPr>
+          <a:xfrm>
+            <a:off x="5840938" y="4663440"/>
+            <a:ext cx="5802117" cy="822960"/>
+          </a:xfrm>
+          <a:prstGeom prst="roundRect">
+            <a:avLst>
+              <a:gd name="adj" fmla="val 6667"/>
+            </a:avLst>
+          </a:prstGeom>
+          <a:solidFill>
+            <a:srgbClr val="E8F3EE"/>
+          </a:solidFill>
+          <a:ln/>
+        </p:spPr>
+      </p:sp>
+      <p:sp>
+        <p:nvSpPr>
+          <p:cNvPr id="11" name="Text 8"/>
+          <p:cNvSpPr txBox="1"/>
+          <p:nvPr/>
+        </p:nvSpPr>
+        <p:spPr>
+          <a:xfrm>
+            <a:off x="6115258" y="4663440"/>
+            <a:ext cx="5253477" cy="822960"/>
+          </a:xfrm>
+          <a:prstGeom prst="rect">
+            <a:avLst/>
+          </a:prstGeom>
+          <a:noFill/>
+          <a:ln/>
+        </p:spPr>
+        <p:txBody>
+          <a:bodyPr wrap="square" lIns="0" tIns="0" rIns="0" bIns="0" rtlCol="0" anchor="ctr"/>
+          <a:lstStyle/>
+          <a:p>
+            <a:pPr indent="0" marL="0">
+              <a:buNone/>
+            </a:pPr>
+            <a:r>
+              <a:rPr lang="en-US" sz="1500" dirty="0">
+                <a:solidFill>
+                  <a:srgbClr val="1F3A5F"/>
+                </a:solidFill>
+                <a:latin typeface="Calibri" pitchFamily="34" charset="0"/>
+                <a:ea typeface="Calibri" pitchFamily="34" charset="-122"/>
+                <a:cs typeface="Calibri" pitchFamily="34" charset="-120"/>
+              </a:rPr>
+              <a:t>Le fichier HTML s'ouvre dans n'importe quel navigateur, sans Python, et reste interactif.</a:t>
+            </a:r>
+            <a:endParaRPr lang="en-US" sz="1500" dirty="0"/>
+          </a:p>
+        </p:txBody>
+      </p:sp>
+      <p:sp>
+        <p:nvSpPr>
+          <p:cNvPr id="12" name="Text 9"/>
+          <p:cNvSpPr txBox="1"/>
+          <p:nvPr/>
+        </p:nvSpPr>
+        <p:spPr>
+          <a:xfrm>
+            <a:off x="548640" y="6400800"/>
+            <a:ext cx="7315200" cy="274320"/>
+          </a:xfrm>
+          <a:prstGeom prst="rect">
+            <a:avLst/>
+          </a:prstGeom>
+          <a:noFill/>
+          <a:ln/>
+        </p:spPr>
+        <p:txBody>
+          <a:bodyPr wrap="square" lIns="0" tIns="0" rIns="0" bIns="0" rtlCol="0" anchor="ctr"/>
+          <a:lstStyle/>
+          <a:p>
+            <a:pPr indent="0" marL="0">
+              <a:buNone/>
+            </a:pPr>
+            <a:r>
+              <a:rPr lang="en-US" sz="1000" dirty="0">
+                <a:solidFill>
+                  <a:srgbClr val="6B7280"/>
+                </a:solidFill>
+                <a:latin typeface="Calibri" pitchFamily="34" charset="0"/>
+                <a:ea typeface="Calibri" pitchFamily="34" charset="-122"/>
+                <a:cs typeface="Calibri" pitchFamily="34" charset="-120"/>
+              </a:rPr>
+              <a:t>Analyse de données avec Python   |   Visualisation, version mini</a:t>
+            </a:r>
+            <a:endParaRPr lang="en-US" sz="1000" dirty="0"/>
+          </a:p>
+        </p:txBody>
+      </p:sp>
+      <p:sp>
+        <p:nvSpPr>
+          <p:cNvPr id="25" name="Slide Number Placeholder 0"/>
+          <p:cNvSpPr>
+            <a:spLocks noGrp="1"/>
+          </p:cNvSpPr>
+          <p:nvPr>
+            <p:ph type="sldNum" sz="quarter" idx="4294967295"/>
+          </p:nvPr>
+        </p:nvSpPr>
+        <p:spPr>
+          <a:xfrm>
+            <a:off x="11094415" y="6400800"/>
+            <a:ext cx="548640" cy="274320"/>
+          </a:xfrm>
+          <a:prstGeom prst="rect">
+            <a:avLst/>
+          </a:prstGeom>
+          <a:extLst>
+            <a:ext uri="{C572A759-6A51-4108-AA02-DFA0A04FC94B}">
+              <ma14:wrappingTextBoxFlag xmlns:ma14="http://schemas.microsoft.com/office/mac/drawingml/2011/main" val="0"/>
+            </a:ext>
+          </a:extLst>
+        </p:spPr>
+        <p:txBody>
+          <a:bodyPr/>
+          <a:lstStyle>
+            <a:lvl1pPr>
+              <a:defRPr sz="1000">
+                <a:solidFill>
+                  <a:srgbClr val="6B7280"/>
+                </a:solidFill>
+                <a:latin typeface="Calibri"/>
+                <a:ea typeface="Calibri"/>
+                <a:cs typeface="Calibri"/>
+              </a:defRPr>
+            </a:lvl1pPr>
+          </a:lstStyle>
+          <a:p>
+            <a:pPr algn="r"/>
+            <a:fld id="{F7021451-1387-4CA6-816F-3879F97B5CBC}" type="slidenum">
+              <a:rPr b="0" lang="en-US"/>
+              <a:t>11</a:t>
+            </a:fld>
+            <a:endParaRPr lang="en-US"/>
+          </a:p>
+        </p:txBody>
+      </p:sp>
+    </p:spTree>
+  </p:cSld>
+  <p:clrMapOvr>
+    <a:masterClrMapping/>
+  </p:clrMapOvr>
+</p:sld>
+</file>
+
+<file path=ppt/slides/slide12.xml><?xml version="1.0" encoding="utf-8"?>
+<p:sld xmlns:a="http://schemas.openxmlformats.org/drawingml/2006/main" xmlns:r="http://schemas.openxmlformats.org/officeDocument/2006/relationships" xmlns:p="http://schemas.openxmlformats.org/presentationml/2006/main">
+  <p:cSld name="Slide 12">
     <p:bg>
       <p:bgPr>
         <a:solidFill>
@@ -3213,325 +4017,6 @@
               <a:t>Le bon graphique   |   Trois règles de lisibilité</a:t>
             </a:r>
             <a:endParaRPr lang="en-US" sz="2000" dirty="0"/>
-          </a:p>
-        </p:txBody>
-      </p:sp>
-    </p:spTree>
-  </p:cSld>
-  <p:clrMapOvr>
-    <a:masterClrMapping/>
-  </p:clrMapOvr>
-</p:sld>
-</file>
-
-<file path=ppt/slides/slide12.xml><?xml version="1.0" encoding="utf-8"?>
-<p:sld xmlns:a="http://schemas.openxmlformats.org/drawingml/2006/main" xmlns:r="http://schemas.openxmlformats.org/officeDocument/2006/relationships" xmlns:p="http://schemas.openxmlformats.org/presentationml/2006/main">
-  <p:cSld name="Slide 12">
-    <p:bg>
-      <p:bgPr>
-        <a:solidFill>
-          <a:srgbClr val="FFFFFF"/>
-        </a:solidFill>
-      </p:bgPr>
-    </p:bg>
-    <p:spTree>
-      <p:nvGrpSpPr>
-        <p:cNvPr id="1" name=""/>
-        <p:cNvGrpSpPr/>
-        <p:nvPr/>
-      </p:nvGrpSpPr>
-      <p:grpSpPr>
-        <a:xfrm>
-          <a:off x="0" y="0"/>
-          <a:ext cx="0" cy="0"/>
-          <a:chOff x="0" y="0"/>
-          <a:chExt cx="0" cy="0"/>
-        </a:xfrm>
-      </p:grpSpPr>
-      <p:sp>
-        <p:nvSpPr>
-          <p:cNvPr id="2" name="Shape 0"/>
-          <p:cNvSpPr/>
-          <p:nvPr/>
-        </p:nvSpPr>
-        <p:spPr>
-          <a:xfrm>
-            <a:off x="548640" y="566928"/>
-            <a:ext cx="475488" cy="475488"/>
-          </a:xfrm>
-          <a:prstGeom prst="ellipse">
-            <a:avLst/>
-          </a:prstGeom>
-          <a:solidFill>
-            <a:srgbClr val="2F7D62"/>
-          </a:solidFill>
-          <a:ln/>
-        </p:spPr>
-      </p:sp>
-      <p:sp>
-        <p:nvSpPr>
-          <p:cNvPr id="3" name="Text 1"/>
-          <p:cNvSpPr txBox="1"/>
-          <p:nvPr/>
-        </p:nvSpPr>
-        <p:spPr>
-          <a:xfrm>
-            <a:off x="548640" y="566928"/>
-            <a:ext cx="475488" cy="475488"/>
-          </a:xfrm>
-          <a:prstGeom prst="rect">
-            <a:avLst/>
-          </a:prstGeom>
-          <a:noFill/>
-          <a:ln/>
-        </p:spPr>
-        <p:txBody>
-          <a:bodyPr wrap="square" lIns="0" tIns="0" rIns="0" bIns="0" rtlCol="0" anchor="ctr"/>
-          <a:lstStyle/>
-          <a:p>
-            <a:pPr algn="ctr" indent="0" marL="0">
-              <a:buNone/>
-            </a:pPr>
-            <a:r>
-              <a:rPr lang="en-US" sz="1600" b="1" dirty="0">
-                <a:solidFill>
-                  <a:srgbClr val="FFFFFF"/>
-                </a:solidFill>
-                <a:latin typeface="Calibri" pitchFamily="34" charset="0"/>
-                <a:ea typeface="Calibri" pitchFamily="34" charset="-122"/>
-                <a:cs typeface="Calibri" pitchFamily="34" charset="-120"/>
-              </a:rPr>
-              <a:t>3</a:t>
-            </a:r>
-            <a:endParaRPr lang="en-US" sz="1600" dirty="0"/>
-          </a:p>
-        </p:txBody>
-      </p:sp>
-      <p:sp>
-        <p:nvSpPr>
-          <p:cNvPr id="4" name="Text 2"/>
-          <p:cNvSpPr txBox="1"/>
-          <p:nvPr/>
-        </p:nvSpPr>
-        <p:spPr>
-          <a:xfrm>
-            <a:off x="1280160" y="164592"/>
-            <a:ext cx="10362895" cy="274320"/>
-          </a:xfrm>
-          <a:prstGeom prst="rect">
-            <a:avLst/>
-          </a:prstGeom>
-          <a:noFill/>
-          <a:ln/>
-        </p:spPr>
-        <p:txBody>
-          <a:bodyPr wrap="square" lIns="0" tIns="0" rIns="0" bIns="0" rtlCol="0" anchor="ctr"/>
-          <a:lstStyle/>
-          <a:p>
-            <a:pPr indent="0" marL="0">
-              <a:buNone/>
-            </a:pPr>
-            <a:r>
-              <a:rPr lang="en-US" sz="1200" b="1" spc="200" kern="0" dirty="0">
-                <a:solidFill>
-                  <a:srgbClr val="2F7D62"/>
-                </a:solidFill>
-                <a:latin typeface="Calibri" pitchFamily="34" charset="0"/>
-                <a:ea typeface="Calibri" pitchFamily="34" charset="-122"/>
-                <a:cs typeface="Calibri" pitchFamily="34" charset="-120"/>
-              </a:rPr>
-              <a:t>BIEN CHOISIR</a:t>
-            </a:r>
-            <a:endParaRPr lang="en-US" sz="1200" dirty="0"/>
-          </a:p>
-        </p:txBody>
-      </p:sp>
-      <p:sp>
-        <p:nvSpPr>
-          <p:cNvPr id="5" name="Text 3"/>
-          <p:cNvSpPr txBox="1"/>
-          <p:nvPr/>
-        </p:nvSpPr>
-        <p:spPr>
-          <a:xfrm>
-            <a:off x="1280160" y="457200"/>
-            <a:ext cx="10362895" cy="694944"/>
-          </a:xfrm>
-          <a:prstGeom prst="rect">
-            <a:avLst/>
-          </a:prstGeom>
-          <a:noFill/>
-          <a:ln/>
-        </p:spPr>
-        <p:txBody>
-          <a:bodyPr wrap="square" lIns="0" tIns="0" rIns="0" bIns="0" rtlCol="0" anchor="ctr"/>
-          <a:lstStyle/>
-          <a:p>
-            <a:pPr indent="0" marL="0">
-              <a:buNone/>
-            </a:pPr>
-            <a:r>
-              <a:rPr lang="en-US" sz="3000" b="1" dirty="0">
-                <a:solidFill>
-                  <a:srgbClr val="1F3A5F"/>
-                </a:solidFill>
-                <a:latin typeface="Cambria" pitchFamily="34" charset="0"/>
-                <a:ea typeface="Cambria" pitchFamily="34" charset="-122"/>
-                <a:cs typeface="Cambria" pitchFamily="34" charset="-120"/>
-              </a:rPr>
-              <a:t>Quel graphique pour quelle question ?</a:t>
-            </a:r>
-            <a:endParaRPr lang="en-US" sz="3000" dirty="0"/>
-          </a:p>
-        </p:txBody>
-      </p:sp>
-      <p:pic>
-        <p:nvPicPr>
-          <p:cNvPr id="6" name="Image 0" descr="Six graphiques : courbe, barres, histogramme, boîte, nuage de points et heatmap">    </p:cNvPr>
-          <p:cNvPicPr>
-            <a:picLocks noChangeAspect="1"/>
-          </p:cNvPicPr>
-          <p:nvPr/>
-        </p:nvPicPr>
-        <p:blipFill>
-          <a:blip r:embed="rId1"/>
-          <a:stretch>
-            <a:fillRect/>
-          </a:stretch>
-        </p:blipFill>
-        <p:spPr>
-          <a:xfrm>
-            <a:off x="2515492" y="1417320"/>
-            <a:ext cx="7160712" cy="3794760"/>
-          </a:xfrm>
-          <a:prstGeom prst="rect">
-            <a:avLst/>
-          </a:prstGeom>
-        </p:spPr>
-      </p:pic>
-      <p:sp>
-        <p:nvSpPr>
-          <p:cNvPr id="7" name="Text 4"/>
-          <p:cNvSpPr txBox="1"/>
-          <p:nvPr/>
-        </p:nvSpPr>
-        <p:spPr>
-          <a:xfrm>
-            <a:off x="548640" y="5532120"/>
-            <a:ext cx="11094415" cy="594360"/>
-          </a:xfrm>
-          <a:prstGeom prst="rect">
-            <a:avLst/>
-          </a:prstGeom>
-          <a:noFill/>
-          <a:ln/>
-        </p:spPr>
-        <p:txBody>
-          <a:bodyPr wrap="square" lIns="0" tIns="0" rIns="0" bIns="0" rtlCol="0" anchor="t"/>
-          <a:lstStyle/>
-          <a:p>
-            <a:pPr indent="0" marL="0">
-              <a:buNone/>
-            </a:pPr>
-            <a:r>
-              <a:rPr lang="en-US" sz="1500" dirty="0">
-                <a:solidFill>
-                  <a:srgbClr val="6B7280"/>
-                </a:solidFill>
-                <a:latin typeface="Calibri" pitchFamily="34" charset="0"/>
-                <a:ea typeface="Calibri" pitchFamily="34" charset="-122"/>
-                <a:cs typeface="Calibri" pitchFamily="34" charset="-120"/>
-              </a:rPr>
-              <a:t>Et pour choisir la bibliothèque : statique pour un rapport ou une diapositive, interactif pour explorer ou partager un fichier HTML.</a:t>
-            </a:r>
-            <a:endParaRPr lang="en-US" sz="1500" dirty="0"/>
-          </a:p>
-        </p:txBody>
-      </p:sp>
-      <p:sp>
-        <p:nvSpPr>
-          <p:cNvPr id="8" name="Text 5"/>
-          <p:cNvSpPr txBox="1"/>
-          <p:nvPr/>
-        </p:nvSpPr>
-        <p:spPr>
-          <a:xfrm>
-            <a:off x="548640" y="6400800"/>
-            <a:ext cx="7315200" cy="274320"/>
-          </a:xfrm>
-          <a:prstGeom prst="rect">
-            <a:avLst/>
-          </a:prstGeom>
-          <a:noFill/>
-          <a:ln/>
-        </p:spPr>
-        <p:txBody>
-          <a:bodyPr wrap="square" lIns="0" tIns="0" rIns="0" bIns="0" rtlCol="0" anchor="ctr"/>
-          <a:lstStyle/>
-          <a:p>
-            <a:pPr indent="0" marL="0">
-              <a:buNone/>
-            </a:pPr>
-            <a:r>
-              <a:rPr lang="en-US" sz="1000" dirty="0">
-                <a:solidFill>
-                  <a:srgbClr val="6B7280"/>
-                </a:solidFill>
-                <a:latin typeface="Calibri" pitchFamily="34" charset="0"/>
-                <a:ea typeface="Calibri" pitchFamily="34" charset="-122"/>
-                <a:cs typeface="Calibri" pitchFamily="34" charset="-120"/>
-              </a:rPr>
-              <a:t>Analyse de données avec Python   |   Visualisation, version mini</a:t>
-            </a:r>
-            <a:endParaRPr lang="en-US" sz="1000" dirty="0"/>
-          </a:p>
-        </p:txBody>
-      </p:sp>
-      <p:sp>
-        <p:nvSpPr>
-          <p:cNvPr id="25" name="Slide Number Placeholder 0"/>
-          <p:cNvSpPr>
-            <a:spLocks noGrp="1"/>
-          </p:cNvSpPr>
-          <p:nvPr>
-            <p:ph type="sldNum" sz="quarter" idx="4294967295"/>
-          </p:nvPr>
-        </p:nvSpPr>
-        <p:spPr>
-          <a:xfrm>
-            <a:off x="11094415" y="6400800"/>
-            <a:ext cx="548640" cy="274320"/>
-          </a:xfrm>
-          <a:prstGeom prst="rect">
-            <a:avLst/>
-          </a:prstGeom>
-          <a:extLst>
-            <a:ext uri="{C572A759-6A51-4108-AA02-DFA0A04FC94B}">
-              <ma14:wrappingTextBoxFlag xmlns:ma14="http://schemas.microsoft.com/office/mac/drawingml/2011/main" val="0"/>
-            </a:ext>
-          </a:extLst>
-        </p:spPr>
-        <p:txBody>
-          <a:bodyPr/>
-          <a:lstStyle>
-            <a:lvl1pPr>
-              <a:defRPr sz="1000">
-                <a:solidFill>
-                  <a:srgbClr val="6B7280"/>
-                </a:solidFill>
-                <a:latin typeface="Calibri"/>
-                <a:ea typeface="Calibri"/>
-                <a:cs typeface="Calibri"/>
-              </a:defRPr>
-            </a:lvl1pPr>
-          </a:lstStyle>
-          <a:p>
-            <a:pPr algn="r"/>
-            <a:fld id="{F7021451-1387-4CA6-816F-3879F97B5CBC}" type="slidenum">
-              <a:rPr b="0" lang="en-US"/>
-              <a:t>12</a:t>
-            </a:fld>
-            <a:endParaRPr lang="en-US"/>
           </a:p>
         </p:txBody>
       </p:sp>
@@ -3698,492 +4183,15 @@
                 <a:ea typeface="Cambria" pitchFamily="34" charset="-122"/>
                 <a:cs typeface="Cambria" pitchFamily="34" charset="-120"/>
               </a:rPr>
-              <a:t>Trois règles de lisibilité</a:t>
+              <a:t>Quel graphique pour quelle question ?</a:t>
             </a:r>
             <a:endParaRPr lang="en-US" sz="3000" dirty="0"/>
-          </a:p>
-        </p:txBody>
-      </p:sp>
-      <p:sp>
-        <p:nvSpPr>
-          <p:cNvPr id="6" name="Shape 4"/>
-          <p:cNvSpPr/>
-          <p:nvPr/>
-        </p:nvSpPr>
-        <p:spPr>
-          <a:xfrm>
-            <a:off x="548640" y="1417320"/>
-            <a:ext cx="3515258" cy="2606040"/>
-          </a:xfrm>
-          <a:prstGeom prst="roundRect">
-            <a:avLst>
-              <a:gd name="adj" fmla="val 2807"/>
-            </a:avLst>
-          </a:prstGeom>
-          <a:solidFill>
-            <a:srgbClr val="EEF3F7"/>
-          </a:solidFill>
-          <a:ln/>
-        </p:spPr>
-      </p:sp>
-      <p:sp>
-        <p:nvSpPr>
-          <p:cNvPr id="7" name="Shape 5"/>
-          <p:cNvSpPr/>
-          <p:nvPr/>
-        </p:nvSpPr>
-        <p:spPr>
-          <a:xfrm>
-            <a:off x="777240" y="1691640"/>
-            <a:ext cx="402336" cy="402336"/>
-          </a:xfrm>
-          <a:prstGeom prst="ellipse">
-            <a:avLst/>
-          </a:prstGeom>
-          <a:solidFill>
-            <a:srgbClr val="2F7D62"/>
-          </a:solidFill>
-          <a:ln/>
-        </p:spPr>
-      </p:sp>
-      <p:sp>
-        <p:nvSpPr>
-          <p:cNvPr id="8" name="Text 6"/>
-          <p:cNvSpPr txBox="1"/>
-          <p:nvPr/>
-        </p:nvSpPr>
-        <p:spPr>
-          <a:xfrm>
-            <a:off x="777240" y="1691640"/>
-            <a:ext cx="402336" cy="402336"/>
-          </a:xfrm>
-          <a:prstGeom prst="rect">
-            <a:avLst/>
-          </a:prstGeom>
-          <a:noFill/>
-          <a:ln/>
-        </p:spPr>
-        <p:txBody>
-          <a:bodyPr wrap="square" lIns="0" tIns="0" rIns="0" bIns="0" rtlCol="0" anchor="ctr"/>
-          <a:lstStyle/>
-          <a:p>
-            <a:pPr algn="ctr" indent="0" marL="0">
-              <a:buNone/>
-            </a:pPr>
-            <a:r>
-              <a:rPr lang="en-US" sz="1500" b="1" dirty="0">
-                <a:solidFill>
-                  <a:srgbClr val="FFFFFF"/>
-                </a:solidFill>
-                <a:latin typeface="Calibri" pitchFamily="34" charset="0"/>
-                <a:ea typeface="Calibri" pitchFamily="34" charset="-122"/>
-                <a:cs typeface="Calibri" pitchFamily="34" charset="-120"/>
-              </a:rPr>
-              <a:t>1</a:t>
-            </a:r>
-            <a:endParaRPr lang="en-US" sz="1500" dirty="0"/>
-          </a:p>
-        </p:txBody>
-      </p:sp>
-      <p:sp>
-        <p:nvSpPr>
-          <p:cNvPr id="9" name="Text 7"/>
-          <p:cNvSpPr txBox="1"/>
-          <p:nvPr/>
-        </p:nvSpPr>
-        <p:spPr>
-          <a:xfrm>
-            <a:off x="777240" y="2240280"/>
-            <a:ext cx="3058058" cy="548640"/>
-          </a:xfrm>
-          <a:prstGeom prst="rect">
-            <a:avLst/>
-          </a:prstGeom>
-          <a:noFill/>
-          <a:ln/>
-        </p:spPr>
-        <p:txBody>
-          <a:bodyPr wrap="square" lIns="0" tIns="0" rIns="0" bIns="0" rtlCol="0" anchor="t"/>
-          <a:lstStyle/>
-          <a:p>
-            <a:pPr indent="0" marL="0">
-              <a:buNone/>
-            </a:pPr>
-            <a:r>
-              <a:rPr lang="en-US" sz="1800" b="1" dirty="0">
-                <a:solidFill>
-                  <a:srgbClr val="1F3A5F"/>
-                </a:solidFill>
-                <a:latin typeface="Calibri" pitchFamily="34" charset="0"/>
-                <a:ea typeface="Calibri" pitchFamily="34" charset="-122"/>
-                <a:cs typeface="Calibri" pitchFamily="34" charset="-120"/>
-              </a:rPr>
-              <a:t>Un titre qui dit le message</a:t>
-            </a:r>
-            <a:endParaRPr lang="en-US" sz="1800" dirty="0"/>
-          </a:p>
-        </p:txBody>
-      </p:sp>
-      <p:sp>
-        <p:nvSpPr>
-          <p:cNvPr id="10" name="Text 8"/>
-          <p:cNvSpPr txBox="1"/>
-          <p:nvPr/>
-        </p:nvSpPr>
-        <p:spPr>
-          <a:xfrm>
-            <a:off x="777240" y="2880360"/>
-            <a:ext cx="3058058" cy="960120"/>
-          </a:xfrm>
-          <a:prstGeom prst="rect">
-            <a:avLst/>
-          </a:prstGeom>
-          <a:noFill/>
-          <a:ln/>
-        </p:spPr>
-        <p:txBody>
-          <a:bodyPr wrap="square" lIns="0" tIns="0" rIns="0" bIns="0" rtlCol="0" anchor="t"/>
-          <a:lstStyle/>
-          <a:p>
-            <a:pPr indent="0" marL="0">
-              <a:buNone/>
-            </a:pPr>
-            <a:r>
-              <a:rPr lang="en-US" sz="1500" dirty="0">
-                <a:solidFill>
-                  <a:srgbClr val="1F2933"/>
-                </a:solidFill>
-                <a:latin typeface="Calibri" pitchFamily="34" charset="0"/>
-                <a:ea typeface="Calibri" pitchFamily="34" charset="-122"/>
-                <a:cs typeface="Calibri" pitchFamily="34" charset="-120"/>
-              </a:rPr>
-              <a:t>« L'Île-de-France réalise près d'un tiers du CA » plutôt que « CA par région ».</a:t>
-            </a:r>
-            <a:endParaRPr lang="en-US" sz="1500" dirty="0"/>
-          </a:p>
-        </p:txBody>
-      </p:sp>
-      <p:sp>
-        <p:nvSpPr>
-          <p:cNvPr id="11" name="Shape 9"/>
-          <p:cNvSpPr/>
-          <p:nvPr/>
-        </p:nvSpPr>
-        <p:spPr>
-          <a:xfrm>
-            <a:off x="4338218" y="1417320"/>
-            <a:ext cx="3515258" cy="2606040"/>
-          </a:xfrm>
-          <a:prstGeom prst="roundRect">
-            <a:avLst>
-              <a:gd name="adj" fmla="val 2807"/>
-            </a:avLst>
-          </a:prstGeom>
-          <a:solidFill>
-            <a:srgbClr val="EEF3F7"/>
-          </a:solidFill>
-          <a:ln/>
-        </p:spPr>
-      </p:sp>
-      <p:sp>
-        <p:nvSpPr>
-          <p:cNvPr id="12" name="Shape 10"/>
-          <p:cNvSpPr/>
-          <p:nvPr/>
-        </p:nvSpPr>
-        <p:spPr>
-          <a:xfrm>
-            <a:off x="4566818" y="1691640"/>
-            <a:ext cx="402336" cy="402336"/>
-          </a:xfrm>
-          <a:prstGeom prst="ellipse">
-            <a:avLst/>
-          </a:prstGeom>
-          <a:solidFill>
-            <a:srgbClr val="2F7D62"/>
-          </a:solidFill>
-          <a:ln/>
-        </p:spPr>
-      </p:sp>
-      <p:sp>
-        <p:nvSpPr>
-          <p:cNvPr id="13" name="Text 11"/>
-          <p:cNvSpPr txBox="1"/>
-          <p:nvPr/>
-        </p:nvSpPr>
-        <p:spPr>
-          <a:xfrm>
-            <a:off x="4566818" y="1691640"/>
-            <a:ext cx="402336" cy="402336"/>
-          </a:xfrm>
-          <a:prstGeom prst="rect">
-            <a:avLst/>
-          </a:prstGeom>
-          <a:noFill/>
-          <a:ln/>
-        </p:spPr>
-        <p:txBody>
-          <a:bodyPr wrap="square" lIns="0" tIns="0" rIns="0" bIns="0" rtlCol="0" anchor="ctr"/>
-          <a:lstStyle/>
-          <a:p>
-            <a:pPr algn="ctr" indent="0" marL="0">
-              <a:buNone/>
-            </a:pPr>
-            <a:r>
-              <a:rPr lang="en-US" sz="1500" b="1" dirty="0">
-                <a:solidFill>
-                  <a:srgbClr val="FFFFFF"/>
-                </a:solidFill>
-                <a:latin typeface="Calibri" pitchFamily="34" charset="0"/>
-                <a:ea typeface="Calibri" pitchFamily="34" charset="-122"/>
-                <a:cs typeface="Calibri" pitchFamily="34" charset="-120"/>
-              </a:rPr>
-              <a:t>2</a:t>
-            </a:r>
-            <a:endParaRPr lang="en-US" sz="1500" dirty="0"/>
-          </a:p>
-        </p:txBody>
-      </p:sp>
-      <p:sp>
-        <p:nvSpPr>
-          <p:cNvPr id="14" name="Text 12"/>
-          <p:cNvSpPr txBox="1"/>
-          <p:nvPr/>
-        </p:nvSpPr>
-        <p:spPr>
-          <a:xfrm>
-            <a:off x="4566818" y="2240280"/>
-            <a:ext cx="3058058" cy="274320"/>
-          </a:xfrm>
-          <a:prstGeom prst="rect">
-            <a:avLst/>
-          </a:prstGeom>
-          <a:noFill/>
-          <a:ln/>
-        </p:spPr>
-        <p:txBody>
-          <a:bodyPr wrap="square" lIns="0" tIns="0" rIns="0" bIns="0" rtlCol="0" anchor="t"/>
-          <a:lstStyle/>
-          <a:p>
-            <a:pPr indent="0" marL="0">
-              <a:buNone/>
-            </a:pPr>
-            <a:r>
-              <a:rPr lang="en-US" sz="1800" b="1" dirty="0">
-                <a:solidFill>
-                  <a:srgbClr val="1F3A5F"/>
-                </a:solidFill>
-                <a:latin typeface="Calibri" pitchFamily="34" charset="0"/>
-                <a:ea typeface="Calibri" pitchFamily="34" charset="-122"/>
-                <a:cs typeface="Calibri" pitchFamily="34" charset="-120"/>
-              </a:rPr>
-              <a:t>Des axes honnêtes</a:t>
-            </a:r>
-            <a:endParaRPr lang="en-US" sz="1800" dirty="0"/>
-          </a:p>
-        </p:txBody>
-      </p:sp>
-      <p:sp>
-        <p:nvSpPr>
-          <p:cNvPr id="15" name="Text 13"/>
-          <p:cNvSpPr txBox="1"/>
-          <p:nvPr/>
-        </p:nvSpPr>
-        <p:spPr>
-          <a:xfrm>
-            <a:off x="4566818" y="2606040"/>
-            <a:ext cx="3058058" cy="1234440"/>
-          </a:xfrm>
-          <a:prstGeom prst="rect">
-            <a:avLst/>
-          </a:prstGeom>
-          <a:noFill/>
-          <a:ln/>
-        </p:spPr>
-        <p:txBody>
-          <a:bodyPr wrap="square" lIns="0" tIns="0" rIns="0" bIns="0" rtlCol="0" anchor="t"/>
-          <a:lstStyle/>
-          <a:p>
-            <a:pPr indent="0" marL="0">
-              <a:buNone/>
-            </a:pPr>
-            <a:r>
-              <a:rPr lang="en-US" sz="1500" dirty="0">
-                <a:solidFill>
-                  <a:srgbClr val="1F2933"/>
-                </a:solidFill>
-                <a:latin typeface="Calibri" pitchFamily="34" charset="0"/>
-                <a:ea typeface="Calibri" pitchFamily="34" charset="-122"/>
-                <a:cs typeface="Calibri" pitchFamily="34" charset="-120"/>
-              </a:rPr>
-              <a:t>Nommés avec leur unité ; des barres qui partent de zéro, sinon les écarts paraissent énormes.</a:t>
-            </a:r>
-            <a:endParaRPr lang="en-US" sz="1500" dirty="0"/>
-          </a:p>
-        </p:txBody>
-      </p:sp>
-      <p:sp>
-        <p:nvSpPr>
-          <p:cNvPr id="16" name="Shape 14"/>
-          <p:cNvSpPr/>
-          <p:nvPr/>
-        </p:nvSpPr>
-        <p:spPr>
-          <a:xfrm>
-            <a:off x="8127797" y="1417320"/>
-            <a:ext cx="3515258" cy="2606040"/>
-          </a:xfrm>
-          <a:prstGeom prst="roundRect">
-            <a:avLst>
-              <a:gd name="adj" fmla="val 2807"/>
-            </a:avLst>
-          </a:prstGeom>
-          <a:solidFill>
-            <a:srgbClr val="EEF3F7"/>
-          </a:solidFill>
-          <a:ln/>
-        </p:spPr>
-      </p:sp>
-      <p:sp>
-        <p:nvSpPr>
-          <p:cNvPr id="17" name="Shape 15"/>
-          <p:cNvSpPr/>
-          <p:nvPr/>
-        </p:nvSpPr>
-        <p:spPr>
-          <a:xfrm>
-            <a:off x="8356397" y="1691640"/>
-            <a:ext cx="402336" cy="402336"/>
-          </a:xfrm>
-          <a:prstGeom prst="ellipse">
-            <a:avLst/>
-          </a:prstGeom>
-          <a:solidFill>
-            <a:srgbClr val="2F7D62"/>
-          </a:solidFill>
-          <a:ln/>
-        </p:spPr>
-      </p:sp>
-      <p:sp>
-        <p:nvSpPr>
-          <p:cNvPr id="18" name="Text 16"/>
-          <p:cNvSpPr txBox="1"/>
-          <p:nvPr/>
-        </p:nvSpPr>
-        <p:spPr>
-          <a:xfrm>
-            <a:off x="8356397" y="1691640"/>
-            <a:ext cx="402336" cy="402336"/>
-          </a:xfrm>
-          <a:prstGeom prst="rect">
-            <a:avLst/>
-          </a:prstGeom>
-          <a:noFill/>
-          <a:ln/>
-        </p:spPr>
-        <p:txBody>
-          <a:bodyPr wrap="square" lIns="0" tIns="0" rIns="0" bIns="0" rtlCol="0" anchor="ctr"/>
-          <a:lstStyle/>
-          <a:p>
-            <a:pPr algn="ctr" indent="0" marL="0">
-              <a:buNone/>
-            </a:pPr>
-            <a:r>
-              <a:rPr lang="en-US" sz="1500" b="1" dirty="0">
-                <a:solidFill>
-                  <a:srgbClr val="FFFFFF"/>
-                </a:solidFill>
-                <a:latin typeface="Calibri" pitchFamily="34" charset="0"/>
-                <a:ea typeface="Calibri" pitchFamily="34" charset="-122"/>
-                <a:cs typeface="Calibri" pitchFamily="34" charset="-120"/>
-              </a:rPr>
-              <a:t>3</a:t>
-            </a:r>
-            <a:endParaRPr lang="en-US" sz="1500" dirty="0"/>
-          </a:p>
-        </p:txBody>
-      </p:sp>
-      <p:sp>
-        <p:nvSpPr>
-          <p:cNvPr id="19" name="Text 17"/>
-          <p:cNvSpPr txBox="1"/>
-          <p:nvPr/>
-        </p:nvSpPr>
-        <p:spPr>
-          <a:xfrm>
-            <a:off x="8356397" y="2240280"/>
-            <a:ext cx="3058058" cy="548640"/>
-          </a:xfrm>
-          <a:prstGeom prst="rect">
-            <a:avLst/>
-          </a:prstGeom>
-          <a:noFill/>
-          <a:ln/>
-        </p:spPr>
-        <p:txBody>
-          <a:bodyPr wrap="square" lIns="0" tIns="0" rIns="0" bIns="0" rtlCol="0" anchor="t"/>
-          <a:lstStyle/>
-          <a:p>
-            <a:pPr indent="0" marL="0">
-              <a:buNone/>
-            </a:pPr>
-            <a:r>
-              <a:rPr lang="en-US" sz="1800" b="1" dirty="0">
-                <a:solidFill>
-                  <a:srgbClr val="1F3A5F"/>
-                </a:solidFill>
-                <a:latin typeface="Calibri" pitchFamily="34" charset="0"/>
-                <a:ea typeface="Calibri" pitchFamily="34" charset="-122"/>
-                <a:cs typeface="Calibri" pitchFamily="34" charset="-120"/>
-              </a:rPr>
-              <a:t>Une couleur pour le message</a:t>
-            </a:r>
-            <a:endParaRPr lang="en-US" sz="1800" dirty="0"/>
-          </a:p>
-        </p:txBody>
-      </p:sp>
-      <p:sp>
-        <p:nvSpPr>
-          <p:cNvPr id="20" name="Text 18"/>
-          <p:cNvSpPr txBox="1"/>
-          <p:nvPr/>
-        </p:nvSpPr>
-        <p:spPr>
-          <a:xfrm>
-            <a:off x="8356397" y="2880360"/>
-            <a:ext cx="3058058" cy="960120"/>
-          </a:xfrm>
-          <a:prstGeom prst="rect">
-            <a:avLst/>
-          </a:prstGeom>
-          <a:noFill/>
-          <a:ln/>
-        </p:spPr>
-        <p:txBody>
-          <a:bodyPr wrap="square" lIns="0" tIns="0" rIns="0" bIns="0" rtlCol="0" anchor="t"/>
-          <a:lstStyle/>
-          <a:p>
-            <a:pPr indent="0" marL="0">
-              <a:buNone/>
-            </a:pPr>
-            <a:r>
-              <a:rPr lang="en-US" sz="1500" dirty="0">
-                <a:solidFill>
-                  <a:srgbClr val="1F2933"/>
-                </a:solidFill>
-                <a:latin typeface="Calibri" pitchFamily="34" charset="0"/>
-                <a:ea typeface="Calibri" pitchFamily="34" charset="-122"/>
-                <a:cs typeface="Calibri" pitchFamily="34" charset="-120"/>
-              </a:rPr>
-              <a:t>Des barres triées, du gris pour le reste ; ni rouge contre vert, ni camembert à nombreuses parts.</a:t>
-            </a:r>
-            <a:endParaRPr lang="en-US" sz="1500" dirty="0"/>
           </a:p>
         </p:txBody>
       </p:sp>
       <p:pic>
         <p:nvPicPr>
-          <p:cNvPr id="21" name="Image 0" descr="Le même écart de 6 % avec un axe tronqué, où il paraît énorme, puis avec un axe partant de zéro">    </p:cNvPr>
+          <p:cNvPr id="6" name="Image 0" descr="Six graphiques : courbe, barres, histogramme, boîte, nuage de points et heatmap">    </p:cNvPr>
           <p:cNvPicPr>
             <a:picLocks noChangeAspect="1"/>
           </p:cNvPicPr>
@@ -4197,8 +4205,8 @@
         </p:blipFill>
         <p:spPr>
           <a:xfrm>
-            <a:off x="3816180" y="4343400"/>
-            <a:ext cx="4559336" cy="1783080"/>
+            <a:off x="2515492" y="1417320"/>
+            <a:ext cx="7160712" cy="3794760"/>
           </a:xfrm>
           <a:prstGeom prst="rect">
             <a:avLst/>
@@ -4207,7 +4215,46 @@
       </p:pic>
       <p:sp>
         <p:nvSpPr>
-          <p:cNvPr id="22" name="Text 19"/>
+          <p:cNvPr id="7" name="Text 4"/>
+          <p:cNvSpPr txBox="1"/>
+          <p:nvPr/>
+        </p:nvSpPr>
+        <p:spPr>
+          <a:xfrm>
+            <a:off x="548640" y="5532120"/>
+            <a:ext cx="11094415" cy="594360"/>
+          </a:xfrm>
+          <a:prstGeom prst="rect">
+            <a:avLst/>
+          </a:prstGeom>
+          <a:noFill/>
+          <a:ln/>
+        </p:spPr>
+        <p:txBody>
+          <a:bodyPr wrap="square" lIns="0" tIns="0" rIns="0" bIns="0" rtlCol="0" anchor="t"/>
+          <a:lstStyle/>
+          <a:p>
+            <a:pPr indent="0" marL="0">
+              <a:buNone/>
+            </a:pPr>
+            <a:r>
+              <a:rPr lang="en-US" sz="1500" dirty="0">
+                <a:solidFill>
+                  <a:srgbClr val="6B7280"/>
+                </a:solidFill>
+                <a:latin typeface="Calibri" pitchFamily="34" charset="0"/>
+                <a:ea typeface="Calibri" pitchFamily="34" charset="-122"/>
+                <a:cs typeface="Calibri" pitchFamily="34" charset="-120"/>
+              </a:rPr>
+              <a:t>Et pour choisir la bibliothèque : statique pour un rapport ou une diapositive, interactif pour explorer ou partager un fichier HTML.</a:t>
+            </a:r>
+            <a:endParaRPr lang="en-US" sz="1500" dirty="0"/>
+          </a:p>
+        </p:txBody>
+      </p:sp>
+      <p:sp>
+        <p:nvSpPr>
+          <p:cNvPr id="8" name="Text 5"/>
           <p:cNvSpPr txBox="1"/>
           <p:nvPr/>
         </p:nvSpPr>
@@ -4326,14 +4373,112 @@
       </p:grpSpPr>
       <p:sp>
         <p:nvSpPr>
-          <p:cNvPr id="2" name="Text 0"/>
+          <p:cNvPr id="2" name="Shape 0"/>
+          <p:cNvSpPr/>
+          <p:nvPr/>
+        </p:nvSpPr>
+        <p:spPr>
+          <a:xfrm>
+            <a:off x="548640" y="566928"/>
+            <a:ext cx="475488" cy="475488"/>
+          </a:xfrm>
+          <a:prstGeom prst="ellipse">
+            <a:avLst/>
+          </a:prstGeom>
+          <a:solidFill>
+            <a:srgbClr val="2F7D62"/>
+          </a:solidFill>
+          <a:ln/>
+        </p:spPr>
+      </p:sp>
+      <p:sp>
+        <p:nvSpPr>
+          <p:cNvPr id="3" name="Text 1"/>
           <p:cNvSpPr txBox="1"/>
           <p:nvPr/>
         </p:nvSpPr>
         <p:spPr>
           <a:xfrm>
-            <a:off x="548640" y="457200"/>
-            <a:ext cx="11094415" cy="694944"/>
+            <a:off x="548640" y="566928"/>
+            <a:ext cx="475488" cy="475488"/>
+          </a:xfrm>
+          <a:prstGeom prst="rect">
+            <a:avLst/>
+          </a:prstGeom>
+          <a:noFill/>
+          <a:ln/>
+        </p:spPr>
+        <p:txBody>
+          <a:bodyPr wrap="square" lIns="0" tIns="0" rIns="0" bIns="0" rtlCol="0" anchor="ctr"/>
+          <a:lstStyle/>
+          <a:p>
+            <a:pPr algn="ctr" indent="0" marL="0">
+              <a:buNone/>
+            </a:pPr>
+            <a:r>
+              <a:rPr lang="en-US" sz="1600" b="1" dirty="0">
+                <a:solidFill>
+                  <a:srgbClr val="FFFFFF"/>
+                </a:solidFill>
+                <a:latin typeface="Calibri" pitchFamily="34" charset="0"/>
+                <a:ea typeface="Calibri" pitchFamily="34" charset="-122"/>
+                <a:cs typeface="Calibri" pitchFamily="34" charset="-120"/>
+              </a:rPr>
+              <a:t>3</a:t>
+            </a:r>
+            <a:endParaRPr lang="en-US" sz="1600" dirty="0"/>
+          </a:p>
+        </p:txBody>
+      </p:sp>
+      <p:sp>
+        <p:nvSpPr>
+          <p:cNvPr id="4" name="Text 2"/>
+          <p:cNvSpPr txBox="1"/>
+          <p:nvPr/>
+        </p:nvSpPr>
+        <p:spPr>
+          <a:xfrm>
+            <a:off x="1280160" y="164592"/>
+            <a:ext cx="10362895" cy="274320"/>
+          </a:xfrm>
+          <a:prstGeom prst="rect">
+            <a:avLst/>
+          </a:prstGeom>
+          <a:noFill/>
+          <a:ln/>
+        </p:spPr>
+        <p:txBody>
+          <a:bodyPr wrap="square" lIns="0" tIns="0" rIns="0" bIns="0" rtlCol="0" anchor="ctr"/>
+          <a:lstStyle/>
+          <a:p>
+            <a:pPr indent="0" marL="0">
+              <a:buNone/>
+            </a:pPr>
+            <a:r>
+              <a:rPr lang="en-US" sz="1200" b="1" spc="200" kern="0" dirty="0">
+                <a:solidFill>
+                  <a:srgbClr val="2F7D62"/>
+                </a:solidFill>
+                <a:latin typeface="Calibri" pitchFamily="34" charset="0"/>
+                <a:ea typeface="Calibri" pitchFamily="34" charset="-122"/>
+                <a:cs typeface="Calibri" pitchFamily="34" charset="-120"/>
+              </a:rPr>
+              <a:t>BIEN CHOISIR</a:t>
+            </a:r>
+            <a:endParaRPr lang="en-US" sz="1200" dirty="0"/>
+          </a:p>
+        </p:txBody>
+      </p:sp>
+      <p:sp>
+        <p:nvSpPr>
+          <p:cNvPr id="5" name="Text 3"/>
+          <p:cNvSpPr txBox="1"/>
+          <p:nvPr/>
+        </p:nvSpPr>
+        <p:spPr>
+          <a:xfrm>
+            <a:off x="1280160" y="457200"/>
+            <a:ext cx="10362895" cy="694944"/>
           </a:xfrm>
           <a:prstGeom prst="rect">
             <a:avLst/>
@@ -4357,7 +4502,7 @@
                 <a:ea typeface="Cambria" pitchFamily="34" charset="-122"/>
                 <a:cs typeface="Cambria" pitchFamily="34" charset="-120"/>
               </a:rPr>
-              <a:t>Pratique : TP4 mini</a:t>
+              <a:t>Trois règles de lisibilité</a:t>
             </a:r>
             <a:endParaRPr lang="en-US" sz="3000" dirty="0"/>
           </a:p>
@@ -4365,14 +4510,56 @@
       </p:sp>
       <p:sp>
         <p:nvSpPr>
-          <p:cNvPr id="3" name="Text 1"/>
+          <p:cNvPr id="6" name="Shape 4"/>
+          <p:cNvSpPr/>
+          <p:nvPr/>
+        </p:nvSpPr>
+        <p:spPr>
+          <a:xfrm>
+            <a:off x="548640" y="1417320"/>
+            <a:ext cx="3515258" cy="2606040"/>
+          </a:xfrm>
+          <a:prstGeom prst="roundRect">
+            <a:avLst>
+              <a:gd name="adj" fmla="val 2807"/>
+            </a:avLst>
+          </a:prstGeom>
+          <a:solidFill>
+            <a:srgbClr val="EEF3F7"/>
+          </a:solidFill>
+          <a:ln/>
+        </p:spPr>
+      </p:sp>
+      <p:sp>
+        <p:nvSpPr>
+          <p:cNvPr id="7" name="Shape 5"/>
+          <p:cNvSpPr/>
+          <p:nvPr/>
+        </p:nvSpPr>
+        <p:spPr>
+          <a:xfrm>
+            <a:off x="777240" y="1691640"/>
+            <a:ext cx="402336" cy="402336"/>
+          </a:xfrm>
+          <a:prstGeom prst="ellipse">
+            <a:avLst/>
+          </a:prstGeom>
+          <a:solidFill>
+            <a:srgbClr val="2F7D62"/>
+          </a:solidFill>
+          <a:ln/>
+        </p:spPr>
+      </p:sp>
+      <p:sp>
+        <p:nvSpPr>
+          <p:cNvPr id="8" name="Text 6"/>
           <p:cNvSpPr txBox="1"/>
           <p:nvPr/>
         </p:nvSpPr>
         <p:spPr>
           <a:xfrm>
-            <a:off x="548640" y="1417320"/>
-            <a:ext cx="11094415" cy="411480"/>
+            <a:off x="777240" y="1691640"/>
+            <a:ext cx="402336" cy="402336"/>
           </a:xfrm>
           <a:prstGeom prst="rect">
             <a:avLst/>
@@ -4381,21 +4568,638 @@
           <a:ln/>
         </p:spPr>
         <p:txBody>
-          <a:bodyPr wrap="square" lIns="0" tIns="0" rIns="0" bIns="0" rtlCol="0" anchor="t"/>
-          <a:lstStyle/>
-          <a:p>
-            <a:pPr indent="0" marL="0">
-              <a:buNone/>
-            </a:pPr>
-            <a:r>
-              <a:rPr lang="en-US" sz="1800" dirty="0">
-                <a:solidFill>
-                  <a:srgbClr val="6B7280"/>
+          <a:bodyPr wrap="square" lIns="0" tIns="0" rIns="0" bIns="0" rtlCol="0" anchor="ctr"/>
+          <a:lstStyle/>
+          <a:p>
+            <a:pPr algn="ctr" indent="0" marL="0">
+              <a:buNone/>
+            </a:pPr>
+            <a:r>
+              <a:rPr lang="en-US" sz="1500" b="1" dirty="0">
+                <a:solidFill>
+                  <a:srgbClr val="FFFFFF"/>
                 </a:solidFill>
                 <a:latin typeface="Calibri" pitchFamily="34" charset="0"/>
                 <a:ea typeface="Calibri" pitchFamily="34" charset="-122"/>
                 <a:cs typeface="Calibri" pitchFamily="34" charset="-120"/>
               </a:rPr>
+              <a:t>1</a:t>
+            </a:r>
+            <a:endParaRPr lang="en-US" sz="1500" dirty="0"/>
+          </a:p>
+        </p:txBody>
+      </p:sp>
+      <p:sp>
+        <p:nvSpPr>
+          <p:cNvPr id="9" name="Text 7"/>
+          <p:cNvSpPr txBox="1"/>
+          <p:nvPr/>
+        </p:nvSpPr>
+        <p:spPr>
+          <a:xfrm>
+            <a:off x="777240" y="2240280"/>
+            <a:ext cx="3058058" cy="548640"/>
+          </a:xfrm>
+          <a:prstGeom prst="rect">
+            <a:avLst/>
+          </a:prstGeom>
+          <a:noFill/>
+          <a:ln/>
+        </p:spPr>
+        <p:txBody>
+          <a:bodyPr wrap="square" lIns="0" tIns="0" rIns="0" bIns="0" rtlCol="0" anchor="t"/>
+          <a:lstStyle/>
+          <a:p>
+            <a:pPr indent="0" marL="0">
+              <a:buNone/>
+            </a:pPr>
+            <a:r>
+              <a:rPr lang="en-US" sz="1800" b="1" dirty="0">
+                <a:solidFill>
+                  <a:srgbClr val="1F3A5F"/>
+                </a:solidFill>
+                <a:latin typeface="Calibri" pitchFamily="34" charset="0"/>
+                <a:ea typeface="Calibri" pitchFamily="34" charset="-122"/>
+                <a:cs typeface="Calibri" pitchFamily="34" charset="-120"/>
+              </a:rPr>
+              <a:t>Un titre qui dit le message</a:t>
+            </a:r>
+            <a:endParaRPr lang="en-US" sz="1800" dirty="0"/>
+          </a:p>
+        </p:txBody>
+      </p:sp>
+      <p:sp>
+        <p:nvSpPr>
+          <p:cNvPr id="10" name="Text 8"/>
+          <p:cNvSpPr txBox="1"/>
+          <p:nvPr/>
+        </p:nvSpPr>
+        <p:spPr>
+          <a:xfrm>
+            <a:off x="777240" y="2880360"/>
+            <a:ext cx="3058058" cy="960120"/>
+          </a:xfrm>
+          <a:prstGeom prst="rect">
+            <a:avLst/>
+          </a:prstGeom>
+          <a:noFill/>
+          <a:ln/>
+        </p:spPr>
+        <p:txBody>
+          <a:bodyPr wrap="square" lIns="0" tIns="0" rIns="0" bIns="0" rtlCol="0" anchor="t"/>
+          <a:lstStyle/>
+          <a:p>
+            <a:pPr indent="0" marL="0">
+              <a:buNone/>
+            </a:pPr>
+            <a:r>
+              <a:rPr lang="en-US" sz="1500" dirty="0">
+                <a:solidFill>
+                  <a:srgbClr val="1F2933"/>
+                </a:solidFill>
+                <a:latin typeface="Calibri" pitchFamily="34" charset="0"/>
+                <a:ea typeface="Calibri" pitchFamily="34" charset="-122"/>
+                <a:cs typeface="Calibri" pitchFamily="34" charset="-120"/>
+              </a:rPr>
+              <a:t>« L'Île-de-France réalise près d'un tiers du CA » plutôt que « CA par région ».</a:t>
+            </a:r>
+            <a:endParaRPr lang="en-US" sz="1500" dirty="0"/>
+          </a:p>
+        </p:txBody>
+      </p:sp>
+      <p:sp>
+        <p:nvSpPr>
+          <p:cNvPr id="11" name="Shape 9"/>
+          <p:cNvSpPr/>
+          <p:nvPr/>
+        </p:nvSpPr>
+        <p:spPr>
+          <a:xfrm>
+            <a:off x="4338218" y="1417320"/>
+            <a:ext cx="3515258" cy="2606040"/>
+          </a:xfrm>
+          <a:prstGeom prst="roundRect">
+            <a:avLst>
+              <a:gd name="adj" fmla="val 2807"/>
+            </a:avLst>
+          </a:prstGeom>
+          <a:solidFill>
+            <a:srgbClr val="EEF3F7"/>
+          </a:solidFill>
+          <a:ln/>
+        </p:spPr>
+      </p:sp>
+      <p:sp>
+        <p:nvSpPr>
+          <p:cNvPr id="12" name="Shape 10"/>
+          <p:cNvSpPr/>
+          <p:nvPr/>
+        </p:nvSpPr>
+        <p:spPr>
+          <a:xfrm>
+            <a:off x="4566818" y="1691640"/>
+            <a:ext cx="402336" cy="402336"/>
+          </a:xfrm>
+          <a:prstGeom prst="ellipse">
+            <a:avLst/>
+          </a:prstGeom>
+          <a:solidFill>
+            <a:srgbClr val="2F7D62"/>
+          </a:solidFill>
+          <a:ln/>
+        </p:spPr>
+      </p:sp>
+      <p:sp>
+        <p:nvSpPr>
+          <p:cNvPr id="13" name="Text 11"/>
+          <p:cNvSpPr txBox="1"/>
+          <p:nvPr/>
+        </p:nvSpPr>
+        <p:spPr>
+          <a:xfrm>
+            <a:off x="4566818" y="1691640"/>
+            <a:ext cx="402336" cy="402336"/>
+          </a:xfrm>
+          <a:prstGeom prst="rect">
+            <a:avLst/>
+          </a:prstGeom>
+          <a:noFill/>
+          <a:ln/>
+        </p:spPr>
+        <p:txBody>
+          <a:bodyPr wrap="square" lIns="0" tIns="0" rIns="0" bIns="0" rtlCol="0" anchor="ctr"/>
+          <a:lstStyle/>
+          <a:p>
+            <a:pPr algn="ctr" indent="0" marL="0">
+              <a:buNone/>
+            </a:pPr>
+            <a:r>
+              <a:rPr lang="en-US" sz="1500" b="1" dirty="0">
+                <a:solidFill>
+                  <a:srgbClr val="FFFFFF"/>
+                </a:solidFill>
+                <a:latin typeface="Calibri" pitchFamily="34" charset="0"/>
+                <a:ea typeface="Calibri" pitchFamily="34" charset="-122"/>
+                <a:cs typeface="Calibri" pitchFamily="34" charset="-120"/>
+              </a:rPr>
+              <a:t>2</a:t>
+            </a:r>
+            <a:endParaRPr lang="en-US" sz="1500" dirty="0"/>
+          </a:p>
+        </p:txBody>
+      </p:sp>
+      <p:sp>
+        <p:nvSpPr>
+          <p:cNvPr id="14" name="Text 12"/>
+          <p:cNvSpPr txBox="1"/>
+          <p:nvPr/>
+        </p:nvSpPr>
+        <p:spPr>
+          <a:xfrm>
+            <a:off x="4566818" y="2240280"/>
+            <a:ext cx="3058058" cy="274320"/>
+          </a:xfrm>
+          <a:prstGeom prst="rect">
+            <a:avLst/>
+          </a:prstGeom>
+          <a:noFill/>
+          <a:ln/>
+        </p:spPr>
+        <p:txBody>
+          <a:bodyPr wrap="square" lIns="0" tIns="0" rIns="0" bIns="0" rtlCol="0" anchor="t"/>
+          <a:lstStyle/>
+          <a:p>
+            <a:pPr indent="0" marL="0">
+              <a:buNone/>
+            </a:pPr>
+            <a:r>
+              <a:rPr lang="en-US" sz="1800" b="1" dirty="0">
+                <a:solidFill>
+                  <a:srgbClr val="1F3A5F"/>
+                </a:solidFill>
+                <a:latin typeface="Calibri" pitchFamily="34" charset="0"/>
+                <a:ea typeface="Calibri" pitchFamily="34" charset="-122"/>
+                <a:cs typeface="Calibri" pitchFamily="34" charset="-120"/>
+              </a:rPr>
+              <a:t>Des axes honnêtes</a:t>
+            </a:r>
+            <a:endParaRPr lang="en-US" sz="1800" dirty="0"/>
+          </a:p>
+        </p:txBody>
+      </p:sp>
+      <p:sp>
+        <p:nvSpPr>
+          <p:cNvPr id="15" name="Text 13"/>
+          <p:cNvSpPr txBox="1"/>
+          <p:nvPr/>
+        </p:nvSpPr>
+        <p:spPr>
+          <a:xfrm>
+            <a:off x="4566818" y="2606040"/>
+            <a:ext cx="3058058" cy="1234440"/>
+          </a:xfrm>
+          <a:prstGeom prst="rect">
+            <a:avLst/>
+          </a:prstGeom>
+          <a:noFill/>
+          <a:ln/>
+        </p:spPr>
+        <p:txBody>
+          <a:bodyPr wrap="square" lIns="0" tIns="0" rIns="0" bIns="0" rtlCol="0" anchor="t"/>
+          <a:lstStyle/>
+          <a:p>
+            <a:pPr indent="0" marL="0">
+              <a:buNone/>
+            </a:pPr>
+            <a:r>
+              <a:rPr lang="en-US" sz="1500" dirty="0">
+                <a:solidFill>
+                  <a:srgbClr val="1F2933"/>
+                </a:solidFill>
+                <a:latin typeface="Calibri" pitchFamily="34" charset="0"/>
+                <a:ea typeface="Calibri" pitchFamily="34" charset="-122"/>
+                <a:cs typeface="Calibri" pitchFamily="34" charset="-120"/>
+              </a:rPr>
+              <a:t>Nommés avec leur unité ; des barres qui partent de zéro, sinon les écarts paraissent énormes.</a:t>
+            </a:r>
+            <a:endParaRPr lang="en-US" sz="1500" dirty="0"/>
+          </a:p>
+        </p:txBody>
+      </p:sp>
+      <p:sp>
+        <p:nvSpPr>
+          <p:cNvPr id="16" name="Shape 14"/>
+          <p:cNvSpPr/>
+          <p:nvPr/>
+        </p:nvSpPr>
+        <p:spPr>
+          <a:xfrm>
+            <a:off x="8127797" y="1417320"/>
+            <a:ext cx="3515258" cy="2606040"/>
+          </a:xfrm>
+          <a:prstGeom prst="roundRect">
+            <a:avLst>
+              <a:gd name="adj" fmla="val 2807"/>
+            </a:avLst>
+          </a:prstGeom>
+          <a:solidFill>
+            <a:srgbClr val="EEF3F7"/>
+          </a:solidFill>
+          <a:ln/>
+        </p:spPr>
+      </p:sp>
+      <p:sp>
+        <p:nvSpPr>
+          <p:cNvPr id="17" name="Shape 15"/>
+          <p:cNvSpPr/>
+          <p:nvPr/>
+        </p:nvSpPr>
+        <p:spPr>
+          <a:xfrm>
+            <a:off x="8356397" y="1691640"/>
+            <a:ext cx="402336" cy="402336"/>
+          </a:xfrm>
+          <a:prstGeom prst="ellipse">
+            <a:avLst/>
+          </a:prstGeom>
+          <a:solidFill>
+            <a:srgbClr val="2F7D62"/>
+          </a:solidFill>
+          <a:ln/>
+        </p:spPr>
+      </p:sp>
+      <p:sp>
+        <p:nvSpPr>
+          <p:cNvPr id="18" name="Text 16"/>
+          <p:cNvSpPr txBox="1"/>
+          <p:nvPr/>
+        </p:nvSpPr>
+        <p:spPr>
+          <a:xfrm>
+            <a:off x="8356397" y="1691640"/>
+            <a:ext cx="402336" cy="402336"/>
+          </a:xfrm>
+          <a:prstGeom prst="rect">
+            <a:avLst/>
+          </a:prstGeom>
+          <a:noFill/>
+          <a:ln/>
+        </p:spPr>
+        <p:txBody>
+          <a:bodyPr wrap="square" lIns="0" tIns="0" rIns="0" bIns="0" rtlCol="0" anchor="ctr"/>
+          <a:lstStyle/>
+          <a:p>
+            <a:pPr algn="ctr" indent="0" marL="0">
+              <a:buNone/>
+            </a:pPr>
+            <a:r>
+              <a:rPr lang="en-US" sz="1500" b="1" dirty="0">
+                <a:solidFill>
+                  <a:srgbClr val="FFFFFF"/>
+                </a:solidFill>
+                <a:latin typeface="Calibri" pitchFamily="34" charset="0"/>
+                <a:ea typeface="Calibri" pitchFamily="34" charset="-122"/>
+                <a:cs typeface="Calibri" pitchFamily="34" charset="-120"/>
+              </a:rPr>
+              <a:t>3</a:t>
+            </a:r>
+            <a:endParaRPr lang="en-US" sz="1500" dirty="0"/>
+          </a:p>
+        </p:txBody>
+      </p:sp>
+      <p:sp>
+        <p:nvSpPr>
+          <p:cNvPr id="19" name="Text 17"/>
+          <p:cNvSpPr txBox="1"/>
+          <p:nvPr/>
+        </p:nvSpPr>
+        <p:spPr>
+          <a:xfrm>
+            <a:off x="8356397" y="2240280"/>
+            <a:ext cx="3058058" cy="548640"/>
+          </a:xfrm>
+          <a:prstGeom prst="rect">
+            <a:avLst/>
+          </a:prstGeom>
+          <a:noFill/>
+          <a:ln/>
+        </p:spPr>
+        <p:txBody>
+          <a:bodyPr wrap="square" lIns="0" tIns="0" rIns="0" bIns="0" rtlCol="0" anchor="t"/>
+          <a:lstStyle/>
+          <a:p>
+            <a:pPr indent="0" marL="0">
+              <a:buNone/>
+            </a:pPr>
+            <a:r>
+              <a:rPr lang="en-US" sz="1800" b="1" dirty="0">
+                <a:solidFill>
+                  <a:srgbClr val="1F3A5F"/>
+                </a:solidFill>
+                <a:latin typeface="Calibri" pitchFamily="34" charset="0"/>
+                <a:ea typeface="Calibri" pitchFamily="34" charset="-122"/>
+                <a:cs typeface="Calibri" pitchFamily="34" charset="-120"/>
+              </a:rPr>
+              <a:t>Une couleur pour le message</a:t>
+            </a:r>
+            <a:endParaRPr lang="en-US" sz="1800" dirty="0"/>
+          </a:p>
+        </p:txBody>
+      </p:sp>
+      <p:sp>
+        <p:nvSpPr>
+          <p:cNvPr id="20" name="Text 18"/>
+          <p:cNvSpPr txBox="1"/>
+          <p:nvPr/>
+        </p:nvSpPr>
+        <p:spPr>
+          <a:xfrm>
+            <a:off x="8356397" y="2880360"/>
+            <a:ext cx="3058058" cy="960120"/>
+          </a:xfrm>
+          <a:prstGeom prst="rect">
+            <a:avLst/>
+          </a:prstGeom>
+          <a:noFill/>
+          <a:ln/>
+        </p:spPr>
+        <p:txBody>
+          <a:bodyPr wrap="square" lIns="0" tIns="0" rIns="0" bIns="0" rtlCol="0" anchor="t"/>
+          <a:lstStyle/>
+          <a:p>
+            <a:pPr indent="0" marL="0">
+              <a:buNone/>
+            </a:pPr>
+            <a:r>
+              <a:rPr lang="en-US" sz="1500" dirty="0">
+                <a:solidFill>
+                  <a:srgbClr val="1F2933"/>
+                </a:solidFill>
+                <a:latin typeface="Calibri" pitchFamily="34" charset="0"/>
+                <a:ea typeface="Calibri" pitchFamily="34" charset="-122"/>
+                <a:cs typeface="Calibri" pitchFamily="34" charset="-120"/>
+              </a:rPr>
+              <a:t>Des barres triées, du gris pour le reste ; ni rouge contre vert, ni camembert à nombreuses parts.</a:t>
+            </a:r>
+            <a:endParaRPr lang="en-US" sz="1500" dirty="0"/>
+          </a:p>
+        </p:txBody>
+      </p:sp>
+      <p:pic>
+        <p:nvPicPr>
+          <p:cNvPr id="21" name="Image 0" descr="Le même écart de 6 % avec un axe tronqué, où il paraît énorme, puis avec un axe partant de zéro">    </p:cNvPr>
+          <p:cNvPicPr>
+            <a:picLocks noChangeAspect="1"/>
+          </p:cNvPicPr>
+          <p:nvPr/>
+        </p:nvPicPr>
+        <p:blipFill>
+          <a:blip r:embed="rId1"/>
+          <a:stretch>
+            <a:fillRect/>
+          </a:stretch>
+        </p:blipFill>
+        <p:spPr>
+          <a:xfrm>
+            <a:off x="3816180" y="4343400"/>
+            <a:ext cx="4559336" cy="1783080"/>
+          </a:xfrm>
+          <a:prstGeom prst="rect">
+            <a:avLst/>
+          </a:prstGeom>
+        </p:spPr>
+      </p:pic>
+      <p:sp>
+        <p:nvSpPr>
+          <p:cNvPr id="22" name="Text 19"/>
+          <p:cNvSpPr txBox="1"/>
+          <p:nvPr/>
+        </p:nvSpPr>
+        <p:spPr>
+          <a:xfrm>
+            <a:off x="548640" y="6400800"/>
+            <a:ext cx="7315200" cy="274320"/>
+          </a:xfrm>
+          <a:prstGeom prst="rect">
+            <a:avLst/>
+          </a:prstGeom>
+          <a:noFill/>
+          <a:ln/>
+        </p:spPr>
+        <p:txBody>
+          <a:bodyPr wrap="square" lIns="0" tIns="0" rIns="0" bIns="0" rtlCol="0" anchor="ctr"/>
+          <a:lstStyle/>
+          <a:p>
+            <a:pPr indent="0" marL="0">
+              <a:buNone/>
+            </a:pPr>
+            <a:r>
+              <a:rPr lang="en-US" sz="1000" dirty="0">
+                <a:solidFill>
+                  <a:srgbClr val="6B7280"/>
+                </a:solidFill>
+                <a:latin typeface="Calibri" pitchFamily="34" charset="0"/>
+                <a:ea typeface="Calibri" pitchFamily="34" charset="-122"/>
+                <a:cs typeface="Calibri" pitchFamily="34" charset="-120"/>
+              </a:rPr>
+              <a:t>Analyse de données avec Python   |   Visualisation, version mini</a:t>
+            </a:r>
+            <a:endParaRPr lang="en-US" sz="1000" dirty="0"/>
+          </a:p>
+        </p:txBody>
+      </p:sp>
+      <p:sp>
+        <p:nvSpPr>
+          <p:cNvPr id="25" name="Slide Number Placeholder 0"/>
+          <p:cNvSpPr>
+            <a:spLocks noGrp="1"/>
+          </p:cNvSpPr>
+          <p:nvPr>
+            <p:ph type="sldNum" sz="quarter" idx="4294967295"/>
+          </p:nvPr>
+        </p:nvSpPr>
+        <p:spPr>
+          <a:xfrm>
+            <a:off x="11094415" y="6400800"/>
+            <a:ext cx="548640" cy="274320"/>
+          </a:xfrm>
+          <a:prstGeom prst="rect">
+            <a:avLst/>
+          </a:prstGeom>
+          <a:extLst>
+            <a:ext uri="{C572A759-6A51-4108-AA02-DFA0A04FC94B}">
+              <ma14:wrappingTextBoxFlag xmlns:ma14="http://schemas.microsoft.com/office/mac/drawingml/2011/main" val="0"/>
+            </a:ext>
+          </a:extLst>
+        </p:spPr>
+        <p:txBody>
+          <a:bodyPr/>
+          <a:lstStyle>
+            <a:lvl1pPr>
+              <a:defRPr sz="1000">
+                <a:solidFill>
+                  <a:srgbClr val="6B7280"/>
+                </a:solidFill>
+                <a:latin typeface="Calibri"/>
+                <a:ea typeface="Calibri"/>
+                <a:cs typeface="Calibri"/>
+              </a:defRPr>
+            </a:lvl1pPr>
+          </a:lstStyle>
+          <a:p>
+            <a:pPr algn="r"/>
+            <a:fld id="{F7021451-1387-4CA6-816F-3879F97B5CBC}" type="slidenum">
+              <a:rPr b="0" lang="en-US"/>
+              <a:t>14</a:t>
+            </a:fld>
+            <a:endParaRPr lang="en-US"/>
+          </a:p>
+        </p:txBody>
+      </p:sp>
+    </p:spTree>
+  </p:cSld>
+  <p:clrMapOvr>
+    <a:masterClrMapping/>
+  </p:clrMapOvr>
+</p:sld>
+</file>
+
+<file path=ppt/slides/slide15.xml><?xml version="1.0" encoding="utf-8"?>
+<p:sld xmlns:a="http://schemas.openxmlformats.org/drawingml/2006/main" xmlns:r="http://schemas.openxmlformats.org/officeDocument/2006/relationships" xmlns:p="http://schemas.openxmlformats.org/presentationml/2006/main">
+  <p:cSld name="Slide 15">
+    <p:bg>
+      <p:bgPr>
+        <a:solidFill>
+          <a:srgbClr val="FFFFFF"/>
+        </a:solidFill>
+      </p:bgPr>
+    </p:bg>
+    <p:spTree>
+      <p:nvGrpSpPr>
+        <p:cNvPr id="1" name=""/>
+        <p:cNvGrpSpPr/>
+        <p:nvPr/>
+      </p:nvGrpSpPr>
+      <p:grpSpPr>
+        <a:xfrm>
+          <a:off x="0" y="0"/>
+          <a:ext cx="0" cy="0"/>
+          <a:chOff x="0" y="0"/>
+          <a:chExt cx="0" cy="0"/>
+        </a:xfrm>
+      </p:grpSpPr>
+      <p:sp>
+        <p:nvSpPr>
+          <p:cNvPr id="2" name="Text 0"/>
+          <p:cNvSpPr txBox="1"/>
+          <p:nvPr/>
+        </p:nvSpPr>
+        <p:spPr>
+          <a:xfrm>
+            <a:off x="548640" y="457200"/>
+            <a:ext cx="11094415" cy="694944"/>
+          </a:xfrm>
+          <a:prstGeom prst="rect">
+            <a:avLst/>
+          </a:prstGeom>
+          <a:noFill/>
+          <a:ln/>
+        </p:spPr>
+        <p:txBody>
+          <a:bodyPr wrap="square" lIns="0" tIns="0" rIns="0" bIns="0" rtlCol="0" anchor="ctr"/>
+          <a:lstStyle/>
+          <a:p>
+            <a:pPr indent="0" marL="0">
+              <a:buNone/>
+            </a:pPr>
+            <a:r>
+              <a:rPr lang="en-US" sz="3000" b="1" dirty="0">
+                <a:solidFill>
+                  <a:srgbClr val="1F3A5F"/>
+                </a:solidFill>
+                <a:latin typeface="Cambria" pitchFamily="34" charset="0"/>
+                <a:ea typeface="Cambria" pitchFamily="34" charset="-122"/>
+                <a:cs typeface="Cambria" pitchFamily="34" charset="-120"/>
+              </a:rPr>
+              <a:t>Pratique : TP4 mini</a:t>
+            </a:r>
+            <a:endParaRPr lang="en-US" sz="3000" dirty="0"/>
+          </a:p>
+        </p:txBody>
+      </p:sp>
+      <p:sp>
+        <p:nvSpPr>
+          <p:cNvPr id="3" name="Text 1"/>
+          <p:cNvSpPr txBox="1"/>
+          <p:nvPr/>
+        </p:nvSpPr>
+        <p:spPr>
+          <a:xfrm>
+            <a:off x="548640" y="1417320"/>
+            <a:ext cx="11094415" cy="411480"/>
+          </a:xfrm>
+          <a:prstGeom prst="rect">
+            <a:avLst/>
+          </a:prstGeom>
+          <a:noFill/>
+          <a:ln/>
+        </p:spPr>
+        <p:txBody>
+          <a:bodyPr wrap="square" lIns="0" tIns="0" rIns="0" bIns="0" rtlCol="0" anchor="t"/>
+          <a:lstStyle/>
+          <a:p>
+            <a:pPr indent="0" marL="0">
+              <a:buNone/>
+            </a:pPr>
+            <a:r>
+              <a:rPr lang="en-US" sz="1800" dirty="0">
+                <a:solidFill>
+                  <a:srgbClr val="6B7280"/>
+                </a:solidFill>
+                <a:latin typeface="Calibri" pitchFamily="34" charset="0"/>
+                <a:ea typeface="Calibri" pitchFamily="34" charset="-122"/>
+                <a:cs typeface="Calibri" pitchFamily="34" charset="-120"/>
+              </a:rPr>
               <a:t>Dans exercices/tp04-mini-visualisation/tp04_mini.ipynb</a:t>
             </a:r>
             <a:endParaRPr lang="en-US" sz="1800" dirty="0"/>
@@ -4404,7 +5208,7 @@
       </p:sp>
       <p:graphicFrame>
         <p:nvGraphicFramePr>
-          <p:cNvPr id="15" name="Table 0"/>
+          <p:cNvPr id="16" name="Table 0"/>
           <p:cNvGraphicFramePr>
             <a:graphicFrameLocks noGrp="1"/>
           </p:cNvGraphicFramePr>
@@ -4429,7 +5233,7 @@
                 <a:gridCol w="2218883"/>
                 <a:gridCol w="7396277"/>
               </a:tblGrid>
-              <a:tr h="365379">
+              <a:tr h="350774">
                 <a:tc>
                   <a:txBody>
                     <a:bodyPr/>
@@ -4439,7 +5243,7 @@
                         <a:buNone/>
                       </a:pPr>
                       <a:r>
-                        <a:rPr lang="en-US" sz="1500" b="1" dirty="0">
+                        <a:rPr lang="en-US" sz="1400" b="1" dirty="0">
                           <a:solidFill>
                             <a:srgbClr val="FFFFFF"/>
                           </a:solidFill>
@@ -4503,7 +5307,7 @@
                         <a:buNone/>
                       </a:pPr>
                       <a:r>
-                        <a:rPr lang="en-US" sz="1500" b="1" dirty="0">
+                        <a:rPr lang="en-US" sz="1400" b="1" dirty="0">
                           <a:solidFill>
                             <a:srgbClr val="FFFFFF"/>
                           </a:solidFill>
@@ -4567,7 +5371,7 @@
                         <a:buNone/>
                       </a:pPr>
                       <a:r>
-                        <a:rPr lang="en-US" sz="1500" b="1" dirty="0">
+                        <a:rPr lang="en-US" sz="1400" b="1" dirty="0">
                           <a:solidFill>
                             <a:srgbClr val="FFFFFF"/>
                           </a:solidFill>
@@ -4623,7 +5427,7 @@
                   </a:tcPr>
                 </a:tc>
               </a:tr>
-              <a:tr h="365379">
+              <a:tr h="350774">
                 <a:tc>
                   <a:txBody>
                     <a:bodyPr/>
@@ -4633,7 +5437,7 @@
                         <a:buNone/>
                       </a:pPr>
                       <a:r>
-                        <a:rPr lang="en-US" sz="1500" dirty="0">
+                        <a:rPr lang="en-US" sz="1400" dirty="0">
                           <a:solidFill>
                             <a:srgbClr val="1F2933"/>
                           </a:solidFill>
@@ -4641,7 +5445,7 @@
                           <a:ea typeface="Calibri" pitchFamily="34" charset="-122"/>
                           <a:cs typeface="Calibri" pitchFamily="34" charset="-120"/>
                         </a:rPr>
-                        <a:t>1.1</a:t>
+                        <a:t>0.1</a:t>
                       </a:r>
                       <a:endParaRPr lang="en-US" sz="1200" dirty="0"/>
                     </a:p>
@@ -4697,7 +5501,7 @@
                         <a:buNone/>
                       </a:pPr>
                       <a:r>
-                        <a:rPr lang="en-US" sz="1500" dirty="0">
+                        <a:rPr lang="en-US" sz="1400" dirty="0">
                           <a:solidFill>
                             <a:srgbClr val="1F2933"/>
                           </a:solidFill>
@@ -4705,7 +5509,7 @@
                           <a:ea typeface="Calibri" pitchFamily="34" charset="-122"/>
                           <a:cs typeface="Calibri" pitchFamily="34" charset="-120"/>
                         </a:rPr>
-                        <a:t>matplotlib</a:t>
+                        <a:t>pandas</a:t>
                       </a:r>
                       <a:endParaRPr lang="en-US" sz="1200" dirty="0"/>
                     </a:p>
@@ -4761,7 +5565,7 @@
                         <a:buNone/>
                       </a:pPr>
                       <a:r>
-                        <a:rPr lang="en-US" sz="1500" dirty="0">
+                        <a:rPr lang="en-US" sz="1400" dirty="0">
                           <a:solidFill>
                             <a:srgbClr val="1F2933"/>
                           </a:solidFill>
@@ -4769,7 +5573,21 @@
                           <a:ea typeface="Calibri" pitchFamily="34" charset="-122"/>
                           <a:cs typeface="Calibri" pitchFamily="34" charset="-120"/>
                         </a:rPr>
-                        <a:t>la courbe du chiffre d'affaires mensuel, axe à partir de zéro</a:t>
+                        <a:t>un premier aperçu en une ligne avec </a:t>
+                      </a:r>
+                      <a:pPr indent="0" marL="0">
+                        <a:buNone/>
+                      </a:pPr>
+                      <a:r>
+                        <a:rPr lang="en-US" sz="1400" dirty="0">
+                          <a:solidFill>
+                            <a:srgbClr val="1F3A5F"/>
+                          </a:solidFill>
+                          <a:latin typeface="Courier New" pitchFamily="34" charset="0"/>
+                          <a:ea typeface="Courier New" pitchFamily="34" charset="-122"/>
+                          <a:cs typeface="Courier New" pitchFamily="34" charset="-120"/>
+                        </a:rPr>
+                        <a:t>.plot()</a:t>
                       </a:r>
                       <a:endParaRPr lang="en-US" sz="1200" dirty="0"/>
                     </a:p>
@@ -4817,7 +5635,7 @@
                   </a:tcPr>
                 </a:tc>
               </a:tr>
-              <a:tr h="584454">
+              <a:tr h="350774">
                 <a:tc>
                   <a:txBody>
                     <a:bodyPr/>
@@ -4827,7 +5645,7 @@
                         <a:buNone/>
                       </a:pPr>
                       <a:r>
-                        <a:rPr lang="en-US" sz="1500" dirty="0">
+                        <a:rPr lang="en-US" sz="1400" dirty="0">
                           <a:solidFill>
                             <a:srgbClr val="1F2933"/>
                           </a:solidFill>
@@ -4835,7 +5653,7 @@
                           <a:ea typeface="Calibri" pitchFamily="34" charset="-122"/>
                           <a:cs typeface="Calibri" pitchFamily="34" charset="-120"/>
                         </a:rPr>
-                        <a:t>1.2</a:t>
+                        <a:t>1.1</a:t>
                       </a:r>
                       <a:endParaRPr lang="en-US" sz="1200" dirty="0"/>
                     </a:p>
@@ -4891,7 +5709,7 @@
                         <a:buNone/>
                       </a:pPr>
                       <a:r>
-                        <a:rPr lang="en-US" sz="1500" dirty="0">
+                        <a:rPr lang="en-US" sz="1400" dirty="0">
                           <a:solidFill>
                             <a:srgbClr val="1F2933"/>
                           </a:solidFill>
@@ -4955,7 +5773,7 @@
                         <a:buNone/>
                       </a:pPr>
                       <a:r>
-                        <a:rPr lang="en-US" sz="1500" dirty="0">
+                        <a:rPr lang="en-US" sz="1400" dirty="0">
                           <a:solidFill>
                             <a:srgbClr val="1F2933"/>
                           </a:solidFill>
@@ -4963,35 +5781,7 @@
                           <a:ea typeface="Calibri" pitchFamily="34" charset="-122"/>
                           <a:cs typeface="Calibri" pitchFamily="34" charset="-120"/>
                         </a:rPr>
-                        <a:t>les barres horizontales par région, triées, avec leurs valeurs (</a:t>
-                      </a:r>
-                      <a:pPr indent="0" marL="0">
-                        <a:buNone/>
-                      </a:pPr>
-                      <a:r>
-                        <a:rPr lang="en-US" sz="1500" dirty="0">
-                          <a:solidFill>
-                            <a:srgbClr val="1F3A5F"/>
-                          </a:solidFill>
-                          <a:latin typeface="Courier New" pitchFamily="34" charset="0"/>
-                          <a:ea typeface="Courier New" pitchFamily="34" charset="-122"/>
-                          <a:cs typeface="Courier New" pitchFamily="34" charset="-120"/>
-                        </a:rPr>
-                        <a:t>bar_label</a:t>
-                      </a:r>
-                      <a:pPr indent="0" marL="0">
-                        <a:buNone/>
-                      </a:pPr>
-                      <a:r>
-                        <a:rPr lang="en-US" sz="1500" dirty="0">
-                          <a:solidFill>
-                            <a:srgbClr val="1F2933"/>
-                          </a:solidFill>
-                          <a:latin typeface="Calibri" pitchFamily="34" charset="0"/>
-                          <a:ea typeface="Calibri" pitchFamily="34" charset="-122"/>
-                          <a:cs typeface="Calibri" pitchFamily="34" charset="-120"/>
-                        </a:rPr>
-                        <a:t>)</a:t>
+                        <a:t>la courbe du chiffre d'affaires mensuel, axe à partir de zéro</a:t>
                       </a:r>
                       <a:endParaRPr lang="en-US" sz="1200" dirty="0"/>
                     </a:p>
@@ -5039,7 +5829,7 @@
                   </a:tcPr>
                 </a:tc>
               </a:tr>
-              <a:tr h="365379">
+              <a:tr h="350774">
                 <a:tc>
                   <a:txBody>
                     <a:bodyPr/>
@@ -5049,7 +5839,7 @@
                         <a:buNone/>
                       </a:pPr>
                       <a:r>
-                        <a:rPr lang="en-US" sz="1500" dirty="0">
+                        <a:rPr lang="en-US" sz="1400" dirty="0">
                           <a:solidFill>
                             <a:srgbClr val="1F2933"/>
                           </a:solidFill>
@@ -5057,7 +5847,7 @@
                           <a:ea typeface="Calibri" pitchFamily="34" charset="-122"/>
                           <a:cs typeface="Calibri" pitchFamily="34" charset="-120"/>
                         </a:rPr>
-                        <a:t>2.1</a:t>
+                        <a:t>1.2</a:t>
                       </a:r>
                       <a:endParaRPr lang="en-US" sz="1200" dirty="0"/>
                     </a:p>
@@ -5113,7 +5903,7 @@
                         <a:buNone/>
                       </a:pPr>
                       <a:r>
-                        <a:rPr lang="en-US" sz="1500" dirty="0">
+                        <a:rPr lang="en-US" sz="1400" dirty="0">
                           <a:solidFill>
                             <a:srgbClr val="1F2933"/>
                           </a:solidFill>
@@ -5121,7 +5911,7 @@
                           <a:ea typeface="Calibri" pitchFamily="34" charset="-122"/>
                           <a:cs typeface="Calibri" pitchFamily="34" charset="-120"/>
                         </a:rPr>
-                        <a:t>seaborn</a:t>
+                        <a:t>matplotlib</a:t>
                       </a:r>
                       <a:endParaRPr lang="en-US" sz="1200" dirty="0"/>
                     </a:p>
@@ -5177,7 +5967,7 @@
                         <a:buNone/>
                       </a:pPr>
                       <a:r>
-                        <a:rPr lang="en-US" sz="1500" dirty="0">
+                        <a:rPr lang="en-US" sz="1400" dirty="0">
                           <a:solidFill>
                             <a:srgbClr val="1F2933"/>
                           </a:solidFill>
@@ -5185,7 +5975,35 @@
                           <a:ea typeface="Calibri" pitchFamily="34" charset="-122"/>
                           <a:cs typeface="Calibri" pitchFamily="34" charset="-120"/>
                         </a:rPr>
-                        <a:t>la boîte à moustaches du montant par catégorie</a:t>
+                        <a:t>les barres horizontales par région, triées, avec leurs valeurs (</a:t>
+                      </a:r>
+                      <a:pPr indent="0" marL="0">
+                        <a:buNone/>
+                      </a:pPr>
+                      <a:r>
+                        <a:rPr lang="en-US" sz="1400" dirty="0">
+                          <a:solidFill>
+                            <a:srgbClr val="1F3A5F"/>
+                          </a:solidFill>
+                          <a:latin typeface="Courier New" pitchFamily="34" charset="0"/>
+                          <a:ea typeface="Courier New" pitchFamily="34" charset="-122"/>
+                          <a:cs typeface="Courier New" pitchFamily="34" charset="-120"/>
+                        </a:rPr>
+                        <a:t>bar_label</a:t>
+                      </a:r>
+                      <a:pPr indent="0" marL="0">
+                        <a:buNone/>
+                      </a:pPr>
+                      <a:r>
+                        <a:rPr lang="en-US" sz="1400" dirty="0">
+                          <a:solidFill>
+                            <a:srgbClr val="1F2933"/>
+                          </a:solidFill>
+                          <a:latin typeface="Calibri" pitchFamily="34" charset="0"/>
+                          <a:ea typeface="Calibri" pitchFamily="34" charset="-122"/>
+                          <a:cs typeface="Calibri" pitchFamily="34" charset="-120"/>
+                        </a:rPr>
+                        <a:t>)</a:t>
                       </a:r>
                       <a:endParaRPr lang="en-US" sz="1200" dirty="0"/>
                     </a:p>
@@ -5233,7 +6051,7 @@
                   </a:tcPr>
                 </a:tc>
               </a:tr>
-              <a:tr h="365379">
+              <a:tr h="350774">
                 <a:tc>
                   <a:txBody>
                     <a:bodyPr/>
@@ -5243,7 +6061,7 @@
                         <a:buNone/>
                       </a:pPr>
                       <a:r>
-                        <a:rPr lang="en-US" sz="1500" dirty="0">
+                        <a:rPr lang="en-US" sz="1400" dirty="0">
                           <a:solidFill>
                             <a:srgbClr val="1F2933"/>
                           </a:solidFill>
@@ -5251,7 +6069,7 @@
                           <a:ea typeface="Calibri" pitchFamily="34" charset="-122"/>
                           <a:cs typeface="Calibri" pitchFamily="34" charset="-120"/>
                         </a:rPr>
-                        <a:t>2.2</a:t>
+                        <a:t>2.1</a:t>
                       </a:r>
                       <a:endParaRPr lang="en-US" sz="1200" dirty="0"/>
                     </a:p>
@@ -5307,7 +6125,7 @@
                         <a:buNone/>
                       </a:pPr>
                       <a:r>
-                        <a:rPr lang="en-US" sz="1500" dirty="0">
+                        <a:rPr lang="en-US" sz="1400" dirty="0">
                           <a:solidFill>
                             <a:srgbClr val="1F2933"/>
                           </a:solidFill>
@@ -5371,7 +6189,7 @@
                         <a:buNone/>
                       </a:pPr>
                       <a:r>
-                        <a:rPr lang="en-US" sz="1500" dirty="0">
+                        <a:rPr lang="en-US" sz="1400" dirty="0">
                           <a:solidFill>
                             <a:srgbClr val="1F2933"/>
                           </a:solidFill>
@@ -5379,7 +6197,7 @@
                           <a:ea typeface="Calibri" pitchFamily="34" charset="-122"/>
                           <a:cs typeface="Calibri" pitchFamily="34" charset="-120"/>
                         </a:rPr>
-                        <a:t>la heatmap du taux de réalisation, région par mois</a:t>
+                        <a:t>la boîte à moustaches du montant par catégorie</a:t>
                       </a:r>
                       <a:endParaRPr lang="en-US" sz="1200" dirty="0"/>
                     </a:p>
@@ -5427,7 +6245,7 @@
                   </a:tcPr>
                 </a:tc>
               </a:tr>
-              <a:tr h="365379">
+              <a:tr h="350774">
                 <a:tc>
                   <a:txBody>
                     <a:bodyPr/>
@@ -5437,7 +6255,7 @@
                         <a:buNone/>
                       </a:pPr>
                       <a:r>
-                        <a:rPr lang="en-US" sz="1500" dirty="0">
+                        <a:rPr lang="en-US" sz="1400" dirty="0">
                           <a:solidFill>
                             <a:srgbClr val="1F2933"/>
                           </a:solidFill>
@@ -5445,7 +6263,7 @@
                           <a:ea typeface="Calibri" pitchFamily="34" charset="-122"/>
                           <a:cs typeface="Calibri" pitchFamily="34" charset="-120"/>
                         </a:rPr>
-                        <a:t>3.1, 3.2</a:t>
+                        <a:t>2.2</a:t>
                       </a:r>
                       <a:endParaRPr lang="en-US" sz="1200" dirty="0"/>
                     </a:p>
@@ -5501,7 +6319,7 @@
                         <a:buNone/>
                       </a:pPr>
                       <a:r>
-                        <a:rPr lang="en-US" sz="1500" dirty="0">
+                        <a:rPr lang="en-US" sz="1400" dirty="0">
                           <a:solidFill>
                             <a:srgbClr val="1F2933"/>
                           </a:solidFill>
@@ -5509,7 +6327,7 @@
                           <a:ea typeface="Calibri" pitchFamily="34" charset="-122"/>
                           <a:cs typeface="Calibri" pitchFamily="34" charset="-120"/>
                         </a:rPr>
-                        <a:t>plotly</a:t>
+                        <a:t>seaborn</a:t>
                       </a:r>
                       <a:endParaRPr lang="en-US" sz="1200" dirty="0"/>
                     </a:p>
@@ -5565,7 +6383,7 @@
                         <a:buNone/>
                       </a:pPr>
                       <a:r>
-                        <a:rPr lang="en-US" sz="1500" dirty="0">
+                        <a:rPr lang="en-US" sz="1400" dirty="0">
                           <a:solidFill>
                             <a:srgbClr val="1F2933"/>
                           </a:solidFill>
@@ -5573,7 +6391,7 @@
                           <a:ea typeface="Calibri" pitchFamily="34" charset="-122"/>
                           <a:cs typeface="Calibri" pitchFamily="34" charset="-120"/>
                         </a:rPr>
-                        <a:t>les courbes interactives par région, puis l'export HTML</a:t>
+                        <a:t>la heatmap du taux de réalisation, région par mois</a:t>
                       </a:r>
                       <a:endParaRPr lang="en-US" sz="1200" dirty="0"/>
                     </a:p>
@@ -5621,7 +6439,7 @@
                   </a:tcPr>
                 </a:tc>
               </a:tr>
-              <a:tr h="365379">
+              <a:tr h="350774">
                 <a:tc>
                   <a:txBody>
                     <a:bodyPr/>
@@ -5631,7 +6449,7 @@
                         <a:buNone/>
                       </a:pPr>
                       <a:r>
-                        <a:rPr lang="en-US" sz="1500" dirty="0">
+                        <a:rPr lang="en-US" sz="1400" dirty="0">
                           <a:solidFill>
                             <a:srgbClr val="1F2933"/>
                           </a:solidFill>
@@ -5639,7 +6457,7 @@
                           <a:ea typeface="Calibri" pitchFamily="34" charset="-122"/>
                           <a:cs typeface="Calibri" pitchFamily="34" charset="-120"/>
                         </a:rPr>
-                        <a:t>4.1</a:t>
+                        <a:t>3.1, 3.2</a:t>
                       </a:r>
                       <a:endParaRPr lang="en-US" sz="1200" dirty="0"/>
                     </a:p>
@@ -5695,7 +6513,7 @@
                         <a:buNone/>
                       </a:pPr>
                       <a:r>
-                        <a:rPr lang="en-US" sz="1500" dirty="0">
+                        <a:rPr lang="en-US" sz="1400" dirty="0">
                           <a:solidFill>
                             <a:srgbClr val="1F2933"/>
                           </a:solidFill>
@@ -5703,7 +6521,7 @@
                           <a:ea typeface="Calibri" pitchFamily="34" charset="-122"/>
                           <a:cs typeface="Calibri" pitchFamily="34" charset="-120"/>
                         </a:rPr>
-                        <a:t>matplotlib</a:t>
+                        <a:t>plotly</a:t>
                       </a:r>
                       <a:endParaRPr lang="en-US" sz="1200" dirty="0"/>
                     </a:p>
@@ -5759,7 +6577,201 @@
                         <a:buNone/>
                       </a:pPr>
                       <a:r>
-                        <a:rPr lang="en-US" sz="1500" dirty="0">
+                        <a:rPr lang="en-US" sz="1400" dirty="0">
+                          <a:solidFill>
+                            <a:srgbClr val="1F2933"/>
+                          </a:solidFill>
+                          <a:latin typeface="Calibri" pitchFamily="34" charset="0"/>
+                          <a:ea typeface="Calibri" pitchFamily="34" charset="-122"/>
+                          <a:cs typeface="Calibri" pitchFamily="34" charset="-120"/>
+                        </a:rPr>
+                        <a:t>les courbes interactives par région, puis l'export HTML</a:t>
+                      </a:r>
+                      <a:endParaRPr lang="en-US" sz="1200" dirty="0"/>
+                    </a:p>
+                  </a:txBody>
+                  <a:tcPr marL="109728" marR="109728" marT="54864" marB="54864" anchor="ctr">
+                    <a:lnL w="9525" cap="flat" cmpd="sng" algn="ctr">
+                      <a:solidFill>
+                        <a:srgbClr val="D5DCE3"/>
+                      </a:solidFill>
+                      <a:prstDash val="solid"/>
+                      <a:round/>
+                      <a:headEnd type="none" w="med" len="med"/>
+                      <a:tailEnd type="none" w="med" len="med"/>
+                    </a:lnL>
+                    <a:lnR w="9525" cap="flat" cmpd="sng" algn="ctr">
+                      <a:solidFill>
+                        <a:srgbClr val="D5DCE3"/>
+                      </a:solidFill>
+                      <a:prstDash val="solid"/>
+                      <a:round/>
+                      <a:headEnd type="none" w="med" len="med"/>
+                      <a:tailEnd type="none" w="med" len="med"/>
+                    </a:lnR>
+                    <a:lnT w="9525" cap="flat" cmpd="sng" algn="ctr">
+                      <a:solidFill>
+                        <a:srgbClr val="D5DCE3"/>
+                      </a:solidFill>
+                      <a:prstDash val="solid"/>
+                      <a:round/>
+                      <a:headEnd type="none" w="med" len="med"/>
+                      <a:tailEnd type="none" w="med" len="med"/>
+                    </a:lnT>
+                    <a:lnB w="9525" cap="flat" cmpd="sng" algn="ctr">
+                      <a:solidFill>
+                        <a:srgbClr val="D5DCE3"/>
+                      </a:solidFill>
+                      <a:prstDash val="solid"/>
+                      <a:round/>
+                      <a:headEnd type="none" w="med" len="med"/>
+                      <a:tailEnd type="none" w="med" len="med"/>
+                    </a:lnB>
+                    <a:solidFill>
+                      <a:srgbClr val="F7F9FB"/>
+                    </a:solidFill>
+                  </a:tcPr>
+                </a:tc>
+              </a:tr>
+              <a:tr h="350774">
+                <a:tc>
+                  <a:txBody>
+                    <a:bodyPr/>
+                    <a:lstStyle/>
+                    <a:p>
+                      <a:pPr indent="0" marL="0">
+                        <a:buNone/>
+                      </a:pPr>
+                      <a:r>
+                        <a:rPr lang="en-US" sz="1400" dirty="0">
+                          <a:solidFill>
+                            <a:srgbClr val="1F2933"/>
+                          </a:solidFill>
+                          <a:latin typeface="Calibri" pitchFamily="34" charset="0"/>
+                          <a:ea typeface="Calibri" pitchFamily="34" charset="-122"/>
+                          <a:cs typeface="Calibri" pitchFamily="34" charset="-120"/>
+                        </a:rPr>
+                        <a:t>4.1</a:t>
+                      </a:r>
+                      <a:endParaRPr lang="en-US" sz="1200" dirty="0"/>
+                    </a:p>
+                  </a:txBody>
+                  <a:tcPr marL="109728" marR="109728" marT="54864" marB="54864" anchor="ctr">
+                    <a:lnL w="9525" cap="flat" cmpd="sng" algn="ctr">
+                      <a:solidFill>
+                        <a:srgbClr val="D5DCE3"/>
+                      </a:solidFill>
+                      <a:prstDash val="solid"/>
+                      <a:round/>
+                      <a:headEnd type="none" w="med" len="med"/>
+                      <a:tailEnd type="none" w="med" len="med"/>
+                    </a:lnL>
+                    <a:lnR w="9525" cap="flat" cmpd="sng" algn="ctr">
+                      <a:solidFill>
+                        <a:srgbClr val="D5DCE3"/>
+                      </a:solidFill>
+                      <a:prstDash val="solid"/>
+                      <a:round/>
+                      <a:headEnd type="none" w="med" len="med"/>
+                      <a:tailEnd type="none" w="med" len="med"/>
+                    </a:lnR>
+                    <a:lnT w="9525" cap="flat" cmpd="sng" algn="ctr">
+                      <a:solidFill>
+                        <a:srgbClr val="D5DCE3"/>
+                      </a:solidFill>
+                      <a:prstDash val="solid"/>
+                      <a:round/>
+                      <a:headEnd type="none" w="med" len="med"/>
+                      <a:tailEnd type="none" w="med" len="med"/>
+                    </a:lnT>
+                    <a:lnB w="9525" cap="flat" cmpd="sng" algn="ctr">
+                      <a:solidFill>
+                        <a:srgbClr val="D5DCE3"/>
+                      </a:solidFill>
+                      <a:prstDash val="solid"/>
+                      <a:round/>
+                      <a:headEnd type="none" w="med" len="med"/>
+                      <a:tailEnd type="none" w="med" len="med"/>
+                    </a:lnB>
+                    <a:solidFill>
+                      <a:srgbClr val="FFFFFF"/>
+                    </a:solidFill>
+                  </a:tcPr>
+                </a:tc>
+                <a:tc>
+                  <a:txBody>
+                    <a:bodyPr/>
+                    <a:lstStyle/>
+                    <a:p>
+                      <a:pPr indent="0" marL="0">
+                        <a:buNone/>
+                      </a:pPr>
+                      <a:r>
+                        <a:rPr lang="en-US" sz="1400" dirty="0">
+                          <a:solidFill>
+                            <a:srgbClr val="1F2933"/>
+                          </a:solidFill>
+                          <a:latin typeface="Calibri" pitchFamily="34" charset="0"/>
+                          <a:ea typeface="Calibri" pitchFamily="34" charset="-122"/>
+                          <a:cs typeface="Calibri" pitchFamily="34" charset="-120"/>
+                        </a:rPr>
+                        <a:t>matplotlib</a:t>
+                      </a:r>
+                      <a:endParaRPr lang="en-US" sz="1200" dirty="0"/>
+                    </a:p>
+                  </a:txBody>
+                  <a:tcPr marL="109728" marR="109728" marT="54864" marB="54864" anchor="ctr">
+                    <a:lnL w="9525" cap="flat" cmpd="sng" algn="ctr">
+                      <a:solidFill>
+                        <a:srgbClr val="D5DCE3"/>
+                      </a:solidFill>
+                      <a:prstDash val="solid"/>
+                      <a:round/>
+                      <a:headEnd type="none" w="med" len="med"/>
+                      <a:tailEnd type="none" w="med" len="med"/>
+                    </a:lnL>
+                    <a:lnR w="9525" cap="flat" cmpd="sng" algn="ctr">
+                      <a:solidFill>
+                        <a:srgbClr val="D5DCE3"/>
+                      </a:solidFill>
+                      <a:prstDash val="solid"/>
+                      <a:round/>
+                      <a:headEnd type="none" w="med" len="med"/>
+                      <a:tailEnd type="none" w="med" len="med"/>
+                    </a:lnR>
+                    <a:lnT w="9525" cap="flat" cmpd="sng" algn="ctr">
+                      <a:solidFill>
+                        <a:srgbClr val="D5DCE3"/>
+                      </a:solidFill>
+                      <a:prstDash val="solid"/>
+                      <a:round/>
+                      <a:headEnd type="none" w="med" len="med"/>
+                      <a:tailEnd type="none" w="med" len="med"/>
+                    </a:lnT>
+                    <a:lnB w="9525" cap="flat" cmpd="sng" algn="ctr">
+                      <a:solidFill>
+                        <a:srgbClr val="D5DCE3"/>
+                      </a:solidFill>
+                      <a:prstDash val="solid"/>
+                      <a:round/>
+                      <a:headEnd type="none" w="med" len="med"/>
+                      <a:tailEnd type="none" w="med" len="med"/>
+                    </a:lnB>
+                    <a:solidFill>
+                      <a:srgbClr val="FFFFFF"/>
+                    </a:solidFill>
+                  </a:tcPr>
+                </a:tc>
+                <a:tc>
+                  <a:txBody>
+                    <a:bodyPr/>
+                    <a:lstStyle/>
+                    <a:p>
+                      <a:pPr indent="0" marL="0">
+                        <a:buNone/>
+                      </a:pPr>
+                      <a:r>
+                        <a:rPr lang="en-US" sz="1400" dirty="0">
                           <a:solidFill>
                             <a:srgbClr val="1F2933"/>
                           </a:solidFill>
@@ -5810,7 +6822,7 @@
                       <a:tailEnd type="none" w="med" len="med"/>
                     </a:lnB>
                     <a:solidFill>
-                      <a:srgbClr val="F7F9FB"/>
+                      <a:srgbClr val="FFFFFF"/>
                     </a:solidFill>
                   </a:tcPr>
                 </a:tc>
@@ -5827,7 +6839,7 @@
         </p:nvSpPr>
         <p:spPr>
           <a:xfrm>
-            <a:off x="548640" y="5108448"/>
+            <a:off x="548640" y="5137912"/>
             <a:ext cx="11094415" cy="883920"/>
           </a:xfrm>
           <a:prstGeom prst="roundRect">
@@ -5849,7 +6861,7 @@
         </p:nvSpPr>
         <p:spPr>
           <a:xfrm>
-            <a:off x="822960" y="5108448"/>
+            <a:off x="822960" y="5137912"/>
             <a:ext cx="10545775" cy="883920"/>
           </a:xfrm>
           <a:prstGeom prst="rect">
@@ -6045,7 +7057,7 @@
             <a:pPr algn="r"/>
             <a:fld id="{F7021451-1387-4CA6-816F-3879F97B5CBC}" type="slidenum">
               <a:rPr b="0" lang="en-US"/>
-              <a:t>14</a:t>
+              <a:t>15</a:t>
             </a:fld>
             <a:endParaRPr lang="en-US"/>
           </a:p>
@@ -6059,9 +7071,9 @@
 </p:sld>
 </file>
 
-<file path=ppt/slides/slide15.xml><?xml version="1.0" encoding="utf-8"?>
+<file path=ppt/slides/slide16.xml><?xml version="1.0" encoding="utf-8"?>
 <p:sld xmlns:a="http://schemas.openxmlformats.org/drawingml/2006/main" xmlns:r="http://schemas.openxmlformats.org/officeDocument/2006/relationships" xmlns:p="http://schemas.openxmlformats.org/presentationml/2006/main">
-  <p:cSld name="Slide 15">
+  <p:cSld name="Slide 16">
     <p:bg>
       <p:bgPr>
         <a:solidFill>
@@ -6131,7 +7143,7 @@
         <p:spPr>
           <a:xfrm>
             <a:off x="548640" y="1417320"/>
-            <a:ext cx="5272888" cy="1844040"/>
+            <a:ext cx="5272888" cy="2514600"/>
           </a:xfrm>
           <a:prstGeom prst="rect">
             <a:avLst/>
@@ -6142,6 +7154,83 @@
         <p:txBody>
           <a:bodyPr wrap="square" lIns="0" tIns="0" rIns="0" bIns="0" rtlCol="0" anchor="t"/>
           <a:lstStyle/>
+          <a:p>
+            <a:pPr marL="254000" indent="-254000">
+              <a:spcAft>
+                <a:spcPts val="1200"/>
+              </a:spcAft>
+              <a:buSzPct val="100000"/>
+              <a:buChar char="•"/>
+            </a:pPr>
+            <a:r>
+              <a:rPr lang="en-US" sz="1700" dirty="0">
+                <a:solidFill>
+                  <a:srgbClr val="FFFFFF"/>
+                </a:solidFill>
+                <a:latin typeface="Calibri" pitchFamily="34" charset="0"/>
+                <a:ea typeface="Calibri" pitchFamily="34" charset="-122"/>
+                <a:cs typeface="Calibri" pitchFamily="34" charset="-120"/>
+              </a:rPr>
+              <a:t>pandas : </a:t>
+            </a:r>
+            <a:pPr indent="0" marL="0">
+              <a:buNone/>
+            </a:pPr>
+            <a:r>
+              <a:rPr lang="en-US" sz="1700" dirty="0">
+                <a:solidFill>
+                  <a:srgbClr val="8FD1B5"/>
+                </a:solidFill>
+                <a:latin typeface="Courier New" pitchFamily="34" charset="0"/>
+                <a:ea typeface="Courier New" pitchFamily="34" charset="-122"/>
+                <a:cs typeface="Courier New" pitchFamily="34" charset="-120"/>
+              </a:rPr>
+              <a:t>serie.plot()</a:t>
+            </a:r>
+            <a:pPr indent="0" marL="0">
+              <a:buNone/>
+            </a:pPr>
+            <a:r>
+              <a:rPr lang="en-US" sz="1700" dirty="0">
+                <a:solidFill>
+                  <a:srgbClr val="FFFFFF"/>
+                </a:solidFill>
+                <a:latin typeface="Calibri" pitchFamily="34" charset="0"/>
+                <a:ea typeface="Calibri" pitchFamily="34" charset="-122"/>
+                <a:cs typeface="Calibri" pitchFamily="34" charset="-120"/>
+              </a:rPr>
+              <a:t>, </a:t>
+            </a:r>
+            <a:pPr indent="0" marL="0">
+              <a:buNone/>
+            </a:pPr>
+            <a:r>
+              <a:rPr lang="en-US" sz="1700" dirty="0">
+                <a:solidFill>
+                  <a:srgbClr val="8FD1B5"/>
+                </a:solidFill>
+                <a:latin typeface="Courier New" pitchFamily="34" charset="0"/>
+                <a:ea typeface="Courier New" pitchFamily="34" charset="-122"/>
+                <a:cs typeface="Courier New" pitchFamily="34" charset="-120"/>
+              </a:rPr>
+              <a:t>.plot.barh()</a:t>
+            </a:r>
+            <a:pPr indent="0" marL="0">
+              <a:buNone/>
+            </a:pPr>
+            <a:r>
+              <a:rPr lang="en-US" sz="1700" dirty="0">
+                <a:solidFill>
+                  <a:srgbClr val="FFFFFF"/>
+                </a:solidFill>
+                <a:latin typeface="Calibri" pitchFamily="34" charset="0"/>
+                <a:ea typeface="Calibri" pitchFamily="34" charset="-122"/>
+                <a:cs typeface="Calibri" pitchFamily="34" charset="-120"/>
+              </a:rPr>
+              <a:t> pour un aperçu rapide</a:t>
+            </a:r>
+            <a:endParaRPr lang="en-US" sz="1700" dirty="0"/>
+          </a:p>
           <a:p>
             <a:pPr marL="254000" indent="-254000">
               <a:spcAft>
@@ -6693,8 +7782,8 @@
         </p:nvSpPr>
         <p:spPr>
           <a:xfrm>
-            <a:off x="1473175" y="2057400"/>
-            <a:ext cx="9245346" cy="0"/>
+            <a:off x="1341098" y="2057400"/>
+            <a:ext cx="9509499" cy="0"/>
           </a:xfrm>
           <a:prstGeom prst="line">
             <a:avLst/>
@@ -6716,7 +7805,7 @@
         </p:nvSpPr>
         <p:spPr>
           <a:xfrm>
-            <a:off x="1244575" y="1828800"/>
+            <a:off x="1112498" y="1828800"/>
             <a:ext cx="457200" cy="457200"/>
           </a:xfrm>
           <a:prstGeom prst="ellipse">
@@ -6736,7 +7825,7 @@
         </p:nvSpPr>
         <p:spPr>
           <a:xfrm>
-            <a:off x="1244575" y="1828800"/>
+            <a:off x="1112498" y="1828800"/>
             <a:ext cx="457200" cy="457200"/>
           </a:xfrm>
           <a:prstGeom prst="rect">
@@ -6776,7 +7865,7 @@
         <p:spPr>
           <a:xfrm>
             <a:off x="594360" y="2423160"/>
-            <a:ext cx="1757629" cy="502920"/>
+            <a:ext cx="1493476" cy="502920"/>
           </a:xfrm>
           <a:prstGeom prst="rect">
             <a:avLst/>
@@ -6815,7 +7904,7 @@
         <p:spPr>
           <a:xfrm>
             <a:off x="594360" y="2926080"/>
-            <a:ext cx="1757629" cy="685800"/>
+            <a:ext cx="1493476" cy="685800"/>
           </a:xfrm>
           <a:prstGeom prst="rect">
             <a:avLst/>
@@ -6853,7 +7942,7 @@
         </p:nvSpPr>
         <p:spPr>
           <a:xfrm>
-            <a:off x="3093644" y="1828800"/>
+            <a:off x="2697415" y="1828800"/>
             <a:ext cx="457200" cy="457200"/>
           </a:xfrm>
           <a:prstGeom prst="ellipse">
@@ -6873,7 +7962,7 @@
         </p:nvSpPr>
         <p:spPr>
           <a:xfrm>
-            <a:off x="3093644" y="1828800"/>
+            <a:off x="2697415" y="1828800"/>
             <a:ext cx="457200" cy="457200"/>
           </a:xfrm>
           <a:prstGeom prst="rect">
@@ -6912,8 +8001,8 @@
         </p:nvSpPr>
         <p:spPr>
           <a:xfrm>
-            <a:off x="2443429" y="2423160"/>
-            <a:ext cx="1757629" cy="502920"/>
+            <a:off x="2179276" y="2423160"/>
+            <a:ext cx="1493476" cy="502920"/>
           </a:xfrm>
           <a:prstGeom prst="rect">
             <a:avLst/>
@@ -6937,7 +8026,7 @@
                 <a:ea typeface="Calibri" pitchFamily="34" charset="-122"/>
                 <a:cs typeface="Calibri" pitchFamily="34" charset="-120"/>
               </a:rPr>
-              <a:t>matplotlib</a:t>
+              <a:t>pandas</a:t>
             </a:r>
             <a:endParaRPr lang="en-US" sz="1500" dirty="0"/>
           </a:p>
@@ -6951,8 +8040,8 @@
         </p:nvSpPr>
         <p:spPr>
           <a:xfrm>
-            <a:off x="2443429" y="2926080"/>
-            <a:ext cx="1757629" cy="685800"/>
+            <a:off x="2179276" y="2926080"/>
+            <a:ext cx="1493476" cy="685800"/>
           </a:xfrm>
           <a:prstGeom prst="rect">
             <a:avLst/>
@@ -6976,7 +8065,7 @@
                 <a:ea typeface="Calibri" pitchFamily="34" charset="-122"/>
                 <a:cs typeface="Calibri" pitchFamily="34" charset="-120"/>
               </a:rPr>
-              <a:t>la base</a:t>
+              <a:t>l'aperçu rapide</a:t>
             </a:r>
             <a:endParaRPr lang="en-US" sz="1300" dirty="0"/>
           </a:p>
@@ -6990,7 +8079,7 @@
         </p:nvSpPr>
         <p:spPr>
           <a:xfrm>
-            <a:off x="4942713" y="1828800"/>
+            <a:off x="4282331" y="1828800"/>
             <a:ext cx="457200" cy="457200"/>
           </a:xfrm>
           <a:prstGeom prst="ellipse">
@@ -7010,7 +8099,7 @@
         </p:nvSpPr>
         <p:spPr>
           <a:xfrm>
-            <a:off x="4942713" y="1828800"/>
+            <a:off x="4282331" y="1828800"/>
             <a:ext cx="457200" cy="457200"/>
           </a:xfrm>
           <a:prstGeom prst="rect">
@@ -7049,8 +8138,8 @@
         </p:nvSpPr>
         <p:spPr>
           <a:xfrm>
-            <a:off x="4292498" y="2423160"/>
-            <a:ext cx="1757629" cy="502920"/>
+            <a:off x="3764193" y="2423160"/>
+            <a:ext cx="1493476" cy="502920"/>
           </a:xfrm>
           <a:prstGeom prst="rect">
             <a:avLst/>
@@ -7074,7 +8163,7 @@
                 <a:ea typeface="Calibri" pitchFamily="34" charset="-122"/>
                 <a:cs typeface="Calibri" pitchFamily="34" charset="-120"/>
               </a:rPr>
-              <a:t>seaborn</a:t>
+              <a:t>matplotlib</a:t>
             </a:r>
             <a:endParaRPr lang="en-US" sz="1500" dirty="0"/>
           </a:p>
@@ -7088,8 +8177,8 @@
         </p:nvSpPr>
         <p:spPr>
           <a:xfrm>
-            <a:off x="4292498" y="2926080"/>
-            <a:ext cx="1757629" cy="685800"/>
+            <a:off x="3764193" y="2926080"/>
+            <a:ext cx="1493476" cy="685800"/>
           </a:xfrm>
           <a:prstGeom prst="rect">
             <a:avLst/>
@@ -7113,7 +8202,7 @@
                 <a:ea typeface="Calibri" pitchFamily="34" charset="-122"/>
                 <a:cs typeface="Calibri" pitchFamily="34" charset="-120"/>
               </a:rPr>
-              <a:t>les statistiques</a:t>
+              <a:t>la base</a:t>
             </a:r>
             <a:endParaRPr lang="en-US" sz="1300" dirty="0"/>
           </a:p>
@@ -7127,7 +8216,7 @@
         </p:nvSpPr>
         <p:spPr>
           <a:xfrm>
-            <a:off x="6791782" y="1828800"/>
+            <a:off x="5867248" y="1828800"/>
             <a:ext cx="457200" cy="457200"/>
           </a:xfrm>
           <a:prstGeom prst="ellipse">
@@ -7147,7 +8236,7 @@
         </p:nvSpPr>
         <p:spPr>
           <a:xfrm>
-            <a:off x="6791782" y="1828800"/>
+            <a:off x="5867248" y="1828800"/>
             <a:ext cx="457200" cy="457200"/>
           </a:xfrm>
           <a:prstGeom prst="rect">
@@ -7186,8 +8275,8 @@
         </p:nvSpPr>
         <p:spPr>
           <a:xfrm>
-            <a:off x="6141568" y="2423160"/>
-            <a:ext cx="1757629" cy="502920"/>
+            <a:off x="5349109" y="2423160"/>
+            <a:ext cx="1493476" cy="502920"/>
           </a:xfrm>
           <a:prstGeom prst="rect">
             <a:avLst/>
@@ -7211,7 +8300,7 @@
                 <a:ea typeface="Calibri" pitchFamily="34" charset="-122"/>
                 <a:cs typeface="Calibri" pitchFamily="34" charset="-120"/>
               </a:rPr>
-              <a:t>plotly</a:t>
+              <a:t>seaborn</a:t>
             </a:r>
             <a:endParaRPr lang="en-US" sz="1500" dirty="0"/>
           </a:p>
@@ -7225,8 +8314,8 @@
         </p:nvSpPr>
         <p:spPr>
           <a:xfrm>
-            <a:off x="6141568" y="2926080"/>
-            <a:ext cx="1757629" cy="685800"/>
+            <a:off x="5349109" y="2926080"/>
+            <a:ext cx="1493476" cy="685800"/>
           </a:xfrm>
           <a:prstGeom prst="rect">
             <a:avLst/>
@@ -7250,7 +8339,7 @@
                 <a:ea typeface="Calibri" pitchFamily="34" charset="-122"/>
                 <a:cs typeface="Calibri" pitchFamily="34" charset="-120"/>
               </a:rPr>
-              <a:t>l'interactif</a:t>
+              <a:t>les statistiques</a:t>
             </a:r>
             <a:endParaRPr lang="en-US" sz="1300" dirty="0"/>
           </a:p>
@@ -7264,7 +8353,7 @@
         </p:nvSpPr>
         <p:spPr>
           <a:xfrm>
-            <a:off x="8640851" y="1828800"/>
+            <a:off x="7452164" y="1828800"/>
             <a:ext cx="457200" cy="457200"/>
           </a:xfrm>
           <a:prstGeom prst="ellipse">
@@ -7284,7 +8373,7 @@
         </p:nvSpPr>
         <p:spPr>
           <a:xfrm>
-            <a:off x="8640851" y="1828800"/>
+            <a:off x="7452164" y="1828800"/>
             <a:ext cx="457200" cy="457200"/>
           </a:xfrm>
           <a:prstGeom prst="rect">
@@ -7323,8 +8412,8 @@
         </p:nvSpPr>
         <p:spPr>
           <a:xfrm>
-            <a:off x="7990637" y="2423160"/>
-            <a:ext cx="1757629" cy="502920"/>
+            <a:off x="6934026" y="2423160"/>
+            <a:ext cx="1493476" cy="502920"/>
           </a:xfrm>
           <a:prstGeom prst="rect">
             <a:avLst/>
@@ -7348,7 +8437,7 @@
                 <a:ea typeface="Calibri" pitchFamily="34" charset="-122"/>
                 <a:cs typeface="Calibri" pitchFamily="34" charset="-120"/>
               </a:rPr>
-              <a:t>Bien choisir</a:t>
+              <a:t>plotly</a:t>
             </a:r>
             <a:endParaRPr lang="en-US" sz="1500" dirty="0"/>
           </a:p>
@@ -7362,8 +8451,8 @@
         </p:nvSpPr>
         <p:spPr>
           <a:xfrm>
-            <a:off x="7990637" y="2926080"/>
-            <a:ext cx="1757629" cy="685800"/>
+            <a:off x="6934026" y="2926080"/>
+            <a:ext cx="1493476" cy="685800"/>
           </a:xfrm>
           <a:prstGeom prst="rect">
             <a:avLst/>
@@ -7387,7 +8476,7 @@
                 <a:ea typeface="Calibri" pitchFamily="34" charset="-122"/>
                 <a:cs typeface="Calibri" pitchFamily="34" charset="-120"/>
               </a:rPr>
-              <a:t>le graphique et sa lisibilité</a:t>
+              <a:t>l'interactif</a:t>
             </a:r>
             <a:endParaRPr lang="en-US" sz="1300" dirty="0"/>
           </a:p>
@@ -7401,7 +8490,7 @@
         </p:nvSpPr>
         <p:spPr>
           <a:xfrm>
-            <a:off x="10489921" y="1828800"/>
+            <a:off x="9037081" y="1828800"/>
             <a:ext cx="457200" cy="457200"/>
           </a:xfrm>
           <a:prstGeom prst="ellipse">
@@ -7421,7 +8510,7 @@
         </p:nvSpPr>
         <p:spPr>
           <a:xfrm>
-            <a:off x="10489921" y="1828800"/>
+            <a:off x="9037081" y="1828800"/>
             <a:ext cx="457200" cy="457200"/>
           </a:xfrm>
           <a:prstGeom prst="rect">
@@ -7460,8 +8549,8 @@
         </p:nvSpPr>
         <p:spPr>
           <a:xfrm>
-            <a:off x="9839706" y="2423160"/>
-            <a:ext cx="1757629" cy="502920"/>
+            <a:off x="8518942" y="2423160"/>
+            <a:ext cx="1493476" cy="502920"/>
           </a:xfrm>
           <a:prstGeom prst="rect">
             <a:avLst/>
@@ -7485,7 +8574,7 @@
                 <a:ea typeface="Calibri" pitchFamily="34" charset="-122"/>
                 <a:cs typeface="Calibri" pitchFamily="34" charset="-120"/>
               </a:rPr>
-              <a:t>TP4 mini</a:t>
+              <a:t>Bien choisir</a:t>
             </a:r>
             <a:endParaRPr lang="en-US" sz="1500" dirty="0"/>
           </a:p>
@@ -7499,8 +8588,8 @@
         </p:nvSpPr>
         <p:spPr>
           <a:xfrm>
-            <a:off x="9839706" y="2926080"/>
-            <a:ext cx="1757629" cy="685800"/>
+            <a:off x="8518942" y="2926080"/>
+            <a:ext cx="1493476" cy="685800"/>
           </a:xfrm>
           <a:prstGeom prst="rect">
             <a:avLst/>
@@ -7524,6 +8613,143 @@
                 <a:ea typeface="Calibri" pitchFamily="34" charset="-122"/>
                 <a:cs typeface="Calibri" pitchFamily="34" charset="-120"/>
               </a:rPr>
+              <a:t>le graphique et sa lisibilité</a:t>
+            </a:r>
+            <a:endParaRPr lang="en-US" sz="1300" dirty="0"/>
+          </a:p>
+        </p:txBody>
+      </p:sp>
+      <p:sp>
+        <p:nvSpPr>
+          <p:cNvPr id="28" name="Shape 26"/>
+          <p:cNvSpPr/>
+          <p:nvPr/>
+        </p:nvSpPr>
+        <p:spPr>
+          <a:xfrm>
+            <a:off x="10621997" y="1828800"/>
+            <a:ext cx="457200" cy="457200"/>
+          </a:xfrm>
+          <a:prstGeom prst="ellipse">
+            <a:avLst/>
+          </a:prstGeom>
+          <a:solidFill>
+            <a:srgbClr val="2F7D62"/>
+          </a:solidFill>
+          <a:ln/>
+        </p:spPr>
+      </p:sp>
+      <p:sp>
+        <p:nvSpPr>
+          <p:cNvPr id="29" name="Text 27"/>
+          <p:cNvSpPr txBox="1"/>
+          <p:nvPr/>
+        </p:nvSpPr>
+        <p:spPr>
+          <a:xfrm>
+            <a:off x="10621997" y="1828800"/>
+            <a:ext cx="457200" cy="457200"/>
+          </a:xfrm>
+          <a:prstGeom prst="rect">
+            <a:avLst/>
+          </a:prstGeom>
+          <a:noFill/>
+          <a:ln/>
+        </p:spPr>
+        <p:txBody>
+          <a:bodyPr wrap="square" lIns="0" tIns="0" rIns="0" bIns="0" rtlCol="0" anchor="ctr"/>
+          <a:lstStyle/>
+          <a:p>
+            <a:pPr algn="ctr" indent="0" marL="0">
+              <a:buNone/>
+            </a:pPr>
+            <a:r>
+              <a:rPr lang="en-US" sz="1500" b="1" dirty="0">
+                <a:solidFill>
+                  <a:srgbClr val="FFFFFF"/>
+                </a:solidFill>
+                <a:latin typeface="Calibri" pitchFamily="34" charset="0"/>
+                <a:ea typeface="Calibri" pitchFamily="34" charset="-122"/>
+                <a:cs typeface="Calibri" pitchFamily="34" charset="-120"/>
+              </a:rPr>
+              <a:t>7</a:t>
+            </a:r>
+            <a:endParaRPr lang="en-US" sz="1500" dirty="0"/>
+          </a:p>
+        </p:txBody>
+      </p:sp>
+      <p:sp>
+        <p:nvSpPr>
+          <p:cNvPr id="30" name="Text 28"/>
+          <p:cNvSpPr txBox="1"/>
+          <p:nvPr/>
+        </p:nvSpPr>
+        <p:spPr>
+          <a:xfrm>
+            <a:off x="10103859" y="2423160"/>
+            <a:ext cx="1493476" cy="502920"/>
+          </a:xfrm>
+          <a:prstGeom prst="rect">
+            <a:avLst/>
+          </a:prstGeom>
+          <a:noFill/>
+          <a:ln/>
+        </p:spPr>
+        <p:txBody>
+          <a:bodyPr wrap="square" lIns="0" tIns="0" rIns="0" bIns="0" rtlCol="0" anchor="t"/>
+          <a:lstStyle/>
+          <a:p>
+            <a:pPr algn="ctr" indent="0" marL="0">
+              <a:buNone/>
+            </a:pPr>
+            <a:r>
+              <a:rPr lang="en-US" sz="1500" b="1" dirty="0">
+                <a:solidFill>
+                  <a:srgbClr val="1F3A5F"/>
+                </a:solidFill>
+                <a:latin typeface="Calibri" pitchFamily="34" charset="0"/>
+                <a:ea typeface="Calibri" pitchFamily="34" charset="-122"/>
+                <a:cs typeface="Calibri" pitchFamily="34" charset="-120"/>
+              </a:rPr>
+              <a:t>TP4 mini</a:t>
+            </a:r>
+            <a:endParaRPr lang="en-US" sz="1500" dirty="0"/>
+          </a:p>
+        </p:txBody>
+      </p:sp>
+      <p:sp>
+        <p:nvSpPr>
+          <p:cNvPr id="31" name="Text 29"/>
+          <p:cNvSpPr txBox="1"/>
+          <p:nvPr/>
+        </p:nvSpPr>
+        <p:spPr>
+          <a:xfrm>
+            <a:off x="10103859" y="2926080"/>
+            <a:ext cx="1493476" cy="685800"/>
+          </a:xfrm>
+          <a:prstGeom prst="rect">
+            <a:avLst/>
+          </a:prstGeom>
+          <a:noFill/>
+          <a:ln/>
+        </p:spPr>
+        <p:txBody>
+          <a:bodyPr wrap="square" lIns="0" tIns="0" rIns="0" bIns="0" rtlCol="0" anchor="t"/>
+          <a:lstStyle/>
+          <a:p>
+            <a:pPr algn="ctr" indent="0" marL="0">
+              <a:buNone/>
+            </a:pPr>
+            <a:r>
+              <a:rPr lang="en-US" sz="1300" dirty="0">
+                <a:solidFill>
+                  <a:srgbClr val="6B7280"/>
+                </a:solidFill>
+                <a:latin typeface="Calibri" pitchFamily="34" charset="0"/>
+                <a:ea typeface="Calibri" pitchFamily="34" charset="-122"/>
+                <a:cs typeface="Calibri" pitchFamily="34" charset="-120"/>
+              </a:rPr>
               <a:t>parties 1 à 3</a:t>
             </a:r>
             <a:endParaRPr lang="en-US" sz="1300" dirty="0"/>
@@ -7532,7 +8758,7 @@
       </p:sp>
       <p:sp>
         <p:nvSpPr>
-          <p:cNvPr id="28" name="Shape 26"/>
+          <p:cNvPr id="32" name="Shape 30"/>
           <p:cNvSpPr/>
           <p:nvPr/>
         </p:nvSpPr>
@@ -7554,7 +8780,7 @@
       </p:sp>
       <p:sp>
         <p:nvSpPr>
-          <p:cNvPr id="29" name="Text 27"/>
+          <p:cNvPr id="33" name="Text 31"/>
           <p:cNvSpPr txBox="1"/>
           <p:nvPr/>
         </p:nvSpPr>
@@ -7593,7 +8819,7 @@
       </p:sp>
       <p:sp>
         <p:nvSpPr>
-          <p:cNvPr id="30" name="Text 28"/>
+          <p:cNvPr id="34" name="Text 32"/>
           <p:cNvSpPr txBox="1"/>
           <p:nvPr/>
         </p:nvSpPr>
@@ -11440,7 +12666,7 @@
                 <a:ea typeface="Calibri" pitchFamily="34" charset="-122"/>
                 <a:cs typeface="Calibri" pitchFamily="34" charset="-120"/>
               </a:rPr>
-              <a:t>matplotlib   |   seaborn   |   plotly</a:t>
+              <a:t>pandas   |   matplotlib   |   seaborn   |   plotly</a:t>
             </a:r>
             <a:endParaRPr lang="en-US" sz="2000" dirty="0"/>
           </a:p>
@@ -11609,7 +12835,7 @@
                 <a:ea typeface="Cambria" pitchFamily="34" charset="-122"/>
                 <a:cs typeface="Cambria" pitchFamily="34" charset="-120"/>
               </a:rPr>
-              <a:t>matplotlib : une figure, un Axes</a:t>
+              <a:t>pandas : un aperçu en une ligne</a:t>
             </a:r>
             <a:endParaRPr lang="en-US" sz="3000" dirty="0"/>
           </a:p>
@@ -11624,7 +12850,7 @@
         <p:spPr>
           <a:xfrm>
             <a:off x="548640" y="1417320"/>
-            <a:ext cx="4835098" cy="1461516"/>
+            <a:ext cx="3868078" cy="1191768"/>
           </a:xfrm>
           <a:prstGeom prst="rect">
             <a:avLst/>
@@ -11644,7 +12870,7 @@
         <p:spPr>
           <a:xfrm>
             <a:off x="731520" y="1563624"/>
-            <a:ext cx="4469338" cy="1168908"/>
+            <a:ext cx="3502318" cy="899160"/>
           </a:xfrm>
           <a:prstGeom prst="rect">
             <a:avLst/>
@@ -11663,7 +12889,7 @@
               <a:buNone/>
             </a:pPr>
             <a:r>
-              <a:rPr lang="en-US" sz="1300" dirty="0">
+              <a:rPr lang="en-US" sz="1200" dirty="0">
                 <a:solidFill>
                   <a:srgbClr val="1F2933"/>
                 </a:solidFill>
@@ -11671,9 +12897,9 @@
                 <a:ea typeface="Courier New" pitchFamily="34" charset="-122"/>
                 <a:cs typeface="Courier New" pitchFamily="34" charset="-120"/>
               </a:rPr>
-              <a:t>fig, ax = plt.subplots(figsize=(8, 4))</a:t>
-            </a:r>
-            <a:endParaRPr lang="en-US" sz="1300" dirty="0"/>
+              <a:t>mensuel.plot(marker="o")</a:t>
+            </a:r>
+            <a:endParaRPr lang="en-US" sz="1200" dirty="0"/>
           </a:p>
           <a:p>
             <a:pPr indent="0" marL="0">
@@ -11683,7 +12909,7 @@
               <a:buNone/>
             </a:pPr>
             <a:r>
-              <a:rPr lang="en-US" sz="1300" dirty="0">
+              <a:rPr lang="en-US" sz="1200" dirty="0">
                 <a:solidFill>
                   <a:srgbClr val="1F2933"/>
                 </a:solidFill>
@@ -11691,9 +12917,9 @@
                 <a:ea typeface="Courier New" pitchFamily="34" charset="-122"/>
                 <a:cs typeface="Courier New" pitchFamily="34" charset="-120"/>
               </a:rPr>
-              <a:t>ax.plot(mensuel.index, mensuel.values,</a:t>
-            </a:r>
-            <a:endParaRPr lang="en-US" sz="1300" dirty="0"/>
+              <a:t>par_region.plot.barh()</a:t>
+            </a:r>
+            <a:endParaRPr lang="en-US" sz="1200" dirty="0"/>
           </a:p>
           <a:p>
             <a:pPr indent="0" marL="0">
@@ -11703,7 +12929,7 @@
               <a:buNone/>
             </a:pPr>
             <a:r>
-              <a:rPr lang="en-US" sz="1300" dirty="0">
+              <a:rPr lang="en-US" sz="1200" dirty="0">
                 <a:solidFill>
                   <a:srgbClr val="1F2933"/>
                 </a:solidFill>
@@ -11711,9 +12937,9 @@
                 <a:ea typeface="Courier New" pitchFamily="34" charset="-122"/>
                 <a:cs typeface="Courier New" pitchFamily="34" charset="-120"/>
               </a:rPr>
-              <a:t>        marker="o")</a:t>
-            </a:r>
-            <a:endParaRPr lang="en-US" sz="1300" dirty="0"/>
+              <a:t>ventes["montant"].plot.hist(bins=40)</a:t>
+            </a:r>
+            <a:endParaRPr lang="en-US" sz="1200" dirty="0"/>
           </a:p>
           <a:p>
             <a:pPr indent="0" marL="0">
@@ -11723,7 +12949,7 @@
               <a:buNone/>
             </a:pPr>
             <a:r>
-              <a:rPr lang="en-US" sz="1300" dirty="0">
+              <a:rPr lang="en-US" sz="1200" dirty="0">
                 <a:solidFill>
                   <a:srgbClr val="1F2933"/>
                 </a:solidFill>
@@ -11731,9 +12957,9 @@
                 <a:ea typeface="Courier New" pitchFamily="34" charset="-122"/>
                 <a:cs typeface="Courier New" pitchFamily="34" charset="-120"/>
               </a:rPr>
-              <a:t>ax.set_title("Chiffre d'affaires mensuel")</a:t>
-            </a:r>
-            <a:endParaRPr lang="en-US" sz="1300" dirty="0"/>
+              <a:t>indicateurs.plot.scatter(</a:t>
+            </a:r>
+            <a:endParaRPr lang="en-US" sz="1200" dirty="0"/>
           </a:p>
           <a:p>
             <a:pPr indent="0" marL="0">
@@ -11743,7 +12969,7 @@
               <a:buNone/>
             </a:pPr>
             <a:r>
-              <a:rPr lang="en-US" sz="1300" dirty="0">
+              <a:rPr lang="en-US" sz="1200" dirty="0">
                 <a:solidFill>
                   <a:srgbClr val="1F2933"/>
                 </a:solidFill>
@@ -11751,10 +12977,488 @@
                 <a:ea typeface="Courier New" pitchFamily="34" charset="-122"/>
                 <a:cs typeface="Courier New" pitchFamily="34" charset="-120"/>
               </a:rPr>
-              <a:t>ax.set_ylabel("euros")</a:t>
-            </a:r>
-            <a:endParaRPr lang="en-US" sz="1300" dirty="0"/>
-          </a:p>
+              <a:t>    x="nb_commandes", y="ca")</a:t>
+            </a:r>
+            <a:endParaRPr lang="en-US" sz="1200" dirty="0"/>
+          </a:p>
+        </p:txBody>
+      </p:sp>
+      <p:sp>
+        <p:nvSpPr>
+          <p:cNvPr id="8" name="Text 6"/>
+          <p:cNvSpPr txBox="1"/>
+          <p:nvPr/>
+        </p:nvSpPr>
+        <p:spPr>
+          <a:xfrm>
+            <a:off x="548640" y="2929128"/>
+            <a:ext cx="3868078" cy="1051560"/>
+          </a:xfrm>
+          <a:prstGeom prst="rect">
+            <a:avLst/>
+          </a:prstGeom>
+          <a:noFill/>
+          <a:ln/>
+        </p:spPr>
+        <p:txBody>
+          <a:bodyPr wrap="square" lIns="0" tIns="0" rIns="0" bIns="0" rtlCol="0" anchor="t"/>
+          <a:lstStyle/>
+          <a:p>
+            <a:pPr indent="0" marL="0">
+              <a:buNone/>
+            </a:pPr>
+            <a:r>
+              <a:rPr lang="en-US" sz="1500" dirty="0">
+                <a:solidFill>
+                  <a:srgbClr val="6B7280"/>
+                </a:solidFill>
+                <a:latin typeface="Calibri" pitchFamily="34" charset="0"/>
+                <a:ea typeface="Calibri" pitchFamily="34" charset="-122"/>
+                <a:cs typeface="Calibri" pitchFamily="34" charset="-120"/>
+              </a:rPr>
+              <a:t>Toute Series ou DataFrame a une méthode </a:t>
+            </a:r>
+            <a:pPr indent="0" marL="0">
+              <a:buNone/>
+            </a:pPr>
+            <a:r>
+              <a:rPr lang="en-US" sz="1500" dirty="0">
+                <a:solidFill>
+                  <a:srgbClr val="1F3A5F"/>
+                </a:solidFill>
+                <a:latin typeface="Courier New" pitchFamily="34" charset="0"/>
+                <a:ea typeface="Courier New" pitchFamily="34" charset="-122"/>
+                <a:cs typeface="Courier New" pitchFamily="34" charset="-120"/>
+              </a:rPr>
+              <a:t>.plot()</a:t>
+            </a:r>
+            <a:pPr indent="0" marL="0">
+              <a:buNone/>
+            </a:pPr>
+            <a:r>
+              <a:rPr lang="en-US" sz="1500" dirty="0">
+                <a:solidFill>
+                  <a:srgbClr val="6B7280"/>
+                </a:solidFill>
+                <a:latin typeface="Calibri" pitchFamily="34" charset="0"/>
+                <a:ea typeface="Calibri" pitchFamily="34" charset="-122"/>
+                <a:cs typeface="Calibri" pitchFamily="34" charset="-120"/>
+              </a:rPr>
+              <a:t> : elle appelle matplotlib et renvoie un </a:t>
+            </a:r>
+            <a:pPr indent="0" marL="0">
+              <a:buNone/>
+            </a:pPr>
+            <a:r>
+              <a:rPr lang="en-US" sz="1500" dirty="0">
+                <a:solidFill>
+                  <a:srgbClr val="1F3A5F"/>
+                </a:solidFill>
+                <a:latin typeface="Courier New" pitchFamily="34" charset="0"/>
+                <a:ea typeface="Courier New" pitchFamily="34" charset="-122"/>
+                <a:cs typeface="Courier New" pitchFamily="34" charset="-120"/>
+              </a:rPr>
+              <a:t>ax</a:t>
+            </a:r>
+            <a:pPr indent="0" marL="0">
+              <a:buNone/>
+            </a:pPr>
+            <a:r>
+              <a:rPr lang="en-US" sz="1500" dirty="0">
+                <a:solidFill>
+                  <a:srgbClr val="6B7280"/>
+                </a:solidFill>
+                <a:latin typeface="Calibri" pitchFamily="34" charset="0"/>
+                <a:ea typeface="Calibri" pitchFamily="34" charset="-122"/>
+                <a:cs typeface="Calibri" pitchFamily="34" charset="-120"/>
+              </a:rPr>
+              <a:t>. Un DataFrame donne une courbe par colonne.</a:t>
+            </a:r>
+            <a:endParaRPr lang="en-US" sz="1500" dirty="0"/>
+          </a:p>
+        </p:txBody>
+      </p:sp>
+      <p:pic>
+        <p:nvPicPr>
+          <p:cNvPr id="9" name="Image 0" descr="Courbe du chiffre d'affaires mensuel et barres par région, tracées avec le .plot() de pandas, sans réglage">    </p:cNvPr>
+          <p:cNvPicPr>
+            <a:picLocks noChangeAspect="1"/>
+          </p:cNvPicPr>
+          <p:nvPr/>
+        </p:nvPicPr>
+        <p:blipFill>
+          <a:blip r:embed="rId1"/>
+          <a:stretch>
+            <a:fillRect/>
+          </a:stretch>
+        </p:blipFill>
+        <p:spPr>
+          <a:xfrm>
+            <a:off x="4930071" y="1417320"/>
+            <a:ext cx="6656832" cy="2377440"/>
+          </a:xfrm>
+          <a:prstGeom prst="rect">
+            <a:avLst/>
+          </a:prstGeom>
+        </p:spPr>
+      </p:pic>
+      <p:sp>
+        <p:nvSpPr>
+          <p:cNvPr id="10" name="Shape 7"/>
+          <p:cNvSpPr/>
+          <p:nvPr/>
+        </p:nvSpPr>
+        <p:spPr>
+          <a:xfrm>
+            <a:off x="4873918" y="4114800"/>
+            <a:ext cx="6769137" cy="822960"/>
+          </a:xfrm>
+          <a:prstGeom prst="roundRect">
+            <a:avLst>
+              <a:gd name="adj" fmla="val 6667"/>
+            </a:avLst>
+          </a:prstGeom>
+          <a:solidFill>
+            <a:srgbClr val="E8F3EE"/>
+          </a:solidFill>
+          <a:ln/>
+        </p:spPr>
+      </p:sp>
+      <p:sp>
+        <p:nvSpPr>
+          <p:cNvPr id="11" name="Text 8"/>
+          <p:cNvSpPr txBox="1"/>
+          <p:nvPr/>
+        </p:nvSpPr>
+        <p:spPr>
+          <a:xfrm>
+            <a:off x="5148238" y="4114800"/>
+            <a:ext cx="6220497" cy="822960"/>
+          </a:xfrm>
+          <a:prstGeom prst="rect">
+            <a:avLst/>
+          </a:prstGeom>
+          <a:noFill/>
+          <a:ln/>
+        </p:spPr>
+        <p:txBody>
+          <a:bodyPr wrap="square" lIns="0" tIns="0" rIns="0" bIns="0" rtlCol="0" anchor="ctr"/>
+          <a:lstStyle/>
+          <a:p>
+            <a:pPr indent="0" marL="0">
+              <a:buNone/>
+            </a:pPr>
+            <a:r>
+              <a:rPr lang="en-US" sz="1500" dirty="0">
+                <a:solidFill>
+                  <a:srgbClr val="1F3A5F"/>
+                </a:solidFill>
+                <a:latin typeface="Calibri" pitchFamily="34" charset="0"/>
+                <a:ea typeface="Calibri" pitchFamily="34" charset="-122"/>
+                <a:cs typeface="Calibri" pitchFamily="34" charset="-120"/>
+              </a:rPr>
+              <a:t>Idéal pour explorer. Pour un graphique à montrer : titre, unité, axe à zéro, montants lisibles, avec matplotlib.</a:t>
+            </a:r>
+            <a:endParaRPr lang="en-US" sz="1500" dirty="0"/>
+          </a:p>
+        </p:txBody>
+      </p:sp>
+      <p:sp>
+        <p:nvSpPr>
+          <p:cNvPr id="12" name="Text 9"/>
+          <p:cNvSpPr txBox="1"/>
+          <p:nvPr/>
+        </p:nvSpPr>
+        <p:spPr>
+          <a:xfrm>
+            <a:off x="548640" y="6400800"/>
+            <a:ext cx="7315200" cy="274320"/>
+          </a:xfrm>
+          <a:prstGeom prst="rect">
+            <a:avLst/>
+          </a:prstGeom>
+          <a:noFill/>
+          <a:ln/>
+        </p:spPr>
+        <p:txBody>
+          <a:bodyPr wrap="square" lIns="0" tIns="0" rIns="0" bIns="0" rtlCol="0" anchor="ctr"/>
+          <a:lstStyle/>
+          <a:p>
+            <a:pPr indent="0" marL="0">
+              <a:buNone/>
+            </a:pPr>
+            <a:r>
+              <a:rPr lang="en-US" sz="1000" dirty="0">
+                <a:solidFill>
+                  <a:srgbClr val="6B7280"/>
+                </a:solidFill>
+                <a:latin typeface="Calibri" pitchFamily="34" charset="0"/>
+                <a:ea typeface="Calibri" pitchFamily="34" charset="-122"/>
+                <a:cs typeface="Calibri" pitchFamily="34" charset="-120"/>
+              </a:rPr>
+              <a:t>Analyse de données avec Python   |   Visualisation, version mini</a:t>
+            </a:r>
+            <a:endParaRPr lang="en-US" sz="1000" dirty="0"/>
+          </a:p>
+        </p:txBody>
+      </p:sp>
+      <p:sp>
+        <p:nvSpPr>
+          <p:cNvPr id="25" name="Slide Number Placeholder 0"/>
+          <p:cNvSpPr>
+            <a:spLocks noGrp="1"/>
+          </p:cNvSpPr>
+          <p:nvPr>
+            <p:ph type="sldNum" sz="quarter" idx="4294967295"/>
+          </p:nvPr>
+        </p:nvSpPr>
+        <p:spPr>
+          <a:xfrm>
+            <a:off x="11094415" y="6400800"/>
+            <a:ext cx="548640" cy="274320"/>
+          </a:xfrm>
+          <a:prstGeom prst="rect">
+            <a:avLst/>
+          </a:prstGeom>
+          <a:extLst>
+            <a:ext uri="{C572A759-6A51-4108-AA02-DFA0A04FC94B}">
+              <ma14:wrappingTextBoxFlag xmlns:ma14="http://schemas.microsoft.com/office/mac/drawingml/2011/main" val="0"/>
+            </a:ext>
+          </a:extLst>
+        </p:spPr>
+        <p:txBody>
+          <a:bodyPr/>
+          <a:lstStyle>
+            <a:lvl1pPr>
+              <a:defRPr sz="1000">
+                <a:solidFill>
+                  <a:srgbClr val="6B7280"/>
+                </a:solidFill>
+                <a:latin typeface="Calibri"/>
+                <a:ea typeface="Calibri"/>
+                <a:cs typeface="Calibri"/>
+              </a:defRPr>
+            </a:lvl1pPr>
+          </a:lstStyle>
+          <a:p>
+            <a:pPr algn="r"/>
+            <a:fld id="{F7021451-1387-4CA6-816F-3879F97B5CBC}" type="slidenum">
+              <a:rPr b="0" lang="en-US"/>
+              <a:t>8</a:t>
+            </a:fld>
+            <a:endParaRPr lang="en-US"/>
+          </a:p>
+        </p:txBody>
+      </p:sp>
+    </p:spTree>
+  </p:cSld>
+  <p:clrMapOvr>
+    <a:masterClrMapping/>
+  </p:clrMapOvr>
+</p:sld>
+</file>
+
+<file path=ppt/slides/slide9.xml><?xml version="1.0" encoding="utf-8"?>
+<p:sld xmlns:a="http://schemas.openxmlformats.org/drawingml/2006/main" xmlns:r="http://schemas.openxmlformats.org/officeDocument/2006/relationships" xmlns:p="http://schemas.openxmlformats.org/presentationml/2006/main">
+  <p:cSld name="Slide 9">
+    <p:bg>
+      <p:bgPr>
+        <a:solidFill>
+          <a:srgbClr val="FFFFFF"/>
+        </a:solidFill>
+      </p:bgPr>
+    </p:bg>
+    <p:spTree>
+      <p:nvGrpSpPr>
+        <p:cNvPr id="1" name=""/>
+        <p:cNvGrpSpPr/>
+        <p:nvPr/>
+      </p:nvGrpSpPr>
+      <p:grpSpPr>
+        <a:xfrm>
+          <a:off x="0" y="0"/>
+          <a:ext cx="0" cy="0"/>
+          <a:chOff x="0" y="0"/>
+          <a:chExt cx="0" cy="0"/>
+        </a:xfrm>
+      </p:grpSpPr>
+      <p:sp>
+        <p:nvSpPr>
+          <p:cNvPr id="2" name="Shape 0"/>
+          <p:cNvSpPr/>
+          <p:nvPr/>
+        </p:nvSpPr>
+        <p:spPr>
+          <a:xfrm>
+            <a:off x="548640" y="566928"/>
+            <a:ext cx="475488" cy="475488"/>
+          </a:xfrm>
+          <a:prstGeom prst="ellipse">
+            <a:avLst/>
+          </a:prstGeom>
+          <a:solidFill>
+            <a:srgbClr val="2F7D62"/>
+          </a:solidFill>
+          <a:ln/>
+        </p:spPr>
+      </p:sp>
+      <p:sp>
+        <p:nvSpPr>
+          <p:cNvPr id="3" name="Text 1"/>
+          <p:cNvSpPr txBox="1"/>
+          <p:nvPr/>
+        </p:nvSpPr>
+        <p:spPr>
+          <a:xfrm>
+            <a:off x="548640" y="566928"/>
+            <a:ext cx="475488" cy="475488"/>
+          </a:xfrm>
+          <a:prstGeom prst="rect">
+            <a:avLst/>
+          </a:prstGeom>
+          <a:noFill/>
+          <a:ln/>
+        </p:spPr>
+        <p:txBody>
+          <a:bodyPr wrap="square" lIns="0" tIns="0" rIns="0" bIns="0" rtlCol="0" anchor="ctr"/>
+          <a:lstStyle/>
+          <a:p>
+            <a:pPr algn="ctr" indent="0" marL="0">
+              <a:buNone/>
+            </a:pPr>
+            <a:r>
+              <a:rPr lang="en-US" sz="1600" b="1" dirty="0">
+                <a:solidFill>
+                  <a:srgbClr val="FFFFFF"/>
+                </a:solidFill>
+                <a:latin typeface="Calibri" pitchFamily="34" charset="0"/>
+                <a:ea typeface="Calibri" pitchFamily="34" charset="-122"/>
+                <a:cs typeface="Calibri" pitchFamily="34" charset="-120"/>
+              </a:rPr>
+              <a:t>2</a:t>
+            </a:r>
+            <a:endParaRPr lang="en-US" sz="1600" dirty="0"/>
+          </a:p>
+        </p:txBody>
+      </p:sp>
+      <p:sp>
+        <p:nvSpPr>
+          <p:cNvPr id="4" name="Text 2"/>
+          <p:cNvSpPr txBox="1"/>
+          <p:nvPr/>
+        </p:nvSpPr>
+        <p:spPr>
+          <a:xfrm>
+            <a:off x="1280160" y="164592"/>
+            <a:ext cx="10362895" cy="274320"/>
+          </a:xfrm>
+          <a:prstGeom prst="rect">
+            <a:avLst/>
+          </a:prstGeom>
+          <a:noFill/>
+          <a:ln/>
+        </p:spPr>
+        <p:txBody>
+          <a:bodyPr wrap="square" lIns="0" tIns="0" rIns="0" bIns="0" rtlCol="0" anchor="ctr"/>
+          <a:lstStyle/>
+          <a:p>
+            <a:pPr indent="0" marL="0">
+              <a:buNone/>
+            </a:pPr>
+            <a:r>
+              <a:rPr lang="en-US" sz="1200" b="1" spc="200" kern="0" dirty="0">
+                <a:solidFill>
+                  <a:srgbClr val="2F7D62"/>
+                </a:solidFill>
+                <a:latin typeface="Calibri" pitchFamily="34" charset="0"/>
+                <a:ea typeface="Calibri" pitchFamily="34" charset="-122"/>
+                <a:cs typeface="Calibri" pitchFamily="34" charset="-120"/>
+              </a:rPr>
+              <a:t>L'ESSENTIEL DE CHAQUE BIBLIOTHÈQUE</a:t>
+            </a:r>
+            <a:endParaRPr lang="en-US" sz="1200" dirty="0"/>
+          </a:p>
+        </p:txBody>
+      </p:sp>
+      <p:sp>
+        <p:nvSpPr>
+          <p:cNvPr id="5" name="Text 3"/>
+          <p:cNvSpPr txBox="1"/>
+          <p:nvPr/>
+        </p:nvSpPr>
+        <p:spPr>
+          <a:xfrm>
+            <a:off x="1280160" y="457200"/>
+            <a:ext cx="10362895" cy="694944"/>
+          </a:xfrm>
+          <a:prstGeom prst="rect">
+            <a:avLst/>
+          </a:prstGeom>
+          <a:noFill/>
+          <a:ln/>
+        </p:spPr>
+        <p:txBody>
+          <a:bodyPr wrap="square" lIns="0" tIns="0" rIns="0" bIns="0" rtlCol="0" anchor="ctr"/>
+          <a:lstStyle/>
+          <a:p>
+            <a:pPr indent="0" marL="0">
+              <a:buNone/>
+            </a:pPr>
+            <a:r>
+              <a:rPr lang="en-US" sz="3000" b="1" dirty="0">
+                <a:solidFill>
+                  <a:srgbClr val="1F3A5F"/>
+                </a:solidFill>
+                <a:latin typeface="Cambria" pitchFamily="34" charset="0"/>
+                <a:ea typeface="Cambria" pitchFamily="34" charset="-122"/>
+                <a:cs typeface="Cambria" pitchFamily="34" charset="-120"/>
+              </a:rPr>
+              <a:t>matplotlib : une figure, un Axes</a:t>
+            </a:r>
+            <a:endParaRPr lang="en-US" sz="3000" dirty="0"/>
+          </a:p>
+        </p:txBody>
+      </p:sp>
+      <p:sp>
+        <p:nvSpPr>
+          <p:cNvPr id="6" name="Shape 4"/>
+          <p:cNvSpPr/>
+          <p:nvPr/>
+        </p:nvSpPr>
+        <p:spPr>
+          <a:xfrm>
+            <a:off x="548640" y="1417320"/>
+            <a:ext cx="4835098" cy="1461516"/>
+          </a:xfrm>
+          <a:prstGeom prst="rect">
+            <a:avLst/>
+          </a:prstGeom>
+          <a:solidFill>
+            <a:srgbClr val="F3F4F6"/>
+          </a:solidFill>
+          <a:ln/>
+        </p:spPr>
+      </p:sp>
+      <p:sp>
+        <p:nvSpPr>
+          <p:cNvPr id="7" name="Text 5"/>
+          <p:cNvSpPr txBox="1"/>
+          <p:nvPr/>
+        </p:nvSpPr>
+        <p:spPr>
+          <a:xfrm>
+            <a:off x="731520" y="1563624"/>
+            <a:ext cx="4469338" cy="1168908"/>
+          </a:xfrm>
+          <a:prstGeom prst="rect">
+            <a:avLst/>
+          </a:prstGeom>
+          <a:noFill/>
+          <a:ln/>
+        </p:spPr>
+        <p:txBody>
+          <a:bodyPr wrap="square" lIns="0" tIns="0" rIns="0" bIns="0" rtlCol="0" anchor="t"/>
+          <a:lstStyle/>
           <a:p>
             <a:pPr indent="0" marL="0">
               <a:lnSpc>
@@ -11771,6 +13475,106 @@
                 <a:ea typeface="Courier New" pitchFamily="34" charset="-122"/>
                 <a:cs typeface="Courier New" pitchFamily="34" charset="-120"/>
               </a:rPr>
+              <a:t>fig, ax = plt.subplots(figsize=(8, 4))</a:t>
+            </a:r>
+            <a:endParaRPr lang="en-US" sz="1300" dirty="0"/>
+          </a:p>
+          <a:p>
+            <a:pPr indent="0" marL="0">
+              <a:lnSpc>
+                <a:spcPct val="100000"/>
+              </a:lnSpc>
+              <a:buNone/>
+            </a:pPr>
+            <a:r>
+              <a:rPr lang="en-US" sz="1300" dirty="0">
+                <a:solidFill>
+                  <a:srgbClr val="1F2933"/>
+                </a:solidFill>
+                <a:latin typeface="Courier New" pitchFamily="34" charset="0"/>
+                <a:ea typeface="Courier New" pitchFamily="34" charset="-122"/>
+                <a:cs typeface="Courier New" pitchFamily="34" charset="-120"/>
+              </a:rPr>
+              <a:t>ax.plot(mensuel.index, mensuel.values,</a:t>
+            </a:r>
+            <a:endParaRPr lang="en-US" sz="1300" dirty="0"/>
+          </a:p>
+          <a:p>
+            <a:pPr indent="0" marL="0">
+              <a:lnSpc>
+                <a:spcPct val="100000"/>
+              </a:lnSpc>
+              <a:buNone/>
+            </a:pPr>
+            <a:r>
+              <a:rPr lang="en-US" sz="1300" dirty="0">
+                <a:solidFill>
+                  <a:srgbClr val="1F2933"/>
+                </a:solidFill>
+                <a:latin typeface="Courier New" pitchFamily="34" charset="0"/>
+                <a:ea typeface="Courier New" pitchFamily="34" charset="-122"/>
+                <a:cs typeface="Courier New" pitchFamily="34" charset="-120"/>
+              </a:rPr>
+              <a:t>        marker="o")</a:t>
+            </a:r>
+            <a:endParaRPr lang="en-US" sz="1300" dirty="0"/>
+          </a:p>
+          <a:p>
+            <a:pPr indent="0" marL="0">
+              <a:lnSpc>
+                <a:spcPct val="100000"/>
+              </a:lnSpc>
+              <a:buNone/>
+            </a:pPr>
+            <a:r>
+              <a:rPr lang="en-US" sz="1300" dirty="0">
+                <a:solidFill>
+                  <a:srgbClr val="1F2933"/>
+                </a:solidFill>
+                <a:latin typeface="Courier New" pitchFamily="34" charset="0"/>
+                <a:ea typeface="Courier New" pitchFamily="34" charset="-122"/>
+                <a:cs typeface="Courier New" pitchFamily="34" charset="-120"/>
+              </a:rPr>
+              <a:t>ax.set_title("Chiffre d'affaires mensuel")</a:t>
+            </a:r>
+            <a:endParaRPr lang="en-US" sz="1300" dirty="0"/>
+          </a:p>
+          <a:p>
+            <a:pPr indent="0" marL="0">
+              <a:lnSpc>
+                <a:spcPct val="100000"/>
+              </a:lnSpc>
+              <a:buNone/>
+            </a:pPr>
+            <a:r>
+              <a:rPr lang="en-US" sz="1300" dirty="0">
+                <a:solidFill>
+                  <a:srgbClr val="1F2933"/>
+                </a:solidFill>
+                <a:latin typeface="Courier New" pitchFamily="34" charset="0"/>
+                <a:ea typeface="Courier New" pitchFamily="34" charset="-122"/>
+                <a:cs typeface="Courier New" pitchFamily="34" charset="-120"/>
+              </a:rPr>
+              <a:t>ax.set_ylabel("euros")</a:t>
+            </a:r>
+            <a:endParaRPr lang="en-US" sz="1300" dirty="0"/>
+          </a:p>
+          <a:p>
+            <a:pPr indent="0" marL="0">
+              <a:lnSpc>
+                <a:spcPct val="100000"/>
+              </a:lnSpc>
+              <a:buNone/>
+            </a:pPr>
+            <a:r>
+              <a:rPr lang="en-US" sz="1300" dirty="0">
+                <a:solidFill>
+                  <a:srgbClr val="1F2933"/>
+                </a:solidFill>
+                <a:latin typeface="Courier New" pitchFamily="34" charset="0"/>
+                <a:ea typeface="Courier New" pitchFamily="34" charset="-122"/>
+                <a:cs typeface="Courier New" pitchFamily="34" charset="-120"/>
+              </a:rPr>
               <a:t>ax.set_ylim(0, 65000)</a:t>
             </a:r>
             <a:endParaRPr lang="en-US" sz="1300" dirty="0"/>
@@ -11779,7 +13583,7 @@
       </p:sp>
       <p:graphicFrame>
         <p:nvGraphicFramePr>
-          <p:cNvPr id="9" name="Table 0"/>
+          <p:cNvPr id="10" name="Table 0"/>
           <p:cNvGraphicFramePr>
             <a:graphicFrameLocks noGrp="1"/>
           </p:cNvGraphicFramePr>
@@ -12671,721 +14475,6 @@
       <p:sp>
         <p:nvSpPr>
           <p:cNvPr id="12" name="Text 8"/>
-          <p:cNvSpPr txBox="1"/>
-          <p:nvPr/>
-        </p:nvSpPr>
-        <p:spPr>
-          <a:xfrm>
-            <a:off x="548640" y="6400800"/>
-            <a:ext cx="7315200" cy="274320"/>
-          </a:xfrm>
-          <a:prstGeom prst="rect">
-            <a:avLst/>
-          </a:prstGeom>
-          <a:noFill/>
-          <a:ln/>
-        </p:spPr>
-        <p:txBody>
-          <a:bodyPr wrap="square" lIns="0" tIns="0" rIns="0" bIns="0" rtlCol="0" anchor="ctr"/>
-          <a:lstStyle/>
-          <a:p>
-            <a:pPr indent="0" marL="0">
-              <a:buNone/>
-            </a:pPr>
-            <a:r>
-              <a:rPr lang="en-US" sz="1000" dirty="0">
-                <a:solidFill>
-                  <a:srgbClr val="6B7280"/>
-                </a:solidFill>
-                <a:latin typeface="Calibri" pitchFamily="34" charset="0"/>
-                <a:ea typeface="Calibri" pitchFamily="34" charset="-122"/>
-                <a:cs typeface="Calibri" pitchFamily="34" charset="-120"/>
-              </a:rPr>
-              <a:t>Analyse de données avec Python   |   Visualisation, version mini</a:t>
-            </a:r>
-            <a:endParaRPr lang="en-US" sz="1000" dirty="0"/>
-          </a:p>
-        </p:txBody>
-      </p:sp>
-      <p:sp>
-        <p:nvSpPr>
-          <p:cNvPr id="25" name="Slide Number Placeholder 0"/>
-          <p:cNvSpPr>
-            <a:spLocks noGrp="1"/>
-          </p:cNvSpPr>
-          <p:nvPr>
-            <p:ph type="sldNum" sz="quarter" idx="4294967295"/>
-          </p:nvPr>
-        </p:nvSpPr>
-        <p:spPr>
-          <a:xfrm>
-            <a:off x="11094415" y="6400800"/>
-            <a:ext cx="548640" cy="274320"/>
-          </a:xfrm>
-          <a:prstGeom prst="rect">
-            <a:avLst/>
-          </a:prstGeom>
-          <a:extLst>
-            <a:ext uri="{C572A759-6A51-4108-AA02-DFA0A04FC94B}">
-              <ma14:wrappingTextBoxFlag xmlns:ma14="http://schemas.microsoft.com/office/mac/drawingml/2011/main" val="0"/>
-            </a:ext>
-          </a:extLst>
-        </p:spPr>
-        <p:txBody>
-          <a:bodyPr/>
-          <a:lstStyle>
-            <a:lvl1pPr>
-              <a:defRPr sz="1000">
-                <a:solidFill>
-                  <a:srgbClr val="6B7280"/>
-                </a:solidFill>
-                <a:latin typeface="Calibri"/>
-                <a:ea typeface="Calibri"/>
-                <a:cs typeface="Calibri"/>
-              </a:defRPr>
-            </a:lvl1pPr>
-          </a:lstStyle>
-          <a:p>
-            <a:pPr algn="r"/>
-            <a:fld id="{F7021451-1387-4CA6-816F-3879F97B5CBC}" type="slidenum">
-              <a:rPr b="0" lang="en-US"/>
-              <a:t>8</a:t>
-            </a:fld>
-            <a:endParaRPr lang="en-US"/>
-          </a:p>
-        </p:txBody>
-      </p:sp>
-    </p:spTree>
-  </p:cSld>
-  <p:clrMapOvr>
-    <a:masterClrMapping/>
-  </p:clrMapOvr>
-</p:sld>
-</file>
-
-<file path=ppt/slides/slide9.xml><?xml version="1.0" encoding="utf-8"?>
-<p:sld xmlns:a="http://schemas.openxmlformats.org/drawingml/2006/main" xmlns:r="http://schemas.openxmlformats.org/officeDocument/2006/relationships" xmlns:p="http://schemas.openxmlformats.org/presentationml/2006/main">
-  <p:cSld name="Slide 9">
-    <p:bg>
-      <p:bgPr>
-        <a:solidFill>
-          <a:srgbClr val="FFFFFF"/>
-        </a:solidFill>
-      </p:bgPr>
-    </p:bg>
-    <p:spTree>
-      <p:nvGrpSpPr>
-        <p:cNvPr id="1" name=""/>
-        <p:cNvGrpSpPr/>
-        <p:nvPr/>
-      </p:nvGrpSpPr>
-      <p:grpSpPr>
-        <a:xfrm>
-          <a:off x="0" y="0"/>
-          <a:ext cx="0" cy="0"/>
-          <a:chOff x="0" y="0"/>
-          <a:chExt cx="0" cy="0"/>
-        </a:xfrm>
-      </p:grpSpPr>
-      <p:sp>
-        <p:nvSpPr>
-          <p:cNvPr id="2" name="Shape 0"/>
-          <p:cNvSpPr/>
-          <p:nvPr/>
-        </p:nvSpPr>
-        <p:spPr>
-          <a:xfrm>
-            <a:off x="548640" y="566928"/>
-            <a:ext cx="475488" cy="475488"/>
-          </a:xfrm>
-          <a:prstGeom prst="ellipse">
-            <a:avLst/>
-          </a:prstGeom>
-          <a:solidFill>
-            <a:srgbClr val="2F7D62"/>
-          </a:solidFill>
-          <a:ln/>
-        </p:spPr>
-      </p:sp>
-      <p:sp>
-        <p:nvSpPr>
-          <p:cNvPr id="3" name="Text 1"/>
-          <p:cNvSpPr txBox="1"/>
-          <p:nvPr/>
-        </p:nvSpPr>
-        <p:spPr>
-          <a:xfrm>
-            <a:off x="548640" y="566928"/>
-            <a:ext cx="475488" cy="475488"/>
-          </a:xfrm>
-          <a:prstGeom prst="rect">
-            <a:avLst/>
-          </a:prstGeom>
-          <a:noFill/>
-          <a:ln/>
-        </p:spPr>
-        <p:txBody>
-          <a:bodyPr wrap="square" lIns="0" tIns="0" rIns="0" bIns="0" rtlCol="0" anchor="ctr"/>
-          <a:lstStyle/>
-          <a:p>
-            <a:pPr algn="ctr" indent="0" marL="0">
-              <a:buNone/>
-            </a:pPr>
-            <a:r>
-              <a:rPr lang="en-US" sz="1600" b="1" dirty="0">
-                <a:solidFill>
-                  <a:srgbClr val="FFFFFF"/>
-                </a:solidFill>
-                <a:latin typeface="Calibri" pitchFamily="34" charset="0"/>
-                <a:ea typeface="Calibri" pitchFamily="34" charset="-122"/>
-                <a:cs typeface="Calibri" pitchFamily="34" charset="-120"/>
-              </a:rPr>
-              <a:t>2</a:t>
-            </a:r>
-            <a:endParaRPr lang="en-US" sz="1600" dirty="0"/>
-          </a:p>
-        </p:txBody>
-      </p:sp>
-      <p:sp>
-        <p:nvSpPr>
-          <p:cNvPr id="4" name="Text 2"/>
-          <p:cNvSpPr txBox="1"/>
-          <p:nvPr/>
-        </p:nvSpPr>
-        <p:spPr>
-          <a:xfrm>
-            <a:off x="1280160" y="164592"/>
-            <a:ext cx="10362895" cy="274320"/>
-          </a:xfrm>
-          <a:prstGeom prst="rect">
-            <a:avLst/>
-          </a:prstGeom>
-          <a:noFill/>
-          <a:ln/>
-        </p:spPr>
-        <p:txBody>
-          <a:bodyPr wrap="square" lIns="0" tIns="0" rIns="0" bIns="0" rtlCol="0" anchor="ctr"/>
-          <a:lstStyle/>
-          <a:p>
-            <a:pPr indent="0" marL="0">
-              <a:buNone/>
-            </a:pPr>
-            <a:r>
-              <a:rPr lang="en-US" sz="1200" b="1" spc="200" kern="0" dirty="0">
-                <a:solidFill>
-                  <a:srgbClr val="2F7D62"/>
-                </a:solidFill>
-                <a:latin typeface="Calibri" pitchFamily="34" charset="0"/>
-                <a:ea typeface="Calibri" pitchFamily="34" charset="-122"/>
-                <a:cs typeface="Calibri" pitchFamily="34" charset="-120"/>
-              </a:rPr>
-              <a:t>L'ESSENTIEL DE CHAQUE BIBLIOTHÈQUE</a:t>
-            </a:r>
-            <a:endParaRPr lang="en-US" sz="1200" dirty="0"/>
-          </a:p>
-        </p:txBody>
-      </p:sp>
-      <p:sp>
-        <p:nvSpPr>
-          <p:cNvPr id="5" name="Text 3"/>
-          <p:cNvSpPr txBox="1"/>
-          <p:nvPr/>
-        </p:nvSpPr>
-        <p:spPr>
-          <a:xfrm>
-            <a:off x="1280160" y="457200"/>
-            <a:ext cx="10362895" cy="694944"/>
-          </a:xfrm>
-          <a:prstGeom prst="rect">
-            <a:avLst/>
-          </a:prstGeom>
-          <a:noFill/>
-          <a:ln/>
-        </p:spPr>
-        <p:txBody>
-          <a:bodyPr wrap="square" lIns="0" tIns="0" rIns="0" bIns="0" rtlCol="0" anchor="ctr"/>
-          <a:lstStyle/>
-          <a:p>
-            <a:pPr indent="0" marL="0">
-              <a:buNone/>
-            </a:pPr>
-            <a:r>
-              <a:rPr lang="en-US" sz="3000" b="1" dirty="0">
-                <a:solidFill>
-                  <a:srgbClr val="1F3A5F"/>
-                </a:solidFill>
-                <a:latin typeface="Cambria" pitchFamily="34" charset="0"/>
-                <a:ea typeface="Cambria" pitchFamily="34" charset="-122"/>
-                <a:cs typeface="Cambria" pitchFamily="34" charset="-120"/>
-              </a:rPr>
-              <a:t>seaborn : des statistiques en une ligne</a:t>
-            </a:r>
-            <a:endParaRPr lang="en-US" sz="3000" dirty="0"/>
-          </a:p>
-        </p:txBody>
-      </p:sp>
-      <p:sp>
-        <p:nvSpPr>
-          <p:cNvPr id="6" name="Shape 4"/>
-          <p:cNvSpPr/>
-          <p:nvPr/>
-        </p:nvSpPr>
-        <p:spPr>
-          <a:xfrm>
-            <a:off x="548640" y="1417320"/>
-            <a:ext cx="5318608" cy="1131824"/>
-          </a:xfrm>
-          <a:prstGeom prst="rect">
-            <a:avLst/>
-          </a:prstGeom>
-          <a:solidFill>
-            <a:srgbClr val="F3F4F6"/>
-          </a:solidFill>
-          <a:ln/>
-        </p:spPr>
-      </p:sp>
-      <p:sp>
-        <p:nvSpPr>
-          <p:cNvPr id="7" name="Text 5"/>
-          <p:cNvSpPr txBox="1"/>
-          <p:nvPr/>
-        </p:nvSpPr>
-        <p:spPr>
-          <a:xfrm>
-            <a:off x="731520" y="1563624"/>
-            <a:ext cx="4952848" cy="839216"/>
-          </a:xfrm>
-          <a:prstGeom prst="rect">
-            <a:avLst/>
-          </a:prstGeom>
-          <a:noFill/>
-          <a:ln/>
-        </p:spPr>
-        <p:txBody>
-          <a:bodyPr wrap="square" lIns="0" tIns="0" rIns="0" bIns="0" rtlCol="0" anchor="t"/>
-          <a:lstStyle/>
-          <a:p>
-            <a:pPr indent="0" marL="0">
-              <a:lnSpc>
-                <a:spcPct val="100000"/>
-              </a:lnSpc>
-              <a:buNone/>
-            </a:pPr>
-            <a:r>
-              <a:rPr lang="en-US" sz="1400" dirty="0">
-                <a:solidFill>
-                  <a:srgbClr val="1F2933"/>
-                </a:solidFill>
-                <a:latin typeface="Courier New" pitchFamily="34" charset="0"/>
-                <a:ea typeface="Courier New" pitchFamily="34" charset="-122"/>
-                <a:cs typeface="Courier New" pitchFamily="34" charset="-120"/>
-              </a:rPr>
-              <a:t>sns.set_theme(style="whitegrid")</a:t>
-            </a:r>
-            <a:endParaRPr lang="en-US" sz="1400" dirty="0"/>
-          </a:p>
-          <a:p>
-            <a:pPr indent="0" marL="0">
-              <a:lnSpc>
-                <a:spcPct val="100000"/>
-              </a:lnSpc>
-              <a:buNone/>
-            </a:pPr>
-            <a:r>
-              <a:rPr lang="en-US" sz="1400" dirty="0">
-                <a:solidFill>
-                  <a:srgbClr val="1F2933"/>
-                </a:solidFill>
-                <a:latin typeface="Courier New" pitchFamily="34" charset="0"/>
-                <a:ea typeface="Courier New" pitchFamily="34" charset="-122"/>
-                <a:cs typeface="Courier New" pitchFamily="34" charset="-120"/>
-              </a:rPr>
-              <a:t> </a:t>
-            </a:r>
-            <a:endParaRPr lang="en-US" sz="1400" dirty="0"/>
-          </a:p>
-          <a:p>
-            <a:pPr indent="0" marL="0">
-              <a:lnSpc>
-                <a:spcPct val="100000"/>
-              </a:lnSpc>
-              <a:buNone/>
-            </a:pPr>
-            <a:r>
-              <a:rPr lang="en-US" sz="1400" dirty="0">
-                <a:solidFill>
-                  <a:srgbClr val="1F2933"/>
-                </a:solidFill>
-                <a:latin typeface="Courier New" pitchFamily="34" charset="0"/>
-                <a:ea typeface="Courier New" pitchFamily="34" charset="-122"/>
-                <a:cs typeface="Courier New" pitchFamily="34" charset="-120"/>
-              </a:rPr>
-              <a:t>sns.boxplot(data=ventes, x="categorie",</a:t>
-            </a:r>
-            <a:endParaRPr lang="en-US" sz="1400" dirty="0"/>
-          </a:p>
-          <a:p>
-            <a:pPr indent="0" marL="0">
-              <a:lnSpc>
-                <a:spcPct val="100000"/>
-              </a:lnSpc>
-              <a:buNone/>
-            </a:pPr>
-            <a:r>
-              <a:rPr lang="en-US" sz="1400" dirty="0">
-                <a:solidFill>
-                  <a:srgbClr val="1F2933"/>
-                </a:solidFill>
-                <a:latin typeface="Courier New" pitchFamily="34" charset="0"/>
-                <a:ea typeface="Courier New" pitchFamily="34" charset="-122"/>
-                <a:cs typeface="Courier New" pitchFamily="34" charset="-120"/>
-              </a:rPr>
-              <a:t>            y="montant", ax=ax)</a:t>
-            </a:r>
-            <a:endParaRPr lang="en-US" sz="1400" dirty="0"/>
-          </a:p>
-        </p:txBody>
-      </p:sp>
-      <p:pic>
-        <p:nvPicPr>
-          <p:cNvPr id="8" name="Image 0" descr="Boîtes à moustaches du montant des commandes par catégorie">    </p:cNvPr>
-          <p:cNvPicPr>
-            <a:picLocks noChangeAspect="1"/>
-          </p:cNvPicPr>
-          <p:nvPr/>
-        </p:nvPicPr>
-        <p:blipFill>
-          <a:blip r:embed="rId1"/>
-          <a:stretch>
-            <a:fillRect/>
-          </a:stretch>
-        </p:blipFill>
-        <p:spPr>
-          <a:xfrm>
-            <a:off x="1191875" y="2869184"/>
-            <a:ext cx="4032138" cy="2377440"/>
-          </a:xfrm>
-          <a:prstGeom prst="rect">
-            <a:avLst/>
-          </a:prstGeom>
-        </p:spPr>
-      </p:pic>
-      <p:sp>
-        <p:nvSpPr>
-          <p:cNvPr id="9" name="Shape 6"/>
-          <p:cNvSpPr/>
-          <p:nvPr/>
-        </p:nvSpPr>
-        <p:spPr>
-          <a:xfrm>
-            <a:off x="6324448" y="1417320"/>
-            <a:ext cx="5318608" cy="712216"/>
-          </a:xfrm>
-          <a:prstGeom prst="rect">
-            <a:avLst/>
-          </a:prstGeom>
-          <a:solidFill>
-            <a:srgbClr val="F3F4F6"/>
-          </a:solidFill>
-          <a:ln/>
-        </p:spPr>
-      </p:sp>
-      <p:sp>
-        <p:nvSpPr>
-          <p:cNvPr id="10" name="Text 7"/>
-          <p:cNvSpPr txBox="1"/>
-          <p:nvPr/>
-        </p:nvSpPr>
-        <p:spPr>
-          <a:xfrm>
-            <a:off x="6507328" y="1563624"/>
-            <a:ext cx="4952848" cy="419608"/>
-          </a:xfrm>
-          <a:prstGeom prst="rect">
-            <a:avLst/>
-          </a:prstGeom>
-          <a:noFill/>
-          <a:ln/>
-        </p:spPr>
-        <p:txBody>
-          <a:bodyPr wrap="square" lIns="0" tIns="0" rIns="0" bIns="0" rtlCol="0" anchor="t"/>
-          <a:lstStyle/>
-          <a:p>
-            <a:pPr indent="0" marL="0">
-              <a:lnSpc>
-                <a:spcPct val="100000"/>
-              </a:lnSpc>
-              <a:buNone/>
-            </a:pPr>
-            <a:r>
-              <a:rPr lang="en-US" sz="1400" dirty="0">
-                <a:solidFill>
-                  <a:srgbClr val="1F2933"/>
-                </a:solidFill>
-                <a:latin typeface="Courier New" pitchFamily="34" charset="0"/>
-                <a:ea typeface="Courier New" pitchFamily="34" charset="-122"/>
-                <a:cs typeface="Courier New" pitchFamily="34" charset="-120"/>
-              </a:rPr>
-              <a:t>sns.heatmap(taux, annot=True, fmt=".0%",</a:t>
-            </a:r>
-            <a:endParaRPr lang="en-US" sz="1400" dirty="0"/>
-          </a:p>
-          <a:p>
-            <a:pPr indent="0" marL="0">
-              <a:lnSpc>
-                <a:spcPct val="100000"/>
-              </a:lnSpc>
-              <a:buNone/>
-            </a:pPr>
-            <a:r>
-              <a:rPr lang="en-US" sz="1400" dirty="0">
-                <a:solidFill>
-                  <a:srgbClr val="1F2933"/>
-                </a:solidFill>
-                <a:latin typeface="Courier New" pitchFamily="34" charset="0"/>
-                <a:ea typeface="Courier New" pitchFamily="34" charset="-122"/>
-                <a:cs typeface="Courier New" pitchFamily="34" charset="-120"/>
-              </a:rPr>
-              <a:t>            cmap="RdBu", center=1, ax=ax)</a:t>
-            </a:r>
-            <a:endParaRPr lang="en-US" sz="1400" dirty="0"/>
-          </a:p>
-        </p:txBody>
-      </p:sp>
-      <p:pic>
-        <p:nvPicPr>
-          <p:cNvPr id="11" name="Image 1" descr="Heatmap du taux de réalisation de l'objectif par région et par mois">    </p:cNvPr>
-          <p:cNvPicPr>
-            <a:picLocks noChangeAspect="1"/>
-          </p:cNvPicPr>
-          <p:nvPr/>
-        </p:nvPicPr>
-        <p:blipFill>
-          <a:blip r:embed="rId2"/>
-          <a:stretch>
-            <a:fillRect/>
-          </a:stretch>
-        </p:blipFill>
-        <p:spPr>
-          <a:xfrm>
-            <a:off x="6324448" y="2449576"/>
-            <a:ext cx="5318608" cy="2337849"/>
-          </a:xfrm>
-          <a:prstGeom prst="rect">
-            <a:avLst/>
-          </a:prstGeom>
-        </p:spPr>
-      </p:pic>
-      <p:sp>
-        <p:nvSpPr>
-          <p:cNvPr id="12" name="Text 8"/>
-          <p:cNvSpPr txBox="1"/>
-          <p:nvPr/>
-        </p:nvSpPr>
-        <p:spPr>
-          <a:xfrm>
-            <a:off x="548640" y="5566664"/>
-            <a:ext cx="11094415" cy="594360"/>
-          </a:xfrm>
-          <a:prstGeom prst="rect">
-            <a:avLst/>
-          </a:prstGeom>
-          <a:noFill/>
-          <a:ln/>
-        </p:spPr>
-        <p:txBody>
-          <a:bodyPr wrap="square" lIns="0" tIns="0" rIns="0" bIns="0" rtlCol="0" anchor="t"/>
-          <a:lstStyle/>
-          <a:p>
-            <a:pPr indent="0" marL="0">
-              <a:buNone/>
-            </a:pPr>
-            <a:r>
-              <a:rPr lang="en-US" sz="1500" dirty="0">
-                <a:solidFill>
-                  <a:srgbClr val="6B7280"/>
-                </a:solidFill>
-                <a:latin typeface="Calibri" pitchFamily="34" charset="0"/>
-                <a:ea typeface="Calibri" pitchFamily="34" charset="-122"/>
-                <a:cs typeface="Calibri" pitchFamily="34" charset="-120"/>
-              </a:rPr>
-              <a:t>Autres classiques : </a:t>
-            </a:r>
-            <a:pPr indent="0" marL="0">
-              <a:buNone/>
-            </a:pPr>
-            <a:r>
-              <a:rPr lang="en-US" sz="1500" dirty="0">
-                <a:solidFill>
-                  <a:srgbClr val="1F3A5F"/>
-                </a:solidFill>
-                <a:latin typeface="Courier New" pitchFamily="34" charset="0"/>
-                <a:ea typeface="Courier New" pitchFamily="34" charset="-122"/>
-                <a:cs typeface="Courier New" pitchFamily="34" charset="-120"/>
-              </a:rPr>
-              <a:t>histplot</a:t>
-            </a:r>
-            <a:pPr indent="0" marL="0">
-              <a:buNone/>
-            </a:pPr>
-            <a:r>
-              <a:rPr lang="en-US" sz="1500" dirty="0">
-                <a:solidFill>
-                  <a:srgbClr val="6B7280"/>
-                </a:solidFill>
-                <a:latin typeface="Calibri" pitchFamily="34" charset="0"/>
-                <a:ea typeface="Calibri" pitchFamily="34" charset="-122"/>
-                <a:cs typeface="Calibri" pitchFamily="34" charset="-120"/>
-              </a:rPr>
-              <a:t>, </a:t>
-            </a:r>
-            <a:pPr indent="0" marL="0">
-              <a:buNone/>
-            </a:pPr>
-            <a:r>
-              <a:rPr lang="en-US" sz="1500" dirty="0">
-                <a:solidFill>
-                  <a:srgbClr val="1F3A5F"/>
-                </a:solidFill>
-                <a:latin typeface="Courier New" pitchFamily="34" charset="0"/>
-                <a:ea typeface="Courier New" pitchFamily="34" charset="-122"/>
-                <a:cs typeface="Courier New" pitchFamily="34" charset="-120"/>
-              </a:rPr>
-              <a:t>countplot</a:t>
-            </a:r>
-            <a:pPr indent="0" marL="0">
-              <a:buNone/>
-            </a:pPr>
-            <a:r>
-              <a:rPr lang="en-US" sz="1500" dirty="0">
-                <a:solidFill>
-                  <a:srgbClr val="6B7280"/>
-                </a:solidFill>
-                <a:latin typeface="Calibri" pitchFamily="34" charset="0"/>
-                <a:ea typeface="Calibri" pitchFamily="34" charset="-122"/>
-                <a:cs typeface="Calibri" pitchFamily="34" charset="-120"/>
-              </a:rPr>
-              <a:t>, </a:t>
-            </a:r>
-            <a:pPr indent="0" marL="0">
-              <a:buNone/>
-            </a:pPr>
-            <a:r>
-              <a:rPr lang="en-US" sz="1500" dirty="0">
-                <a:solidFill>
-                  <a:srgbClr val="1F3A5F"/>
-                </a:solidFill>
-                <a:latin typeface="Courier New" pitchFamily="34" charset="0"/>
-                <a:ea typeface="Courier New" pitchFamily="34" charset="-122"/>
-                <a:cs typeface="Courier New" pitchFamily="34" charset="-120"/>
-              </a:rPr>
-              <a:t>lineplot</a:t>
-            </a:r>
-            <a:pPr indent="0" marL="0">
-              <a:buNone/>
-            </a:pPr>
-            <a:r>
-              <a:rPr lang="en-US" sz="1500" dirty="0">
-                <a:solidFill>
-                  <a:srgbClr val="6B7280"/>
-                </a:solidFill>
-                <a:latin typeface="Calibri" pitchFamily="34" charset="0"/>
-                <a:ea typeface="Calibri" pitchFamily="34" charset="-122"/>
-                <a:cs typeface="Calibri" pitchFamily="34" charset="-120"/>
-              </a:rPr>
-              <a:t> avec </a:t>
-            </a:r>
-            <a:pPr indent="0" marL="0">
-              <a:buNone/>
-            </a:pPr>
-            <a:r>
-              <a:rPr lang="en-US" sz="1500" dirty="0">
-                <a:solidFill>
-                  <a:srgbClr val="1F3A5F"/>
-                </a:solidFill>
-                <a:latin typeface="Courier New" pitchFamily="34" charset="0"/>
-                <a:ea typeface="Courier New" pitchFamily="34" charset="-122"/>
-                <a:cs typeface="Courier New" pitchFamily="34" charset="-120"/>
-              </a:rPr>
-              <a:t>hue</a:t>
-            </a:r>
-            <a:pPr indent="0" marL="0">
-              <a:buNone/>
-            </a:pPr>
-            <a:r>
-              <a:rPr lang="en-US" sz="1500" dirty="0">
-                <a:solidFill>
-                  <a:srgbClr val="6B7280"/>
-                </a:solidFill>
-                <a:latin typeface="Calibri" pitchFamily="34" charset="0"/>
-                <a:ea typeface="Calibri" pitchFamily="34" charset="-122"/>
-                <a:cs typeface="Calibri" pitchFamily="34" charset="-120"/>
-              </a:rPr>
-              <a:t>, </a:t>
-            </a:r>
-            <a:pPr indent="0" marL="0">
-              <a:buNone/>
-            </a:pPr>
-            <a:r>
-              <a:rPr lang="en-US" sz="1500" dirty="0">
-                <a:solidFill>
-                  <a:srgbClr val="1F3A5F"/>
-                </a:solidFill>
-                <a:latin typeface="Courier New" pitchFamily="34" charset="0"/>
-                <a:ea typeface="Courier New" pitchFamily="34" charset="-122"/>
-                <a:cs typeface="Courier New" pitchFamily="34" charset="-120"/>
-              </a:rPr>
-              <a:t>relplot</a:t>
-            </a:r>
-            <a:pPr indent="0" marL="0">
-              <a:buNone/>
-            </a:pPr>
-            <a:r>
-              <a:rPr lang="en-US" sz="1500" dirty="0">
-                <a:solidFill>
-                  <a:srgbClr val="6B7280"/>
-                </a:solidFill>
-                <a:latin typeface="Calibri" pitchFamily="34" charset="0"/>
-                <a:ea typeface="Calibri" pitchFamily="34" charset="-122"/>
-                <a:cs typeface="Calibri" pitchFamily="34" charset="-120"/>
-              </a:rPr>
-              <a:t> pour un graphique par groupe. Toujours passer </a:t>
-            </a:r>
-            <a:pPr indent="0" marL="0">
-              <a:buNone/>
-            </a:pPr>
-            <a:r>
-              <a:rPr lang="en-US" sz="1500" dirty="0">
-                <a:solidFill>
-                  <a:srgbClr val="1F3A5F"/>
-                </a:solidFill>
-                <a:latin typeface="Courier New" pitchFamily="34" charset="0"/>
-                <a:ea typeface="Courier New" pitchFamily="34" charset="-122"/>
-                <a:cs typeface="Courier New" pitchFamily="34" charset="-120"/>
-              </a:rPr>
-              <a:t>ax=ax</a:t>
-            </a:r>
-            <a:pPr indent="0" marL="0">
-              <a:buNone/>
-            </a:pPr>
-            <a:r>
-              <a:rPr lang="en-US" sz="1500" dirty="0">
-                <a:solidFill>
-                  <a:srgbClr val="6B7280"/>
-                </a:solidFill>
-                <a:latin typeface="Calibri" pitchFamily="34" charset="0"/>
-                <a:ea typeface="Calibri" pitchFamily="34" charset="-122"/>
-                <a:cs typeface="Calibri" pitchFamily="34" charset="-120"/>
-              </a:rPr>
-              <a:t>.</a:t>
-            </a:r>
-            <a:endParaRPr lang="en-US" sz="1500" dirty="0"/>
-          </a:p>
-        </p:txBody>
-      </p:sp>
-      <p:sp>
-        <p:nvSpPr>
-          <p:cNvPr id="13" name="Text 9"/>
           <p:cNvSpPr txBox="1"/>
           <p:nvPr/>
         </p:nvSpPr>
